--- a/poster/QB_Archetypes_Poster_36x24.pptx
+++ b/poster/QB_Archetypes_Poster_36x24.pptx
@@ -4,12 +4,12 @@
   <p:sldMasterIdLst>
     <p:sldMasterId id="2147483648" r:id="rId1"/>
   </p:sldMasterIdLst>
+  <p:notesMasterIdLst>
+    <p:notesMasterId r:id="rId3"/>
+  </p:notesMasterIdLst>
   <p:sldIdLst>
     <p:sldId id="256" r:id="rId2"/>
   </p:sldIdLst>
-  <p:notesMasterIdLst>
-    <p:notesMasterId r:id="rId3"/>
-  </p:notesMasterIdLst>
   <p:sldSz cx="32918400" cy="21945600"/>
   <p:notesSz cx="21945600" cy="32918400"/>
   <p:defaultTextStyle>
@@ -104,13 +104,20 @@
       </a:defRPr>
     </a:lvl9pPr>
   </p:defaultTextStyle>
+  <p:extLst>
+    <p:ext uri="{EFAFB233-063F-42B5-8137-9DF3F51BA10A}">
+      <p15:sldGuideLst xmlns:p15="http://schemas.microsoft.com/office/powerpoint/2012/main"/>
+    </p:ext>
+  </p:extLst>
 </p:presentation>
 </file>
 
 <file path=ppt/charts/chart1.xml><?xml version="1.0" encoding="utf-8"?>
-<c:chartSpace xmlns:c="http://schemas.openxmlformats.org/drawingml/2006/chart" xmlns:a="http://schemas.openxmlformats.org/drawingml/2006/main" xmlns:r="http://schemas.openxmlformats.org/officeDocument/2006/relationships">
+<c:chartSpace xmlns:c="http://schemas.openxmlformats.org/drawingml/2006/chart" xmlns:a="http://schemas.openxmlformats.org/drawingml/2006/main" xmlns:r="http://schemas.openxmlformats.org/officeDocument/2006/relationships" xmlns:c16r2="http://schemas.microsoft.com/office/drawing/2015/06/chart">
   <c:date1904 val="0"/>
+  <c:lang val="en-US"/>
   <c:roundedCorners val="1"/>
+  <c:style val="2"/>
   <c:chart>
     <c:autoTitleDeleted val="1"/>
     <c:plotArea>
@@ -140,40 +147,15 @@
             <a:effectLst/>
           </c:spPr>
           <c:invertIfNegative val="0"/>
-          <c:dLbls>
-            <c:numFmt formatCode="#,##0" sourceLinked="0"/>
-            <c:txPr>
-              <a:bodyPr/>
-              <a:lstStyle/>
-              <a:p>
-                <a:pPr>
-                  <a:defRPr b="0" i="0" strike="noStrike" sz="2000" u="none">
-                    <a:solidFill>
-                      <a:srgbClr val="1C1C1C"/>
-                    </a:solidFill>
-                    <a:latin typeface="Arial"/>
-                  </a:defRPr>
-                </a:pPr>
-              </a:p>
-            </c:txPr>
-            <c:showLegendKey val="0"/>
-            <c:showVal val="1"/>
-            <c:showCatName val="0"/>
-            <c:showSerName val="0"/>
-            <c:showPercent val="0"/>
-            <c:showBubbleSize val="0"/>
-            <c:showLeaderLines val="0"/>
-          </c:dLbls>
           <c:dPt>
             <c:idx val="0"/>
             <c:invertIfNegative val="0"/>
             <c:bubble3D val="0"/>
-            <c:spPr>
-              <a:solidFill>
-                <a:srgbClr val="1F4E96"/>
-              </a:solidFill>
-              <a:effectLst/>
-            </c:spPr>
+            <c:extLst>
+              <c:ext xmlns:c16="http://schemas.microsoft.com/office/drawing/2014/chart" uri="{C3380CC4-5D6E-409C-BE32-E72D297353CC}">
+                <c16:uniqueId val="{00000001-06B1-7F4B-B0D9-15C3C3913BA0}"/>
+              </c:ext>
+            </c:extLst>
           </c:dPt>
           <c:dPt>
             <c:idx val="1"/>
@@ -185,6 +167,11 @@
               </a:solidFill>
               <a:effectLst/>
             </c:spPr>
+            <c:extLst>
+              <c:ext xmlns:c16="http://schemas.microsoft.com/office/drawing/2014/chart" uri="{C3380CC4-5D6E-409C-BE32-E72D297353CC}">
+                <c16:uniqueId val="{00000003-06B1-7F4B-B0D9-15C3C3913BA0}"/>
+              </c:ext>
+            </c:extLst>
           </c:dPt>
           <c:dPt>
             <c:idx val="2"/>
@@ -196,6 +183,11 @@
               </a:solidFill>
               <a:effectLst/>
             </c:spPr>
+            <c:extLst>
+              <c:ext xmlns:c16="http://schemas.microsoft.com/office/drawing/2014/chart" uri="{C3380CC4-5D6E-409C-BE32-E72D297353CC}">
+                <c16:uniqueId val="{00000005-06B1-7F4B-B0D9-15C3C3913BA0}"/>
+              </c:ext>
+            </c:extLst>
           </c:dPt>
           <c:dPt>
             <c:idx val="3"/>
@@ -207,28 +199,68 @@
               </a:solidFill>
               <a:effectLst/>
             </c:spPr>
+            <c:extLst>
+              <c:ext xmlns:c16="http://schemas.microsoft.com/office/drawing/2014/chart" uri="{C3380CC4-5D6E-409C-BE32-E72D297353CC}">
+                <c16:uniqueId val="{00000007-06B1-7F4B-B0D9-15C3C3913BA0}"/>
+              </c:ext>
+            </c:extLst>
           </c:dPt>
+          <c:dLbls>
+            <c:numFmt formatCode="#,##0" sourceLinked="0"/>
+            <c:spPr>
+              <a:noFill/>
+              <a:ln>
+                <a:noFill/>
+              </a:ln>
+              <a:effectLst/>
+            </c:spPr>
+            <c:txPr>
+              <a:bodyPr/>
+              <a:lstStyle/>
+              <a:p>
+                <a:pPr>
+                  <a:defRPr sz="2000" b="0" i="0" u="none" strike="noStrike">
+                    <a:solidFill>
+                      <a:srgbClr val="1C1C1C"/>
+                    </a:solidFill>
+                    <a:latin typeface="Arial"/>
+                  </a:defRPr>
+                </a:pPr>
+                <a:endParaRPr lang="en-US"/>
+              </a:p>
+            </c:txPr>
+            <c:showLegendKey val="0"/>
+            <c:showVal val="1"/>
+            <c:showCatName val="0"/>
+            <c:showSerName val="0"/>
+            <c:showPercent val="0"/>
+            <c:showBubbleSize val="0"/>
+            <c:showLeaderLines val="0"/>
+            <c:extLst>
+              <c:ext xmlns:c15="http://schemas.microsoft.com/office/drawing/2012/chart" uri="{CE6537A1-D6FC-4f65-9D91-7224C49458BB}">
+                <c15:showLeaderLines val="0"/>
+              </c:ext>
+            </c:extLst>
+          </c:dLbls>
           <c:cat>
-            <c:multiLvlStrRef>
+            <c:strRef>
               <c:f>Sheet1!$A$2:$A$5</c:f>
-              <c:multiLvlStrCache>
+              <c:strCache>
                 <c:ptCount val="4"/>
-                <c:lvl>
-                  <c:pt idx="0">
-                    <c:v>Pocket Passer</c:v>
-                  </c:pt>
-                  <c:pt idx="1">
-                    <c:v>Game Manager</c:v>
-                  </c:pt>
-                  <c:pt idx="2">
-                    <c:v>Gunslinger</c:v>
-                  </c:pt>
-                  <c:pt idx="3">
-                    <c:v>Dual Threat</c:v>
-                  </c:pt>
-                </c:lvl>
-              </c:multiLvlStrCache>
-            </c:multiLvlStrRef>
+                <c:pt idx="0">
+                  <c:v>Pocket Passer</c:v>
+                </c:pt>
+                <c:pt idx="1">
+                  <c:v>Game Manager</c:v>
+                </c:pt>
+                <c:pt idx="2">
+                  <c:v>Gunslinger</c:v>
+                </c:pt>
+                <c:pt idx="3">
+                  <c:v>Dual Threat</c:v>
+                </c:pt>
+              </c:strCache>
+            </c:strRef>
           </c:cat>
           <c:val>
             <c:numRef>
@@ -251,36 +283,23 @@
               </c:numCache>
             </c:numRef>
           </c:val>
+          <c:extLst>
+            <c:ext xmlns:c16="http://schemas.microsoft.com/office/drawing/2014/chart" uri="{C3380CC4-5D6E-409C-BE32-E72D297353CC}">
+              <c16:uniqueId val="{00000008-06B1-7F4B-B0D9-15C3C3913BA0}"/>
+            </c:ext>
+          </c:extLst>
         </c:ser>
         <c:dLbls>
-          <c:numFmt formatCode="#,##0" sourceLinked="0"/>
-          <c:txPr>
-            <a:bodyPr/>
-            <a:lstStyle/>
-            <a:p>
-              <a:pPr>
-                <a:defRPr b="0" i="0" strike="noStrike" sz="2000" u="none">
-                  <a:solidFill>
-                    <a:srgbClr val="1C1C1C"/>
-                  </a:solidFill>
-                  <a:latin typeface="Arial"/>
-                </a:defRPr>
-              </a:pPr>
-            </a:p>
-          </c:txPr>
           <c:showLegendKey val="0"/>
           <c:showVal val="1"/>
           <c:showCatName val="0"/>
           <c:showSerName val="0"/>
           <c:showPercent val="0"/>
           <c:showBubbleSize val="0"/>
-          <c:showLeaderLines val="0"/>
         </c:dLbls>
         <c:gapWidth val="150"/>
-        <c:overlap val="0"/>
         <c:axId val="2094734554"/>
         <c:axId val="2094734552"/>
-        <c:axId val="2094734556"/>
       </c:barChart>
       <c:catAx>
         <c:axId val="2094734554"/>
@@ -321,6 +340,7 @@
         <c:crosses val="autoZero"/>
         <c:auto val="1"/>
         <c:lblAlgn val="ctr"/>
+        <c:lblOffset val="100"/>
         <c:noMultiLvlLbl val="1"/>
       </c:catAx>
       <c:valAx>
@@ -385,6 +405,7 @@
     </c:plotArea>
     <c:plotVisOnly val="1"/>
     <c:dispBlanksAs val="span"/>
+    <c:showDLblsOverMax val="1"/>
   </c:chart>
   <c:spPr>
     <a:solidFill>
@@ -423,234 +444,10 @@
           <a:chExt cx="0" cy="0"/>
         </a:xfrm>
       </p:grpSpPr>
-      <p:sp>
-        <p:nvSpPr>
-          <p:cNvPr id="2" name="Header Placeholder 1"/>
-          <p:cNvSpPr>
-            <a:spLocks noGrp="1"/>
-          </p:cNvSpPr>
-          <p:nvPr>
-            <p:ph type="hdr" sz="quarter"/>
-          </p:nvPr>
-        </p:nvSpPr>
-        <p:spPr>
-          <a:xfrm>
-            <a:off x="0" y="0"/>
-            <a:ext cx="2971800" cy="458788"/>
-          </a:xfrm>
-          <a:prstGeom prst="rect">
-            <a:avLst/>
-          </a:prstGeom>
-        </p:spPr>
-        <p:txBody>
-          <a:bodyPr vert="horz" lIns="91440" tIns="45720" rIns="91440" bIns="45720" rtlCol="0"/>
-          <a:lstStyle>
-            <a:lvl1pPr algn="l">
-              <a:defRPr sz="1200"/>
-            </a:lvl1pPr>
-          </a:lstStyle>
-          <a:p>
-            <a:endParaRPr lang="en-US"/>
-          </a:p>
-        </p:txBody>
-      </p:sp>
-      <p:sp>
-        <p:nvSpPr>
-          <p:cNvPr id="3" name="Date Placeholder 2"/>
-          <p:cNvSpPr>
-            <a:spLocks noGrp="1"/>
-          </p:cNvSpPr>
-          <p:nvPr>
-            <p:ph type="dt" idx="1"/>
-          </p:nvPr>
-        </p:nvSpPr>
-        <p:spPr>
-          <a:xfrm>
-            <a:off x="3884613" y="0"/>
-            <a:ext cx="2971800" cy="458788"/>
-          </a:xfrm>
-          <a:prstGeom prst="rect">
-            <a:avLst/>
-          </a:prstGeom>
-        </p:spPr>
-        <p:txBody>
-          <a:bodyPr vert="horz" lIns="91440" tIns="45720" rIns="91440" bIns="45720" rtlCol="0"/>
-          <a:lstStyle>
-            <a:lvl1pPr algn="r">
-              <a:defRPr sz="1200"/>
-            </a:lvl1pPr>
-          </a:lstStyle>
-          <a:p>
-            <a:fld id="{5282F153-3F37-0F45-9E97-73ACFA13230C}" type="datetimeFigureOut">
-              <a:rPr lang="en-US"/>
-              <a:t>7/23/19</a:t>
-            </a:fld>
-            <a:endParaRPr lang="en-US"/>
-          </a:p>
-        </p:txBody>
-      </p:sp>
-      <p:sp>
-        <p:nvSpPr>
-          <p:cNvPr id="4" name="Slide Image Placeholder 3"/>
-          <p:cNvSpPr>
-            <a:spLocks noGrp="1" noRot="1" noChangeAspect="1"/>
-          </p:cNvSpPr>
-          <p:nvPr>
-            <p:ph type="sldImg" idx="2"/>
-          </p:nvPr>
-        </p:nvSpPr>
-        <p:spPr>
-          <a:xfrm>
-            <a:off x="685800" y="1143000"/>
-            <a:ext cx="5486400" cy="3086100"/>
-          </a:xfrm>
-          <a:prstGeom prst="rect">
-            <a:avLst/>
-          </a:prstGeom>
-          <a:noFill/>
-          <a:ln w="12700">
-            <a:solidFill>
-              <a:prstClr val="black"/>
-            </a:solidFill>
-          </a:ln>
-        </p:spPr>
-        <p:txBody>
-          <a:bodyPr vert="horz" lIns="91440" tIns="45720" rIns="91440" bIns="45720" rtlCol="0" anchor="ctr"/>
-          <a:lstStyle/>
-          <a:p>
-            <a:endParaRPr lang="en-US"/>
-          </a:p>
-        </p:txBody>
-      </p:sp>
-      <p:sp>
-        <p:nvSpPr>
-          <p:cNvPr id="5" name="Notes Placeholder 4"/>
-          <p:cNvSpPr>
-            <a:spLocks noGrp="1"/>
-          </p:cNvSpPr>
-          <p:nvPr>
-            <p:ph type="body" sz="quarter" idx="3"/>
-          </p:nvPr>
-        </p:nvSpPr>
-        <p:spPr>
-          <a:xfrm>
-            <a:off x="685800" y="4400550"/>
-            <a:ext cx="5486400" cy="3600450"/>
-          </a:xfrm>
-          <a:prstGeom prst="rect">
-            <a:avLst/>
-          </a:prstGeom>
-        </p:spPr>
-        <p:txBody>
-          <a:bodyPr vert="horz" lIns="91440" tIns="45720" rIns="91440" bIns="45720" rtlCol="0"/>
-          <a:lstStyle/>
-          <a:p>
-            <a:pPr lvl="0"/>
-            <a:r>
-              <a:rPr lang="en-US"/>
-              <a:t>Click to edit Master text styles</a:t>
-            </a:r>
-          </a:p>
-          <a:p>
-            <a:pPr lvl="1"/>
-            <a:r>
-              <a:rPr lang="en-US"/>
-              <a:t>Second level</a:t>
-            </a:r>
-          </a:p>
-          <a:p>
-            <a:pPr lvl="2"/>
-            <a:r>
-              <a:rPr lang="en-US"/>
-              <a:t>Third level</a:t>
-            </a:r>
-          </a:p>
-          <a:p>
-            <a:pPr lvl="3"/>
-            <a:r>
-              <a:rPr lang="en-US"/>
-              <a:t>Fourth level</a:t>
-            </a:r>
-          </a:p>
-          <a:p>
-            <a:pPr lvl="4"/>
-            <a:r>
-              <a:rPr lang="en-US"/>
-              <a:t>Fifth level</a:t>
-            </a:r>
-          </a:p>
-        </p:txBody>
-      </p:sp>
-      <p:sp>
-        <p:nvSpPr>
-          <p:cNvPr id="6" name="Footer Placeholder 5"/>
-          <p:cNvSpPr>
-            <a:spLocks noGrp="1"/>
-          </p:cNvSpPr>
-          <p:nvPr>
-            <p:ph type="ftr" sz="quarter" idx="4"/>
-          </p:nvPr>
-        </p:nvSpPr>
-        <p:spPr>
-          <a:xfrm>
-            <a:off x="0" y="8685213"/>
-            <a:ext cx="2971800" cy="458787"/>
-          </a:xfrm>
-          <a:prstGeom prst="rect">
-            <a:avLst/>
-          </a:prstGeom>
-        </p:spPr>
-        <p:txBody>
-          <a:bodyPr vert="horz" lIns="91440" tIns="45720" rIns="91440" bIns="45720" rtlCol="0" anchor="b"/>
-          <a:lstStyle>
-            <a:lvl1pPr algn="l">
-              <a:defRPr sz="1200"/>
-            </a:lvl1pPr>
-          </a:lstStyle>
-          <a:p>
-            <a:endParaRPr lang="en-US"/>
-          </a:p>
-        </p:txBody>
-      </p:sp>
-      <p:sp>
-        <p:nvSpPr>
-          <p:cNvPr id="7" name="Slide Number Placeholder 6"/>
-          <p:cNvSpPr>
-            <a:spLocks noGrp="1"/>
-          </p:cNvSpPr>
-          <p:nvPr>
-            <p:ph type="sldNum" sz="quarter" idx="5"/>
-          </p:nvPr>
-        </p:nvSpPr>
-        <p:spPr>
-          <a:xfrm>
-            <a:off x="3884613" y="8685213"/>
-            <a:ext cx="2971800" cy="458787"/>
-          </a:xfrm>
-          <a:prstGeom prst="rect">
-            <a:avLst/>
-          </a:prstGeom>
-        </p:spPr>
-        <p:txBody>
-          <a:bodyPr vert="horz" lIns="91440" tIns="45720" rIns="91440" bIns="45720" rtlCol="0" anchor="b"/>
-          <a:lstStyle>
-            <a:lvl1pPr algn="r">
-              <a:defRPr sz="1200"/>
-            </a:lvl1pPr>
-          </a:lstStyle>
-          <a:p>
-            <a:fld id="{CE5E9CC1-C706-0F49-92D6-E571CC5EEA8F}" type="slidenum">
-              <a:rPr lang="en-US"/>
-              <a:t>‹#›</a:t>
-            </a:fld>
-            <a:endParaRPr lang="en-US"/>
-          </a:p>
-        </p:txBody>
-      </p:sp>
     </p:spTree>
     <p:extLst>
       <p:ext uri="{BB962C8B-B14F-4D97-AF65-F5344CB8AC3E}">
-        <p14:creationId xmlns:p14="http://schemas.microsoft.com/office/powerpoint/2010/main" val="1024086991"/>
+        <p14:creationId xmlns:p14="http://schemas.microsoft.com/office/powerpoint/2010/main" val="642730223"/>
       </p:ext>
     </p:extLst>
   </p:cSld>
@@ -794,10 +591,6 @@
           <a:bodyPr/>
           <a:lstStyle/>
           <a:p>
-            <a:r>
-              <a:rPr lang="en-US" dirty="0"/>
-              <a:t/>
-            </a:r>
             <a:endParaRPr lang="en-US" dirty="0"/>
           </a:p>
         </p:txBody>
@@ -871,6 +664,11 @@
 <file path=ppt/slideMasters/slideMaster1.xml><?xml version="1.0" encoding="utf-8"?>
 <p:sldMaster xmlns:a="http://schemas.openxmlformats.org/drawingml/2006/main" xmlns:r="http://schemas.openxmlformats.org/officeDocument/2006/relationships" xmlns:p="http://schemas.openxmlformats.org/presentationml/2006/main">
   <p:cSld>
+    <p:bg>
+      <p:bgRef idx="1001">
+        <a:schemeClr val="bg1"/>
+      </p:bgRef>
+    </p:bg>
     <p:spTree>
       <p:nvGrpSpPr>
         <p:cNvPr id="1" name=""/>
@@ -1153,6 +951,7 @@
         <a:solidFill>
           <a:srgbClr val="F0F4F8"/>
         </a:solidFill>
+        <a:effectLst/>
       </p:bgPr>
     </p:bg>
     <p:spTree>
@@ -1193,6 +992,13 @@
             <a:prstDash val="solid"/>
           </a:ln>
         </p:spPr>
+        <p:txBody>
+          <a:bodyPr/>
+          <a:lstStyle/>
+          <a:p>
+            <a:endParaRPr lang="en-US"/>
+          </a:p>
+        </p:txBody>
       </p:sp>
       <p:sp>
         <p:nvSpPr>
@@ -1218,6 +1024,13 @@
             <a:prstDash val="solid"/>
           </a:ln>
         </p:spPr>
+        <p:txBody>
+          <a:bodyPr/>
+          <a:lstStyle/>
+          <a:p>
+            <a:endParaRPr lang="en-US"/>
+          </a:p>
+        </p:txBody>
       </p:sp>
       <p:sp>
         <p:nvSpPr>
@@ -1240,7 +1053,7 @@
           <a:bodyPr wrap="square" lIns="0" tIns="0" rIns="0" bIns="0" rtlCol="0" anchor="ctr"/>
           <a:lstStyle/>
           <a:p>
-            <a:pPr algn="l" indent="0" marL="0">
+            <a:pPr marL="0" indent="0" algn="l">
               <a:buNone/>
             </a:pPr>
             <a:r>
@@ -1279,7 +1092,7 @@
           <a:bodyPr wrap="square" lIns="0" tIns="0" rIns="0" bIns="0" rtlCol="0" anchor="ctr"/>
           <a:lstStyle/>
           <a:p>
-            <a:pPr algn="l" indent="0" marL="0">
+            <a:pPr marL="0" indent="0" algn="l">
               <a:buNone/>
             </a:pPr>
             <a:r>
@@ -1293,9 +1106,6 @@
               </a:rPr>
               <a:t>Shubhan Tamhane  </a:t>
             </a:r>
-            <a:pPr algn="l" indent="0" marL="0">
-              <a:buNone/>
-            </a:pPr>
             <a:r>
               <a:rPr lang="en-US" sz="2600" dirty="0">
                 <a:solidFill>
@@ -1335,6 +1145,13 @@
             <a:prstDash val="solid"/>
           </a:ln>
         </p:spPr>
+        <p:txBody>
+          <a:bodyPr/>
+          <a:lstStyle/>
+          <a:p>
+            <a:endParaRPr lang="en-US"/>
+          </a:p>
+        </p:txBody>
       </p:sp>
       <p:sp>
         <p:nvSpPr>
@@ -1357,7 +1174,7 @@
           <a:bodyPr wrap="square" rtlCol="0" anchor="ctr"/>
           <a:lstStyle/>
           <a:p>
-            <a:pPr algn="ctr" indent="0" marL="0">
+            <a:pPr marL="0" indent="0" algn="ctr">
               <a:buNone/>
             </a:pPr>
             <a:r>
@@ -1374,7 +1191,7 @@
             <a:endParaRPr lang="en-US" sz="2600" dirty="0"/>
           </a:p>
           <a:p>
-            <a:pPr algn="ctr" indent="0" marL="0">
+            <a:pPr marL="0" indent="0" algn="ctr">
               <a:buNone/>
             </a:pPr>
             <a:r>
@@ -1416,13 +1233,20 @@
             <a:prstDash val="solid"/>
           </a:ln>
           <a:effectLst>
-            <a:outerShdw sx="100000" sy="100000" kx="0" ky="0" algn="bl" rotWithShape="0" blurRad="127000" dist="25400" dir="8100000">
+            <a:outerShdw blurRad="127000" dist="25400" dir="8100000" algn="bl" rotWithShape="0">
               <a:srgbClr val="000000">
                 <a:alpha val="8000"/>
               </a:srgbClr>
             </a:outerShdw>
           </a:effectLst>
         </p:spPr>
+        <p:txBody>
+          <a:bodyPr/>
+          <a:lstStyle/>
+          <a:p>
+            <a:endParaRPr lang="en-US"/>
+          </a:p>
+        </p:txBody>
       </p:sp>
       <p:sp>
         <p:nvSpPr>
@@ -1448,13 +1272,20 @@
             <a:prstDash val="solid"/>
           </a:ln>
           <a:effectLst>
-            <a:outerShdw sx="100000" sy="100000" kx="0" ky="0" algn="bl" rotWithShape="0" blurRad="127000" dist="25400" dir="8100000">
+            <a:outerShdw blurRad="127000" dist="25400" dir="8100000" algn="bl" rotWithShape="0">
               <a:srgbClr val="000000">
                 <a:alpha val="8000"/>
               </a:srgbClr>
             </a:outerShdw>
           </a:effectLst>
         </p:spPr>
+        <p:txBody>
+          <a:bodyPr/>
+          <a:lstStyle/>
+          <a:p>
+            <a:endParaRPr lang="en-US"/>
+          </a:p>
+        </p:txBody>
       </p:sp>
       <p:sp>
         <p:nvSpPr>
@@ -1480,13 +1311,20 @@
             <a:prstDash val="solid"/>
           </a:ln>
           <a:effectLst>
-            <a:outerShdw sx="100000" sy="100000" kx="0" ky="0" algn="bl" rotWithShape="0" blurRad="127000" dist="25400" dir="8100000">
+            <a:outerShdw blurRad="127000" dist="25400" dir="8100000" algn="bl" rotWithShape="0">
               <a:srgbClr val="000000">
                 <a:alpha val="8000"/>
               </a:srgbClr>
             </a:outerShdw>
           </a:effectLst>
         </p:spPr>
+        <p:txBody>
+          <a:bodyPr/>
+          <a:lstStyle/>
+          <a:p>
+            <a:endParaRPr lang="en-US"/>
+          </a:p>
+        </p:txBody>
       </p:sp>
       <p:sp>
         <p:nvSpPr>
@@ -1512,6 +1350,13 @@
             <a:prstDash val="solid"/>
           </a:ln>
         </p:spPr>
+        <p:txBody>
+          <a:bodyPr/>
+          <a:lstStyle/>
+          <a:p>
+            <a:endParaRPr lang="en-US"/>
+          </a:p>
+        </p:txBody>
       </p:sp>
       <p:sp>
         <p:nvSpPr>
@@ -1537,6 +1382,13 @@
             <a:prstDash val="solid"/>
           </a:ln>
         </p:spPr>
+        <p:txBody>
+          <a:bodyPr/>
+          <a:lstStyle/>
+          <a:p>
+            <a:endParaRPr lang="en-US"/>
+          </a:p>
+        </p:txBody>
       </p:sp>
       <p:sp>
         <p:nvSpPr>
@@ -1559,7 +1411,7 @@
           <a:bodyPr wrap="square" lIns="0" tIns="0" rIns="0" bIns="0" rtlCol="0" anchor="ctr"/>
           <a:lstStyle/>
           <a:p>
-            <a:pPr algn="l" indent="0" marL="0">
+            <a:pPr marL="0" indent="0" algn="l">
               <a:buNone/>
             </a:pPr>
             <a:r>
@@ -1598,7 +1450,7 @@
           <a:bodyPr wrap="square" rtlCol="0" anchor="t"/>
           <a:lstStyle/>
           <a:p>
-            <a:pPr algn="l" indent="0" marL="0">
+            <a:pPr marL="0" indent="0" algn="l">
               <a:buNone/>
             </a:pPr>
             <a:r>
@@ -1640,6 +1492,13 @@
             <a:prstDash val="solid"/>
           </a:ln>
         </p:spPr>
+        <p:txBody>
+          <a:bodyPr/>
+          <a:lstStyle/>
+          <a:p>
+            <a:endParaRPr lang="en-US"/>
+          </a:p>
+        </p:txBody>
       </p:sp>
       <p:sp>
         <p:nvSpPr>
@@ -1665,6 +1524,13 @@
             <a:prstDash val="solid"/>
           </a:ln>
         </p:spPr>
+        <p:txBody>
+          <a:bodyPr/>
+          <a:lstStyle/>
+          <a:p>
+            <a:endParaRPr lang="en-US"/>
+          </a:p>
+        </p:txBody>
       </p:sp>
       <p:sp>
         <p:nvSpPr>
@@ -1687,7 +1553,7 @@
           <a:bodyPr wrap="square" lIns="0" tIns="0" rIns="0" bIns="0" rtlCol="0" anchor="ctr"/>
           <a:lstStyle/>
           <a:p>
-            <a:pPr algn="l" indent="0" marL="0">
+            <a:pPr marL="0" indent="0" algn="l">
               <a:buNone/>
             </a:pPr>
             <a:r>
@@ -1729,6 +1595,13 @@
             <a:prstDash val="solid"/>
           </a:ln>
         </p:spPr>
+        <p:txBody>
+          <a:bodyPr/>
+          <a:lstStyle/>
+          <a:p>
+            <a:endParaRPr lang="en-US"/>
+          </a:p>
+        </p:txBody>
       </p:sp>
       <p:sp>
         <p:nvSpPr>
@@ -1751,7 +1624,7 @@
           <a:bodyPr wrap="square" lIns="0" tIns="0" rIns="0" bIns="0" rtlCol="0" anchor="ctr"/>
           <a:lstStyle/>
           <a:p>
-            <a:pPr algn="ctr" indent="0" marL="0">
+            <a:pPr marL="0" indent="0" algn="ctr">
               <a:buNone/>
             </a:pPr>
             <a:r>
@@ -1790,7 +1663,7 @@
           <a:bodyPr wrap="square" lIns="0" tIns="0" rIns="0" bIns="0" rtlCol="0" anchor="ctr"/>
           <a:lstStyle/>
           <a:p>
-            <a:pPr algn="ctr" indent="0" marL="0">
+            <a:pPr marL="0" indent="0" algn="ctr">
               <a:buNone/>
             </a:pPr>
             <a:r>
@@ -1832,6 +1705,13 @@
             <a:prstDash val="solid"/>
           </a:ln>
         </p:spPr>
+        <p:txBody>
+          <a:bodyPr/>
+          <a:lstStyle/>
+          <a:p>
+            <a:endParaRPr lang="en-US"/>
+          </a:p>
+        </p:txBody>
       </p:sp>
       <p:sp>
         <p:nvSpPr>
@@ -1854,7 +1734,7 @@
           <a:bodyPr wrap="square" lIns="0" tIns="0" rIns="0" bIns="0" rtlCol="0" anchor="ctr"/>
           <a:lstStyle/>
           <a:p>
-            <a:pPr algn="ctr" indent="0" marL="0">
+            <a:pPr marL="0" indent="0" algn="ctr">
               <a:buNone/>
             </a:pPr>
             <a:r>
@@ -1893,7 +1773,7 @@
           <a:bodyPr wrap="square" lIns="0" tIns="0" rIns="0" bIns="0" rtlCol="0" anchor="ctr"/>
           <a:lstStyle/>
           <a:p>
-            <a:pPr algn="ctr" indent="0" marL="0">
+            <a:pPr marL="0" indent="0" algn="ctr">
               <a:buNone/>
             </a:pPr>
             <a:r>
@@ -1935,6 +1815,13 @@
             <a:prstDash val="solid"/>
           </a:ln>
         </p:spPr>
+        <p:txBody>
+          <a:bodyPr/>
+          <a:lstStyle/>
+          <a:p>
+            <a:endParaRPr lang="en-US"/>
+          </a:p>
+        </p:txBody>
       </p:sp>
       <p:sp>
         <p:nvSpPr>
@@ -1957,7 +1844,7 @@
           <a:bodyPr wrap="square" lIns="0" tIns="0" rIns="0" bIns="0" rtlCol="0" anchor="ctr"/>
           <a:lstStyle/>
           <a:p>
-            <a:pPr algn="ctr" indent="0" marL="0">
+            <a:pPr marL="0" indent="0" algn="ctr">
               <a:buNone/>
             </a:pPr>
             <a:r>
@@ -1996,7 +1883,7 @@
           <a:bodyPr wrap="square" lIns="0" tIns="0" rIns="0" bIns="0" rtlCol="0" anchor="ctr"/>
           <a:lstStyle/>
           <a:p>
-            <a:pPr algn="ctr" indent="0" marL="0">
+            <a:pPr marL="0" indent="0" algn="ctr">
               <a:buNone/>
             </a:pPr>
             <a:r>
@@ -2035,7 +1922,7 @@
           <a:bodyPr wrap="square" rtlCol="0" anchor="t"/>
           <a:lstStyle/>
           <a:p>
-            <a:pPr algn="l" indent="0" marL="0">
+            <a:pPr marL="0" indent="0" algn="l">
               <a:buNone/>
             </a:pPr>
             <a:r>
@@ -2077,6 +1964,13 @@
             <a:prstDash val="solid"/>
           </a:ln>
         </p:spPr>
+        <p:txBody>
+          <a:bodyPr/>
+          <a:lstStyle/>
+          <a:p>
+            <a:endParaRPr lang="en-US"/>
+          </a:p>
+        </p:txBody>
       </p:sp>
       <p:sp>
         <p:nvSpPr>
@@ -2102,6 +1996,13 @@
             <a:prstDash val="solid"/>
           </a:ln>
         </p:spPr>
+        <p:txBody>
+          <a:bodyPr/>
+          <a:lstStyle/>
+          <a:p>
+            <a:endParaRPr lang="en-US"/>
+          </a:p>
+        </p:txBody>
       </p:sp>
       <p:sp>
         <p:nvSpPr>
@@ -2124,7 +2025,7 @@
           <a:bodyPr wrap="square" lIns="0" tIns="0" rIns="0" bIns="0" rtlCol="0" anchor="ctr"/>
           <a:lstStyle/>
           <a:p>
-            <a:pPr algn="l" indent="0" marL="0">
+            <a:pPr marL="0" indent="0" algn="l">
               <a:buNone/>
             </a:pPr>
             <a:r>
@@ -2166,6 +2067,13 @@
             <a:prstDash val="solid"/>
           </a:ln>
         </p:spPr>
+        <p:txBody>
+          <a:bodyPr/>
+          <a:lstStyle/>
+          <a:p>
+            <a:endParaRPr lang="en-US"/>
+          </a:p>
+        </p:txBody>
       </p:sp>
       <p:sp>
         <p:nvSpPr>
@@ -2188,7 +2096,7 @@
           <a:bodyPr wrap="square" lIns="0" tIns="0" rIns="0" bIns="0" rtlCol="0" anchor="ctr"/>
           <a:lstStyle/>
           <a:p>
-            <a:pPr algn="ctr" indent="0" marL="0">
+            <a:pPr marL="0" indent="0" algn="ctr">
               <a:buNone/>
             </a:pPr>
             <a:r>
@@ -2224,7 +2132,7 @@
           <a:bodyPr wrap="square" rtlCol="0" anchor="ctr"/>
           <a:lstStyle/>
           <a:p>
-            <a:pPr indent="0" marL="0">
+            <a:pPr marL="0" indent="0">
               <a:buNone/>
             </a:pPr>
             <a:r>
@@ -2238,9 +2146,6 @@
               </a:rPr>
               <a:t>Feature Engineering  </a:t>
             </a:r>
-            <a:pPr indent="0" marL="0">
-              <a:buNone/>
-            </a:pPr>
             <a:r>
               <a:rPr lang="en-US" sz="1900" dirty="0">
                 <a:solidFill>
@@ -2280,6 +2185,13 @@
             <a:prstDash val="solid"/>
           </a:ln>
         </p:spPr>
+        <p:txBody>
+          <a:bodyPr/>
+          <a:lstStyle/>
+          <a:p>
+            <a:endParaRPr lang="en-US"/>
+          </a:p>
+        </p:txBody>
       </p:sp>
       <p:sp>
         <p:nvSpPr>
@@ -2302,7 +2214,7 @@
           <a:bodyPr wrap="square" lIns="0" tIns="0" rIns="0" bIns="0" rtlCol="0" anchor="ctr"/>
           <a:lstStyle/>
           <a:p>
-            <a:pPr algn="ctr" indent="0" marL="0">
+            <a:pPr marL="0" indent="0" algn="ctr">
               <a:buNone/>
             </a:pPr>
             <a:r>
@@ -2338,7 +2250,7 @@
           <a:bodyPr wrap="square" rtlCol="0" anchor="ctr"/>
           <a:lstStyle/>
           <a:p>
-            <a:pPr indent="0" marL="0">
+            <a:pPr marL="0" indent="0">
               <a:buNone/>
             </a:pPr>
             <a:r>
@@ -2352,9 +2264,6 @@
               </a:rPr>
               <a:t>Standardization  </a:t>
             </a:r>
-            <a:pPr indent="0" marL="0">
-              <a:buNone/>
-            </a:pPr>
             <a:r>
               <a:rPr lang="en-US" sz="1900" dirty="0">
                 <a:solidFill>
@@ -2394,6 +2303,13 @@
             <a:prstDash val="solid"/>
           </a:ln>
         </p:spPr>
+        <p:txBody>
+          <a:bodyPr/>
+          <a:lstStyle/>
+          <a:p>
+            <a:endParaRPr lang="en-US"/>
+          </a:p>
+        </p:txBody>
       </p:sp>
       <p:sp>
         <p:nvSpPr>
@@ -2416,7 +2332,7 @@
           <a:bodyPr wrap="square" lIns="0" tIns="0" rIns="0" bIns="0" rtlCol="0" anchor="ctr"/>
           <a:lstStyle/>
           <a:p>
-            <a:pPr algn="ctr" indent="0" marL="0">
+            <a:pPr marL="0" indent="0" algn="ctr">
               <a:buNone/>
             </a:pPr>
             <a:r>
@@ -2452,7 +2368,7 @@
           <a:bodyPr wrap="square" rtlCol="0" anchor="ctr"/>
           <a:lstStyle/>
           <a:p>
-            <a:pPr indent="0" marL="0">
+            <a:pPr marL="0" indent="0">
               <a:buNone/>
             </a:pPr>
             <a:r>
@@ -2466,9 +2382,6 @@
               </a:rPr>
               <a:t>PCA  </a:t>
             </a:r>
-            <a:pPr indent="0" marL="0">
-              <a:buNone/>
-            </a:pPr>
             <a:r>
               <a:rPr lang="en-US" sz="1900" dirty="0">
                 <a:solidFill>
@@ -2508,6 +2421,13 @@
             <a:prstDash val="solid"/>
           </a:ln>
         </p:spPr>
+        <p:txBody>
+          <a:bodyPr/>
+          <a:lstStyle/>
+          <a:p>
+            <a:endParaRPr lang="en-US"/>
+          </a:p>
+        </p:txBody>
       </p:sp>
       <p:sp>
         <p:nvSpPr>
@@ -2530,7 +2450,7 @@
           <a:bodyPr wrap="square" lIns="0" tIns="0" rIns="0" bIns="0" rtlCol="0" anchor="ctr"/>
           <a:lstStyle/>
           <a:p>
-            <a:pPr algn="ctr" indent="0" marL="0">
+            <a:pPr marL="0" indent="0" algn="ctr">
               <a:buNone/>
             </a:pPr>
             <a:r>
@@ -2566,7 +2486,7 @@
           <a:bodyPr wrap="square" rtlCol="0" anchor="ctr"/>
           <a:lstStyle/>
           <a:p>
-            <a:pPr indent="0" marL="0">
+            <a:pPr marL="0" indent="0">
               <a:buNone/>
             </a:pPr>
             <a:r>
@@ -2580,9 +2500,6 @@
               </a:rPr>
               <a:t>K-Means Clustering  </a:t>
             </a:r>
-            <a:pPr indent="0" marL="0">
-              <a:buNone/>
-            </a:pPr>
             <a:r>
               <a:rPr lang="en-US" sz="1900" dirty="0">
                 <a:solidFill>
@@ -2622,6 +2539,13 @@
             <a:prstDash val="solid"/>
           </a:ln>
         </p:spPr>
+        <p:txBody>
+          <a:bodyPr/>
+          <a:lstStyle/>
+          <a:p>
+            <a:endParaRPr lang="en-US"/>
+          </a:p>
+        </p:txBody>
       </p:sp>
       <p:sp>
         <p:nvSpPr>
@@ -2644,7 +2568,7 @@
           <a:bodyPr wrap="square" lIns="0" tIns="0" rIns="0" bIns="0" rtlCol="0" anchor="ctr"/>
           <a:lstStyle/>
           <a:p>
-            <a:pPr algn="ctr" indent="0" marL="0">
+            <a:pPr marL="0" indent="0" algn="ctr">
               <a:buNone/>
             </a:pPr>
             <a:r>
@@ -2680,7 +2604,7 @@
           <a:bodyPr wrap="square" rtlCol="0" anchor="ctr"/>
           <a:lstStyle/>
           <a:p>
-            <a:pPr indent="0" marL="0">
+            <a:pPr marL="0" indent="0">
               <a:buNone/>
             </a:pPr>
             <a:r>
@@ -2694,9 +2618,6 @@
               </a:rPr>
               <a:t>Validation  </a:t>
             </a:r>
-            <a:pPr indent="0" marL="0">
-              <a:buNone/>
-            </a:pPr>
             <a:r>
               <a:rPr lang="en-US" sz="1900" dirty="0">
                 <a:solidFill>
@@ -2736,6 +2657,13 @@
             <a:prstDash val="solid"/>
           </a:ln>
         </p:spPr>
+        <p:txBody>
+          <a:bodyPr/>
+          <a:lstStyle/>
+          <a:p>
+            <a:endParaRPr lang="en-US"/>
+          </a:p>
+        </p:txBody>
       </p:sp>
       <p:sp>
         <p:nvSpPr>
@@ -2761,6 +2689,13 @@
             <a:prstDash val="solid"/>
           </a:ln>
         </p:spPr>
+        <p:txBody>
+          <a:bodyPr/>
+          <a:lstStyle/>
+          <a:p>
+            <a:endParaRPr lang="en-US"/>
+          </a:p>
+        </p:txBody>
       </p:sp>
       <p:sp>
         <p:nvSpPr>
@@ -2783,7 +2718,7 @@
           <a:bodyPr wrap="square" lIns="0" tIns="0" rIns="0" bIns="0" rtlCol="0" anchor="ctr"/>
           <a:lstStyle/>
           <a:p>
-            <a:pPr algn="l" indent="0" marL="0">
+            <a:pPr marL="0" indent="0" algn="l">
               <a:buNone/>
             </a:pPr>
             <a:r>
@@ -2822,7 +2757,7 @@
           <a:bodyPr wrap="square" rtlCol="0" anchor="ctr"/>
           <a:lstStyle/>
           <a:p>
-            <a:pPr indent="0" marL="0">
+            <a:pPr marL="0" indent="0">
               <a:buNone/>
             </a:pPr>
             <a:r>
@@ -2836,9 +2771,6 @@
               </a:rPr>
               <a:t>✓  </a:t>
             </a:r>
-            <a:pPr indent="0" marL="0">
-              <a:buNone/>
-            </a:pPr>
             <a:r>
               <a:rPr lang="en-US" sz="1900" dirty="0">
                 <a:solidFill>
@@ -2875,7 +2807,7 @@
           <a:bodyPr wrap="square" rtlCol="0" anchor="ctr"/>
           <a:lstStyle/>
           <a:p>
-            <a:pPr indent="0" marL="0">
+            <a:pPr marL="0" indent="0">
               <a:buNone/>
             </a:pPr>
             <a:r>
@@ -2889,9 +2821,6 @@
               </a:rPr>
               <a:t>✓  </a:t>
             </a:r>
-            <a:pPr indent="0" marL="0">
-              <a:buNone/>
-            </a:pPr>
             <a:r>
               <a:rPr lang="en-US" sz="1900" dirty="0">
                 <a:solidFill>
@@ -2928,7 +2857,7 @@
           <a:bodyPr wrap="square" rtlCol="0" anchor="ctr"/>
           <a:lstStyle/>
           <a:p>
-            <a:pPr indent="0" marL="0">
+            <a:pPr marL="0" indent="0">
               <a:buNone/>
             </a:pPr>
             <a:r>
@@ -2942,9 +2871,6 @@
               </a:rPr>
               <a:t>⚠  </a:t>
             </a:r>
-            <a:pPr indent="0" marL="0">
-              <a:buNone/>
-            </a:pPr>
             <a:r>
               <a:rPr lang="en-US" sz="1900" dirty="0">
                 <a:solidFill>
@@ -2981,7 +2907,7 @@
           <a:bodyPr wrap="square" rtlCol="0" anchor="ctr"/>
           <a:lstStyle/>
           <a:p>
-            <a:pPr indent="0" marL="0">
+            <a:pPr marL="0" indent="0">
               <a:buNone/>
             </a:pPr>
             <a:r>
@@ -2995,9 +2921,6 @@
               </a:rPr>
               <a:t>→  </a:t>
             </a:r>
-            <a:pPr indent="0" marL="0">
-              <a:buNone/>
-            </a:pPr>
             <a:r>
               <a:rPr lang="en-US" sz="1900" dirty="0">
                 <a:solidFill>
@@ -3037,6 +2960,13 @@
             <a:prstDash val="solid"/>
           </a:ln>
         </p:spPr>
+        <p:txBody>
+          <a:bodyPr/>
+          <a:lstStyle/>
+          <a:p>
+            <a:endParaRPr lang="en-US"/>
+          </a:p>
+        </p:txBody>
       </p:sp>
       <p:sp>
         <p:nvSpPr>
@@ -3062,6 +2992,13 @@
             <a:prstDash val="solid"/>
           </a:ln>
         </p:spPr>
+        <p:txBody>
+          <a:bodyPr/>
+          <a:lstStyle/>
+          <a:p>
+            <a:endParaRPr lang="en-US"/>
+          </a:p>
+        </p:txBody>
       </p:sp>
       <p:sp>
         <p:nvSpPr>
@@ -3084,7 +3021,7 @@
           <a:bodyPr wrap="square" lIns="0" tIns="0" rIns="0" bIns="0" rtlCol="0" anchor="ctr"/>
           <a:lstStyle/>
           <a:p>
-            <a:pPr algn="l" indent="0" marL="0">
+            <a:pPr marL="0" indent="0" algn="l">
               <a:buNone/>
             </a:pPr>
             <a:r>
@@ -3102,30 +3039,6 @@
           </a:p>
         </p:txBody>
       </p:sp>
-      <p:pic>
-        <p:nvPicPr>
-          <p:cNvPr id="56" name="Image 0" descr="preencoded.png">    </p:cNvPr>
-          <p:cNvPicPr>
-            <a:picLocks noChangeAspect="1"/>
-          </p:cNvPicPr>
-          <p:nvPr/>
-        </p:nvPicPr>
-        <p:blipFill>
-          <a:blip r:embed="rId1"/>
-          <a:stretch>
-            <a:fillRect/>
-          </a:stretch>
-        </p:blipFill>
-        <p:spPr>
-          <a:xfrm>
-            <a:off x="548640" y="18608040"/>
-            <a:ext cx="2286000" cy="2286000"/>
-          </a:xfrm>
-          <a:prstGeom prst="rect">
-            <a:avLst/>
-          </a:prstGeom>
-        </p:spPr>
-      </p:pic>
       <p:sp>
         <p:nvSpPr>
           <p:cNvPr id="57" name="Text 54"/>
@@ -3147,7 +3060,7 @@
           <a:bodyPr wrap="square" rtlCol="0" anchor="ctr"/>
           <a:lstStyle/>
           <a:p>
-            <a:pPr indent="0" marL="0">
+            <a:pPr marL="0" indent="0">
               <a:buNone/>
             </a:pPr>
             <a:r>
@@ -3165,7 +3078,7 @@
             <a:endParaRPr lang="en-US" sz="2000" dirty="0"/>
           </a:p>
           <a:p>
-            <a:pPr indent="0" marL="0">
+            <a:pPr marL="0" indent="0">
               <a:buNone/>
             </a:pPr>
             <a:r>
@@ -3184,7 +3097,7 @@
             <a:endParaRPr lang="en-US" sz="2000" dirty="0"/>
           </a:p>
           <a:p>
-            <a:pPr indent="0" marL="0">
+            <a:pPr marL="0" indent="0">
               <a:buNone/>
             </a:pPr>
             <a:r>
@@ -3226,6 +3139,13 @@
             <a:prstDash val="solid"/>
           </a:ln>
         </p:spPr>
+        <p:txBody>
+          <a:bodyPr/>
+          <a:lstStyle/>
+          <a:p>
+            <a:endParaRPr lang="en-US"/>
+          </a:p>
+        </p:txBody>
       </p:sp>
       <p:sp>
         <p:nvSpPr>
@@ -3251,6 +3171,13 @@
             <a:prstDash val="solid"/>
           </a:ln>
         </p:spPr>
+        <p:txBody>
+          <a:bodyPr/>
+          <a:lstStyle/>
+          <a:p>
+            <a:endParaRPr lang="en-US"/>
+          </a:p>
+        </p:txBody>
       </p:sp>
       <p:sp>
         <p:nvSpPr>
@@ -3273,7 +3200,7 @@
           <a:bodyPr wrap="square" lIns="0" tIns="0" rIns="0" bIns="0" rtlCol="0" anchor="ctr"/>
           <a:lstStyle/>
           <a:p>
-            <a:pPr algn="l" indent="0" marL="0">
+            <a:pPr marL="0" indent="0" algn="l">
               <a:buNone/>
             </a:pPr>
             <a:r>
@@ -3293,15 +3220,15 @@
       </p:sp>
       <p:pic>
         <p:nvPicPr>
-          <p:cNvPr id="61" name="Image 1" descr="preencoded.png">    </p:cNvPr>
+          <p:cNvPr id="61" name="Image 1" descr="preencoded.png"/>
           <p:cNvPicPr>
             <a:picLocks noChangeAspect="1"/>
           </p:cNvPicPr>
           <p:nvPr/>
         </p:nvPicPr>
         <p:blipFill>
-          <a:blip r:embed="rId2"/>
-          <a:srcRect l="0" r="0" t="0" b="0"/>
+          <a:blip r:embed="rId3"/>
+          <a:srcRect/>
           <a:stretch/>
         </p:blipFill>
         <p:spPr>
@@ -3335,7 +3262,7 @@
           <a:bodyPr wrap="square" rtlCol="0" anchor="ctr"/>
           <a:lstStyle/>
           <a:p>
-            <a:pPr algn="ctr" indent="0" marL="0">
+            <a:pPr marL="0" indent="0" algn="ctr">
               <a:buNone/>
             </a:pPr>
             <a:r>
@@ -3377,6 +3304,13 @@
             <a:prstDash val="solid"/>
           </a:ln>
         </p:spPr>
+        <p:txBody>
+          <a:bodyPr/>
+          <a:lstStyle/>
+          <a:p>
+            <a:endParaRPr lang="en-US"/>
+          </a:p>
+        </p:txBody>
       </p:sp>
       <p:sp>
         <p:nvSpPr>
@@ -3402,6 +3336,13 @@
             <a:prstDash val="solid"/>
           </a:ln>
         </p:spPr>
+        <p:txBody>
+          <a:bodyPr/>
+          <a:lstStyle/>
+          <a:p>
+            <a:endParaRPr lang="en-US"/>
+          </a:p>
+        </p:txBody>
       </p:sp>
       <p:sp>
         <p:nvSpPr>
@@ -3424,7 +3365,7 @@
           <a:bodyPr wrap="square" lIns="0" tIns="0" rIns="0" bIns="0" rtlCol="0" anchor="ctr"/>
           <a:lstStyle/>
           <a:p>
-            <a:pPr algn="l" indent="0" marL="0">
+            <a:pPr marL="0" indent="0" algn="l">
               <a:buNone/>
             </a:pPr>
             <a:r>
@@ -3444,7 +3385,7 @@
       </p:sp>
       <p:graphicFrame>
         <p:nvGraphicFramePr>
-          <p:cNvPr id="2" name="Table 0"/>
+          <p:cNvPr id="66" name="Table 0"/>
           <p:cNvGraphicFramePr>
             <a:graphicFrameLocks noGrp="1"/>
           </p:cNvGraphicFramePr>
@@ -3458,21 +3399,69 @@
         </p:nvGraphicFramePr>
         <p:xfrm>
           <a:off x="9281160" y="12417552"/>
-          <a:ext cx="10515600" cy="914400"/>
+          <a:ext cx="11887200" cy="3429000"/>
         </p:xfrm>
         <a:graphic>
           <a:graphicData uri="http://schemas.openxmlformats.org/drawingml/2006/table">
             <a:tbl>
               <a:tblPr/>
               <a:tblGrid>
-                <a:gridCol w="3108960"/>
-                <a:gridCol w="1417320"/>
-                <a:gridCol w="1508760"/>
-                <a:gridCol w="1143000"/>
-                <a:gridCol w="1234440"/>
-                <a:gridCol w="1417320"/>
-                <a:gridCol w="1234440"/>
-                <a:gridCol w="822960"/>
+                <a:gridCol w="3108960">
+                  <a:extLst>
+                    <a:ext uri="{9D8B030D-6E8A-4147-A177-3AD203B41FA5}">
+                      <a16:colId xmlns:a16="http://schemas.microsoft.com/office/drawing/2014/main" val="20000"/>
+                    </a:ext>
+                  </a:extLst>
+                </a:gridCol>
+                <a:gridCol w="1417320">
+                  <a:extLst>
+                    <a:ext uri="{9D8B030D-6E8A-4147-A177-3AD203B41FA5}">
+                      <a16:colId xmlns:a16="http://schemas.microsoft.com/office/drawing/2014/main" val="20001"/>
+                    </a:ext>
+                  </a:extLst>
+                </a:gridCol>
+                <a:gridCol w="1508760">
+                  <a:extLst>
+                    <a:ext uri="{9D8B030D-6E8A-4147-A177-3AD203B41FA5}">
+                      <a16:colId xmlns:a16="http://schemas.microsoft.com/office/drawing/2014/main" val="20002"/>
+                    </a:ext>
+                  </a:extLst>
+                </a:gridCol>
+                <a:gridCol w="1143000">
+                  <a:extLst>
+                    <a:ext uri="{9D8B030D-6E8A-4147-A177-3AD203B41FA5}">
+                      <a16:colId xmlns:a16="http://schemas.microsoft.com/office/drawing/2014/main" val="20003"/>
+                    </a:ext>
+                  </a:extLst>
+                </a:gridCol>
+                <a:gridCol w="1234440">
+                  <a:extLst>
+                    <a:ext uri="{9D8B030D-6E8A-4147-A177-3AD203B41FA5}">
+                      <a16:colId xmlns:a16="http://schemas.microsoft.com/office/drawing/2014/main" val="20004"/>
+                    </a:ext>
+                  </a:extLst>
+                </a:gridCol>
+                <a:gridCol w="1417320">
+                  <a:extLst>
+                    <a:ext uri="{9D8B030D-6E8A-4147-A177-3AD203B41FA5}">
+                      <a16:colId xmlns:a16="http://schemas.microsoft.com/office/drawing/2014/main" val="20005"/>
+                    </a:ext>
+                  </a:extLst>
+                </a:gridCol>
+                <a:gridCol w="1234440">
+                  <a:extLst>
+                    <a:ext uri="{9D8B030D-6E8A-4147-A177-3AD203B41FA5}">
+                      <a16:colId xmlns:a16="http://schemas.microsoft.com/office/drawing/2014/main" val="20006"/>
+                    </a:ext>
+                  </a:extLst>
+                </a:gridCol>
+                <a:gridCol w="822960">
+                  <a:extLst>
+                    <a:ext uri="{9D8B030D-6E8A-4147-A177-3AD203B41FA5}">
+                      <a16:colId xmlns:a16="http://schemas.microsoft.com/office/drawing/2014/main" val="20007"/>
+                    </a:ext>
+                  </a:extLst>
+                </a:gridCol>
               </a:tblGrid>
               <a:tr h="685800">
                 <a:tc>
@@ -3480,7 +3469,7 @@
                     <a:bodyPr/>
                     <a:lstStyle/>
                     <a:p>
-                      <a:pPr algn="ctr" indent="0" marL="0">
+                      <a:pPr marL="0" indent="0" algn="ctr">
                         <a:buNone/>
                       </a:pPr>
                       <a:r>
@@ -3501,7 +3490,7 @@
                       </a:endParaRPr>
                     </a:p>
                   </a:txBody>
-                  <a:tcPr marL="91440" marR="91440" marT="45720" marB="45720">
+                  <a:tcPr>
                     <a:lnL w="12700" cap="flat" cmpd="sng" algn="ctr">
                       <a:solidFill>
                         <a:srgbClr val="C8D6E5"/>
@@ -3548,7 +3537,7 @@
                     <a:bodyPr/>
                     <a:lstStyle/>
                     <a:p>
-                      <a:pPr algn="ctr" indent="0" marL="0">
+                      <a:pPr marL="0" indent="0" algn="ctr">
                         <a:buNone/>
                       </a:pPr>
                       <a:r>
@@ -3569,7 +3558,7 @@
                       </a:endParaRPr>
                     </a:p>
                   </a:txBody>
-                  <a:tcPr marL="91440" marR="91440" marT="45720" marB="45720">
+                  <a:tcPr>
                     <a:lnL w="12700" cap="flat" cmpd="sng" algn="ctr">
                       <a:solidFill>
                         <a:srgbClr val="C8D6E5"/>
@@ -3616,7 +3605,7 @@
                     <a:bodyPr/>
                     <a:lstStyle/>
                     <a:p>
-                      <a:pPr algn="ctr" indent="0" marL="0">
+                      <a:pPr marL="0" indent="0" algn="ctr">
                         <a:buNone/>
                       </a:pPr>
                       <a:r>
@@ -3637,7 +3626,7 @@
                       </a:endParaRPr>
                     </a:p>
                   </a:txBody>
-                  <a:tcPr marL="91440" marR="91440" marT="45720" marB="45720">
+                  <a:tcPr>
                     <a:lnL w="12700" cap="flat" cmpd="sng" algn="ctr">
                       <a:solidFill>
                         <a:srgbClr val="C8D6E5"/>
@@ -3684,7 +3673,7 @@
                     <a:bodyPr/>
                     <a:lstStyle/>
                     <a:p>
-                      <a:pPr algn="ctr" indent="0" marL="0">
+                      <a:pPr marL="0" indent="0" algn="ctr">
                         <a:buNone/>
                       </a:pPr>
                       <a:r>
@@ -3705,7 +3694,7 @@
                       </a:endParaRPr>
                     </a:p>
                   </a:txBody>
-                  <a:tcPr marL="91440" marR="91440" marT="45720" marB="45720">
+                  <a:tcPr>
                     <a:lnL w="12700" cap="flat" cmpd="sng" algn="ctr">
                       <a:solidFill>
                         <a:srgbClr val="C8D6E5"/>
@@ -3752,7 +3741,7 @@
                     <a:bodyPr/>
                     <a:lstStyle/>
                     <a:p>
-                      <a:pPr algn="ctr" indent="0" marL="0">
+                      <a:pPr marL="0" indent="0" algn="ctr">
                         <a:buNone/>
                       </a:pPr>
                       <a:r>
@@ -3773,7 +3762,7 @@
                       </a:endParaRPr>
                     </a:p>
                   </a:txBody>
-                  <a:tcPr marL="91440" marR="91440" marT="45720" marB="45720">
+                  <a:tcPr>
                     <a:lnL w="12700" cap="flat" cmpd="sng" algn="ctr">
                       <a:solidFill>
                         <a:srgbClr val="C8D6E5"/>
@@ -3820,7 +3809,7 @@
                     <a:bodyPr/>
                     <a:lstStyle/>
                     <a:p>
-                      <a:pPr algn="ctr" indent="0" marL="0">
+                      <a:pPr marL="0" indent="0" algn="ctr">
                         <a:buNone/>
                       </a:pPr>
                       <a:r>
@@ -3841,7 +3830,7 @@
                       </a:endParaRPr>
                     </a:p>
                   </a:txBody>
-                  <a:tcPr marL="91440" marR="91440" marT="45720" marB="45720">
+                  <a:tcPr>
                     <a:lnL w="12700" cap="flat" cmpd="sng" algn="ctr">
                       <a:solidFill>
                         <a:srgbClr val="C8D6E5"/>
@@ -3888,7 +3877,7 @@
                     <a:bodyPr/>
                     <a:lstStyle/>
                     <a:p>
-                      <a:pPr algn="ctr" indent="0" marL="0">
+                      <a:pPr marL="0" indent="0" algn="ctr">
                         <a:buNone/>
                       </a:pPr>
                       <a:r>
@@ -3909,7 +3898,7 @@
                       </a:endParaRPr>
                     </a:p>
                   </a:txBody>
-                  <a:tcPr marL="91440" marR="91440" marT="45720" marB="45720">
+                  <a:tcPr>
                     <a:lnL w="12700" cap="flat" cmpd="sng" algn="ctr">
                       <a:solidFill>
                         <a:srgbClr val="C8D6E5"/>
@@ -3956,7 +3945,7 @@
                     <a:bodyPr/>
                     <a:lstStyle/>
                     <a:p>
-                      <a:pPr algn="ctr" indent="0" marL="0">
+                      <a:pPr marL="0" indent="0" algn="ctr">
                         <a:buNone/>
                       </a:pPr>
                       <a:r>
@@ -3977,7 +3966,7 @@
                       </a:endParaRPr>
                     </a:p>
                   </a:txBody>
-                  <a:tcPr marL="91440" marR="91440" marT="45720" marB="45720">
+                  <a:tcPr>
                     <a:lnL w="12700" cap="flat" cmpd="sng" algn="ctr">
                       <a:solidFill>
                         <a:srgbClr val="C8D6E5"/>
@@ -4019,6 +4008,11 @@
                     </a:solidFill>
                   </a:tcPr>
                 </a:tc>
+                <a:extLst>
+                  <a:ext uri="{0D108BD9-81ED-4DB2-BD59-A6C34878D82A}">
+                    <a16:rowId xmlns:a16="http://schemas.microsoft.com/office/drawing/2014/main" val="10000"/>
+                  </a:ext>
+                </a:extLst>
               </a:tr>
               <a:tr h="685800">
                 <a:tc>
@@ -4026,7 +4020,7 @@
                     <a:bodyPr/>
                     <a:lstStyle/>
                     <a:p>
-                      <a:pPr algn="l" indent="0" marL="0">
+                      <a:pPr marL="0" indent="0" algn="l">
                         <a:buNone/>
                       </a:pPr>
                       <a:r>
@@ -4047,7 +4041,7 @@
                       </a:endParaRPr>
                     </a:p>
                   </a:txBody>
-                  <a:tcPr marL="91440" marR="91440" marT="45720" marB="45720">
+                  <a:tcPr>
                     <a:lnL w="12700" cap="flat" cmpd="sng" algn="ctr">
                       <a:solidFill>
                         <a:srgbClr val="C8D6E5"/>
@@ -4094,7 +4088,7 @@
                     <a:bodyPr/>
                     <a:lstStyle/>
                     <a:p>
-                      <a:pPr algn="ctr" indent="0" marL="0">
+                      <a:pPr marL="0" indent="0" algn="ctr">
                         <a:buNone/>
                       </a:pPr>
                       <a:r>
@@ -4115,7 +4109,7 @@
                       </a:endParaRPr>
                     </a:p>
                   </a:txBody>
-                  <a:tcPr marL="91440" marR="91440" marT="45720" marB="45720">
+                  <a:tcPr>
                     <a:lnL w="12700" cap="flat" cmpd="sng" algn="ctr">
                       <a:solidFill>
                         <a:srgbClr val="C8D6E5"/>
@@ -4159,7 +4153,7 @@
                     <a:bodyPr/>
                     <a:lstStyle/>
                     <a:p>
-                      <a:pPr algn="ctr" indent="0" marL="0">
+                      <a:pPr marL="0" indent="0" algn="ctr">
                         <a:buNone/>
                       </a:pPr>
                       <a:r>
@@ -4180,7 +4174,7 @@
                       </a:endParaRPr>
                     </a:p>
                   </a:txBody>
-                  <a:tcPr marL="91440" marR="91440" marT="45720" marB="45720">
+                  <a:tcPr>
                     <a:lnL w="12700" cap="flat" cmpd="sng" algn="ctr">
                       <a:solidFill>
                         <a:srgbClr val="C8D6E5"/>
@@ -4224,7 +4218,7 @@
                     <a:bodyPr/>
                     <a:lstStyle/>
                     <a:p>
-                      <a:pPr algn="ctr" indent="0" marL="0">
+                      <a:pPr marL="0" indent="0" algn="ctr">
                         <a:buNone/>
                       </a:pPr>
                       <a:r>
@@ -4245,7 +4239,7 @@
                       </a:endParaRPr>
                     </a:p>
                   </a:txBody>
-                  <a:tcPr marL="91440" marR="91440" marT="45720" marB="45720">
+                  <a:tcPr>
                     <a:lnL w="12700" cap="flat" cmpd="sng" algn="ctr">
                       <a:solidFill>
                         <a:srgbClr val="C8D6E5"/>
@@ -4289,7 +4283,7 @@
                     <a:bodyPr/>
                     <a:lstStyle/>
                     <a:p>
-                      <a:pPr algn="ctr" indent="0" marL="0">
+                      <a:pPr marL="0" indent="0" algn="ctr">
                         <a:buNone/>
                       </a:pPr>
                       <a:r>
@@ -4310,7 +4304,7 @@
                       </a:endParaRPr>
                     </a:p>
                   </a:txBody>
-                  <a:tcPr marL="91440" marR="91440" marT="45720" marB="45720">
+                  <a:tcPr>
                     <a:lnL w="12700" cap="flat" cmpd="sng" algn="ctr">
                       <a:solidFill>
                         <a:srgbClr val="C8D6E5"/>
@@ -4354,7 +4348,7 @@
                     <a:bodyPr/>
                     <a:lstStyle/>
                     <a:p>
-                      <a:pPr algn="ctr" indent="0" marL="0">
+                      <a:pPr marL="0" indent="0" algn="ctr">
                         <a:buNone/>
                       </a:pPr>
                       <a:r>
@@ -4375,7 +4369,7 @@
                       </a:endParaRPr>
                     </a:p>
                   </a:txBody>
-                  <a:tcPr marL="91440" marR="91440" marT="45720" marB="45720">
+                  <a:tcPr>
                     <a:lnL w="12700" cap="flat" cmpd="sng" algn="ctr">
                       <a:solidFill>
                         <a:srgbClr val="C8D6E5"/>
@@ -4419,7 +4413,7 @@
                     <a:bodyPr/>
                     <a:lstStyle/>
                     <a:p>
-                      <a:pPr algn="ctr" indent="0" marL="0">
+                      <a:pPr marL="0" indent="0" algn="ctr">
                         <a:buNone/>
                       </a:pPr>
                       <a:r>
@@ -4440,7 +4434,7 @@
                       </a:endParaRPr>
                     </a:p>
                   </a:txBody>
-                  <a:tcPr marL="91440" marR="91440" marT="45720" marB="45720">
+                  <a:tcPr>
                     <a:lnL w="12700" cap="flat" cmpd="sng" algn="ctr">
                       <a:solidFill>
                         <a:srgbClr val="C8D6E5"/>
@@ -4484,7 +4478,7 @@
                     <a:bodyPr/>
                     <a:lstStyle/>
                     <a:p>
-                      <a:pPr algn="ctr" indent="0" marL="0">
+                      <a:pPr marL="0" indent="0" algn="ctr">
                         <a:buNone/>
                       </a:pPr>
                       <a:r>
@@ -4505,7 +4499,7 @@
                       </a:endParaRPr>
                     </a:p>
                   </a:txBody>
-                  <a:tcPr marL="91440" marR="91440" marT="45720" marB="45720">
+                  <a:tcPr>
                     <a:lnL w="12700" cap="flat" cmpd="sng" algn="ctr">
                       <a:solidFill>
                         <a:srgbClr val="C8D6E5"/>
@@ -4544,6 +4538,11 @@
                     </a:lnB>
                   </a:tcPr>
                 </a:tc>
+                <a:extLst>
+                  <a:ext uri="{0D108BD9-81ED-4DB2-BD59-A6C34878D82A}">
+                    <a16:rowId xmlns:a16="http://schemas.microsoft.com/office/drawing/2014/main" val="10001"/>
+                  </a:ext>
+                </a:extLst>
               </a:tr>
               <a:tr h="685800">
                 <a:tc>
@@ -4551,7 +4550,7 @@
                     <a:bodyPr/>
                     <a:lstStyle/>
                     <a:p>
-                      <a:pPr algn="l" indent="0" marL="0">
+                      <a:pPr marL="0" indent="0" algn="l">
                         <a:buNone/>
                       </a:pPr>
                       <a:r>
@@ -4572,7 +4571,7 @@
                       </a:endParaRPr>
                     </a:p>
                   </a:txBody>
-                  <a:tcPr marL="91440" marR="91440" marT="45720" marB="45720">
+                  <a:tcPr>
                     <a:lnL w="12700" cap="flat" cmpd="sng" algn="ctr">
                       <a:solidFill>
                         <a:srgbClr val="C8D6E5"/>
@@ -4619,7 +4618,7 @@
                     <a:bodyPr/>
                     <a:lstStyle/>
                     <a:p>
-                      <a:pPr algn="ctr" indent="0" marL="0">
+                      <a:pPr marL="0" indent="0" algn="ctr">
                         <a:buNone/>
                       </a:pPr>
                       <a:r>
@@ -4640,7 +4639,7 @@
                       </a:endParaRPr>
                     </a:p>
                   </a:txBody>
-                  <a:tcPr marL="91440" marR="91440" marT="45720" marB="45720">
+                  <a:tcPr>
                     <a:lnL w="12700" cap="flat" cmpd="sng" algn="ctr">
                       <a:solidFill>
                         <a:srgbClr val="C8D6E5"/>
@@ -4684,7 +4683,7 @@
                     <a:bodyPr/>
                     <a:lstStyle/>
                     <a:p>
-                      <a:pPr algn="ctr" indent="0" marL="0">
+                      <a:pPr marL="0" indent="0" algn="ctr">
                         <a:buNone/>
                       </a:pPr>
                       <a:r>
@@ -4705,7 +4704,7 @@
                       </a:endParaRPr>
                     </a:p>
                   </a:txBody>
-                  <a:tcPr marL="91440" marR="91440" marT="45720" marB="45720">
+                  <a:tcPr>
                     <a:lnL w="12700" cap="flat" cmpd="sng" algn="ctr">
                       <a:solidFill>
                         <a:srgbClr val="C8D6E5"/>
@@ -4749,7 +4748,7 @@
                     <a:bodyPr/>
                     <a:lstStyle/>
                     <a:p>
-                      <a:pPr algn="ctr" indent="0" marL="0">
+                      <a:pPr marL="0" indent="0" algn="ctr">
                         <a:buNone/>
                       </a:pPr>
                       <a:r>
@@ -4770,7 +4769,7 @@
                       </a:endParaRPr>
                     </a:p>
                   </a:txBody>
-                  <a:tcPr marL="91440" marR="91440" marT="45720" marB="45720">
+                  <a:tcPr>
                     <a:lnL w="12700" cap="flat" cmpd="sng" algn="ctr">
                       <a:solidFill>
                         <a:srgbClr val="C8D6E5"/>
@@ -4814,7 +4813,7 @@
                     <a:bodyPr/>
                     <a:lstStyle/>
                     <a:p>
-                      <a:pPr algn="ctr" indent="0" marL="0">
+                      <a:pPr marL="0" indent="0" algn="ctr">
                         <a:buNone/>
                       </a:pPr>
                       <a:r>
@@ -4835,7 +4834,7 @@
                       </a:endParaRPr>
                     </a:p>
                   </a:txBody>
-                  <a:tcPr marL="91440" marR="91440" marT="45720" marB="45720">
+                  <a:tcPr>
                     <a:lnL w="12700" cap="flat" cmpd="sng" algn="ctr">
                       <a:solidFill>
                         <a:srgbClr val="C8D6E5"/>
@@ -4879,7 +4878,7 @@
                     <a:bodyPr/>
                     <a:lstStyle/>
                     <a:p>
-                      <a:pPr algn="ctr" indent="0" marL="0">
+                      <a:pPr marL="0" indent="0" algn="ctr">
                         <a:buNone/>
                       </a:pPr>
                       <a:r>
@@ -4900,7 +4899,7 @@
                       </a:endParaRPr>
                     </a:p>
                   </a:txBody>
-                  <a:tcPr marL="91440" marR="91440" marT="45720" marB="45720">
+                  <a:tcPr>
                     <a:lnL w="12700" cap="flat" cmpd="sng" algn="ctr">
                       <a:solidFill>
                         <a:srgbClr val="C8D6E5"/>
@@ -4944,7 +4943,7 @@
                     <a:bodyPr/>
                     <a:lstStyle/>
                     <a:p>
-                      <a:pPr algn="ctr" indent="0" marL="0">
+                      <a:pPr marL="0" indent="0" algn="ctr">
                         <a:buNone/>
                       </a:pPr>
                       <a:r>
@@ -4965,7 +4964,7 @@
                       </a:endParaRPr>
                     </a:p>
                   </a:txBody>
-                  <a:tcPr marL="91440" marR="91440" marT="45720" marB="45720">
+                  <a:tcPr>
                     <a:lnL w="12700" cap="flat" cmpd="sng" algn="ctr">
                       <a:solidFill>
                         <a:srgbClr val="C8D6E5"/>
@@ -5009,7 +5008,7 @@
                     <a:bodyPr/>
                     <a:lstStyle/>
                     <a:p>
-                      <a:pPr algn="ctr" indent="0" marL="0">
+                      <a:pPr marL="0" indent="0" algn="ctr">
                         <a:buNone/>
                       </a:pPr>
                       <a:r>
@@ -5030,7 +5029,7 @@
                       </a:endParaRPr>
                     </a:p>
                   </a:txBody>
-                  <a:tcPr marL="91440" marR="91440" marT="45720" marB="45720">
+                  <a:tcPr>
                     <a:lnL w="12700" cap="flat" cmpd="sng" algn="ctr">
                       <a:solidFill>
                         <a:srgbClr val="C8D6E5"/>
@@ -5069,6 +5068,11 @@
                     </a:lnB>
                   </a:tcPr>
                 </a:tc>
+                <a:extLst>
+                  <a:ext uri="{0D108BD9-81ED-4DB2-BD59-A6C34878D82A}">
+                    <a16:rowId xmlns:a16="http://schemas.microsoft.com/office/drawing/2014/main" val="10002"/>
+                  </a:ext>
+                </a:extLst>
               </a:tr>
               <a:tr h="685800">
                 <a:tc>
@@ -5076,7 +5080,7 @@
                     <a:bodyPr/>
                     <a:lstStyle/>
                     <a:p>
-                      <a:pPr algn="l" indent="0" marL="0">
+                      <a:pPr marL="0" indent="0" algn="l">
                         <a:buNone/>
                       </a:pPr>
                       <a:r>
@@ -5097,7 +5101,7 @@
                       </a:endParaRPr>
                     </a:p>
                   </a:txBody>
-                  <a:tcPr marL="91440" marR="91440" marT="45720" marB="45720">
+                  <a:tcPr>
                     <a:lnL w="12700" cap="flat" cmpd="sng" algn="ctr">
                       <a:solidFill>
                         <a:srgbClr val="C8D6E5"/>
@@ -5144,7 +5148,7 @@
                     <a:bodyPr/>
                     <a:lstStyle/>
                     <a:p>
-                      <a:pPr algn="ctr" indent="0" marL="0">
+                      <a:pPr marL="0" indent="0" algn="ctr">
                         <a:buNone/>
                       </a:pPr>
                       <a:r>
@@ -5165,7 +5169,7 @@
                       </a:endParaRPr>
                     </a:p>
                   </a:txBody>
-                  <a:tcPr marL="91440" marR="91440" marT="45720" marB="45720">
+                  <a:tcPr>
                     <a:lnL w="12700" cap="flat" cmpd="sng" algn="ctr">
                       <a:solidFill>
                         <a:srgbClr val="C8D6E5"/>
@@ -5209,7 +5213,7 @@
                     <a:bodyPr/>
                     <a:lstStyle/>
                     <a:p>
-                      <a:pPr algn="ctr" indent="0" marL="0">
+                      <a:pPr marL="0" indent="0" algn="ctr">
                         <a:buNone/>
                       </a:pPr>
                       <a:r>
@@ -5230,7 +5234,7 @@
                       </a:endParaRPr>
                     </a:p>
                   </a:txBody>
-                  <a:tcPr marL="91440" marR="91440" marT="45720" marB="45720">
+                  <a:tcPr>
                     <a:lnL w="12700" cap="flat" cmpd="sng" algn="ctr">
                       <a:solidFill>
                         <a:srgbClr val="C8D6E5"/>
@@ -5274,7 +5278,7 @@
                     <a:bodyPr/>
                     <a:lstStyle/>
                     <a:p>
-                      <a:pPr algn="ctr" indent="0" marL="0">
+                      <a:pPr marL="0" indent="0" algn="ctr">
                         <a:buNone/>
                       </a:pPr>
                       <a:r>
@@ -5295,7 +5299,7 @@
                       </a:endParaRPr>
                     </a:p>
                   </a:txBody>
-                  <a:tcPr marL="91440" marR="91440" marT="45720" marB="45720">
+                  <a:tcPr>
                     <a:lnL w="12700" cap="flat" cmpd="sng" algn="ctr">
                       <a:solidFill>
                         <a:srgbClr val="C8D6E5"/>
@@ -5339,7 +5343,7 @@
                     <a:bodyPr/>
                     <a:lstStyle/>
                     <a:p>
-                      <a:pPr algn="ctr" indent="0" marL="0">
+                      <a:pPr marL="0" indent="0" algn="ctr">
                         <a:buNone/>
                       </a:pPr>
                       <a:r>
@@ -5360,7 +5364,7 @@
                       </a:endParaRPr>
                     </a:p>
                   </a:txBody>
-                  <a:tcPr marL="91440" marR="91440" marT="45720" marB="45720">
+                  <a:tcPr>
                     <a:lnL w="12700" cap="flat" cmpd="sng" algn="ctr">
                       <a:solidFill>
                         <a:srgbClr val="C8D6E5"/>
@@ -5404,7 +5408,7 @@
                     <a:bodyPr/>
                     <a:lstStyle/>
                     <a:p>
-                      <a:pPr algn="ctr" indent="0" marL="0">
+                      <a:pPr marL="0" indent="0" algn="ctr">
                         <a:buNone/>
                       </a:pPr>
                       <a:r>
@@ -5425,7 +5429,7 @@
                       </a:endParaRPr>
                     </a:p>
                   </a:txBody>
-                  <a:tcPr marL="91440" marR="91440" marT="45720" marB="45720">
+                  <a:tcPr>
                     <a:lnL w="12700" cap="flat" cmpd="sng" algn="ctr">
                       <a:solidFill>
                         <a:srgbClr val="C8D6E5"/>
@@ -5469,7 +5473,7 @@
                     <a:bodyPr/>
                     <a:lstStyle/>
                     <a:p>
-                      <a:pPr algn="ctr" indent="0" marL="0">
+                      <a:pPr marL="0" indent="0" algn="ctr">
                         <a:buNone/>
                       </a:pPr>
                       <a:r>
@@ -5490,7 +5494,7 @@
                       </a:endParaRPr>
                     </a:p>
                   </a:txBody>
-                  <a:tcPr marL="91440" marR="91440" marT="45720" marB="45720">
+                  <a:tcPr>
                     <a:lnL w="12700" cap="flat" cmpd="sng" algn="ctr">
                       <a:solidFill>
                         <a:srgbClr val="C8D6E5"/>
@@ -5534,7 +5538,7 @@
                     <a:bodyPr/>
                     <a:lstStyle/>
                     <a:p>
-                      <a:pPr algn="ctr" indent="0" marL="0">
+                      <a:pPr marL="0" indent="0" algn="ctr">
                         <a:buNone/>
                       </a:pPr>
                       <a:r>
@@ -5555,7 +5559,7 @@
                       </a:endParaRPr>
                     </a:p>
                   </a:txBody>
-                  <a:tcPr marL="91440" marR="91440" marT="45720" marB="45720">
+                  <a:tcPr>
                     <a:lnL w="12700" cap="flat" cmpd="sng" algn="ctr">
                       <a:solidFill>
                         <a:srgbClr val="C8D6E5"/>
@@ -5594,6 +5598,11 @@
                     </a:lnB>
                   </a:tcPr>
                 </a:tc>
+                <a:extLst>
+                  <a:ext uri="{0D108BD9-81ED-4DB2-BD59-A6C34878D82A}">
+                    <a16:rowId xmlns:a16="http://schemas.microsoft.com/office/drawing/2014/main" val="10003"/>
+                  </a:ext>
+                </a:extLst>
               </a:tr>
               <a:tr h="685800">
                 <a:tc>
@@ -5601,7 +5610,7 @@
                     <a:bodyPr/>
                     <a:lstStyle/>
                     <a:p>
-                      <a:pPr algn="l" indent="0" marL="0">
+                      <a:pPr marL="0" indent="0" algn="l">
                         <a:buNone/>
                       </a:pPr>
                       <a:r>
@@ -5622,7 +5631,7 @@
                       </a:endParaRPr>
                     </a:p>
                   </a:txBody>
-                  <a:tcPr marL="91440" marR="91440" marT="45720" marB="45720">
+                  <a:tcPr>
                     <a:lnL w="12700" cap="flat" cmpd="sng" algn="ctr">
                       <a:solidFill>
                         <a:srgbClr val="C8D6E5"/>
@@ -5669,7 +5678,7 @@
                     <a:bodyPr/>
                     <a:lstStyle/>
                     <a:p>
-                      <a:pPr algn="ctr" indent="0" marL="0">
+                      <a:pPr marL="0" indent="0" algn="ctr">
                         <a:buNone/>
                       </a:pPr>
                       <a:r>
@@ -5690,7 +5699,7 @@
                       </a:endParaRPr>
                     </a:p>
                   </a:txBody>
-                  <a:tcPr marL="91440" marR="91440" marT="45720" marB="45720">
+                  <a:tcPr>
                     <a:lnL w="12700" cap="flat" cmpd="sng" algn="ctr">
                       <a:solidFill>
                         <a:srgbClr val="C8D6E5"/>
@@ -5734,7 +5743,7 @@
                     <a:bodyPr/>
                     <a:lstStyle/>
                     <a:p>
-                      <a:pPr algn="ctr" indent="0" marL="0">
+                      <a:pPr marL="0" indent="0" algn="ctr">
                         <a:buNone/>
                       </a:pPr>
                       <a:r>
@@ -5755,7 +5764,7 @@
                       </a:endParaRPr>
                     </a:p>
                   </a:txBody>
-                  <a:tcPr marL="91440" marR="91440" marT="45720" marB="45720">
+                  <a:tcPr>
                     <a:lnL w="12700" cap="flat" cmpd="sng" algn="ctr">
                       <a:solidFill>
                         <a:srgbClr val="C8D6E5"/>
@@ -5799,7 +5808,7 @@
                     <a:bodyPr/>
                     <a:lstStyle/>
                     <a:p>
-                      <a:pPr algn="ctr" indent="0" marL="0">
+                      <a:pPr marL="0" indent="0" algn="ctr">
                         <a:buNone/>
                       </a:pPr>
                       <a:r>
@@ -5820,7 +5829,7 @@
                       </a:endParaRPr>
                     </a:p>
                   </a:txBody>
-                  <a:tcPr marL="91440" marR="91440" marT="45720" marB="45720">
+                  <a:tcPr>
                     <a:lnL w="12700" cap="flat" cmpd="sng" algn="ctr">
                       <a:solidFill>
                         <a:srgbClr val="C8D6E5"/>
@@ -5864,7 +5873,7 @@
                     <a:bodyPr/>
                     <a:lstStyle/>
                     <a:p>
-                      <a:pPr algn="ctr" indent="0" marL="0">
+                      <a:pPr marL="0" indent="0" algn="ctr">
                         <a:buNone/>
                       </a:pPr>
                       <a:r>
@@ -5885,7 +5894,7 @@
                       </a:endParaRPr>
                     </a:p>
                   </a:txBody>
-                  <a:tcPr marL="91440" marR="91440" marT="45720" marB="45720">
+                  <a:tcPr>
                     <a:lnL w="12700" cap="flat" cmpd="sng" algn="ctr">
                       <a:solidFill>
                         <a:srgbClr val="C8D6E5"/>
@@ -5929,7 +5938,7 @@
                     <a:bodyPr/>
                     <a:lstStyle/>
                     <a:p>
-                      <a:pPr algn="ctr" indent="0" marL="0">
+                      <a:pPr marL="0" indent="0" algn="ctr">
                         <a:buNone/>
                       </a:pPr>
                       <a:r>
@@ -5950,7 +5959,7 @@
                       </a:endParaRPr>
                     </a:p>
                   </a:txBody>
-                  <a:tcPr marL="91440" marR="91440" marT="45720" marB="45720">
+                  <a:tcPr>
                     <a:lnL w="12700" cap="flat" cmpd="sng" algn="ctr">
                       <a:solidFill>
                         <a:srgbClr val="C8D6E5"/>
@@ -5994,7 +6003,7 @@
                     <a:bodyPr/>
                     <a:lstStyle/>
                     <a:p>
-                      <a:pPr algn="ctr" indent="0" marL="0">
+                      <a:pPr marL="0" indent="0" algn="ctr">
                         <a:buNone/>
                       </a:pPr>
                       <a:r>
@@ -6015,7 +6024,7 @@
                       </a:endParaRPr>
                     </a:p>
                   </a:txBody>
-                  <a:tcPr marL="91440" marR="91440" marT="45720" marB="45720">
+                  <a:tcPr>
                     <a:lnL w="12700" cap="flat" cmpd="sng" algn="ctr">
                       <a:solidFill>
                         <a:srgbClr val="C8D6E5"/>
@@ -6059,7 +6068,7 @@
                     <a:bodyPr/>
                     <a:lstStyle/>
                     <a:p>
-                      <a:pPr algn="ctr" indent="0" marL="0">
+                      <a:pPr marL="0" indent="0" algn="ctr">
                         <a:buNone/>
                       </a:pPr>
                       <a:r>
@@ -6080,7 +6089,7 @@
                       </a:endParaRPr>
                     </a:p>
                   </a:txBody>
-                  <a:tcPr marL="91440" marR="91440" marT="45720" marB="45720">
+                  <a:tcPr>
                     <a:lnL w="12700" cap="flat" cmpd="sng" algn="ctr">
                       <a:solidFill>
                         <a:srgbClr val="C8D6E5"/>
@@ -6119,6 +6128,11 @@
                     </a:lnB>
                   </a:tcPr>
                 </a:tc>
+                <a:extLst>
+                  <a:ext uri="{0D108BD9-81ED-4DB2-BD59-A6C34878D82A}">
+                    <a16:rowId xmlns:a16="http://schemas.microsoft.com/office/drawing/2014/main" val="10004"/>
+                  </a:ext>
+                </a:extLst>
               </a:tr>
             </a:tbl>
           </a:graphicData>
@@ -6148,6 +6162,13 @@
             <a:prstDash val="solid"/>
           </a:ln>
         </p:spPr>
+        <p:txBody>
+          <a:bodyPr/>
+          <a:lstStyle/>
+          <a:p>
+            <a:endParaRPr lang="en-US"/>
+          </a:p>
+        </p:txBody>
       </p:sp>
       <p:sp>
         <p:nvSpPr>
@@ -6173,6 +6194,13 @@
             <a:prstDash val="solid"/>
           </a:ln>
         </p:spPr>
+        <p:txBody>
+          <a:bodyPr/>
+          <a:lstStyle/>
+          <a:p>
+            <a:endParaRPr lang="en-US"/>
+          </a:p>
+        </p:txBody>
       </p:sp>
       <p:sp>
         <p:nvSpPr>
@@ -6195,7 +6223,7 @@
           <a:bodyPr wrap="square" lIns="0" tIns="0" rIns="0" bIns="0" rtlCol="0" anchor="ctr"/>
           <a:lstStyle/>
           <a:p>
-            <a:pPr algn="l" indent="0" marL="0">
+            <a:pPr marL="0" indent="0" algn="l">
               <a:buNone/>
             </a:pPr>
             <a:r>
@@ -6237,6 +6265,13 @@
             <a:prstDash val="solid"/>
           </a:ln>
         </p:spPr>
+        <p:txBody>
+          <a:bodyPr/>
+          <a:lstStyle/>
+          <a:p>
+            <a:endParaRPr lang="en-US"/>
+          </a:p>
+        </p:txBody>
       </p:sp>
       <p:sp>
         <p:nvSpPr>
@@ -6262,6 +6297,13 @@
             <a:prstDash val="solid"/>
           </a:ln>
         </p:spPr>
+        <p:txBody>
+          <a:bodyPr/>
+          <a:lstStyle/>
+          <a:p>
+            <a:endParaRPr lang="en-US"/>
+          </a:p>
+        </p:txBody>
       </p:sp>
       <p:sp>
         <p:nvSpPr>
@@ -6284,7 +6326,7 @@
           <a:bodyPr wrap="square" rtlCol="0" anchor="ctr"/>
           <a:lstStyle/>
           <a:p>
-            <a:pPr indent="0" marL="0">
+            <a:pPr marL="0" indent="0">
               <a:buNone/>
             </a:pPr>
             <a:r>
@@ -6298,9 +6340,6 @@
               </a:rPr>
               <a:t>Pocket Passer:  </a:t>
             </a:r>
-            <a:pPr indent="0" marL="0">
-              <a:buNone/>
-            </a:pPr>
             <a:r>
               <a:rPr lang="en-US" sz="2000" dirty="0">
                 <a:solidFill>
@@ -6340,6 +6379,13 @@
             <a:prstDash val="solid"/>
           </a:ln>
         </p:spPr>
+        <p:txBody>
+          <a:bodyPr/>
+          <a:lstStyle/>
+          <a:p>
+            <a:endParaRPr lang="en-US"/>
+          </a:p>
+        </p:txBody>
       </p:sp>
       <p:sp>
         <p:nvSpPr>
@@ -6365,6 +6411,13 @@
             <a:prstDash val="solid"/>
           </a:ln>
         </p:spPr>
+        <p:txBody>
+          <a:bodyPr/>
+          <a:lstStyle/>
+          <a:p>
+            <a:endParaRPr lang="en-US"/>
+          </a:p>
+        </p:txBody>
       </p:sp>
       <p:sp>
         <p:nvSpPr>
@@ -6387,7 +6440,7 @@
           <a:bodyPr wrap="square" rtlCol="0" anchor="ctr"/>
           <a:lstStyle/>
           <a:p>
-            <a:pPr indent="0" marL="0">
+            <a:pPr marL="0" indent="0">
               <a:buNone/>
             </a:pPr>
             <a:r>
@@ -6401,9 +6454,6 @@
               </a:rPr>
               <a:t>Game Manager:  </a:t>
             </a:r>
-            <a:pPr indent="0" marL="0">
-              <a:buNone/>
-            </a:pPr>
             <a:r>
               <a:rPr lang="en-US" sz="2000" dirty="0">
                 <a:solidFill>
@@ -6443,6 +6493,13 @@
             <a:prstDash val="solid"/>
           </a:ln>
         </p:spPr>
+        <p:txBody>
+          <a:bodyPr/>
+          <a:lstStyle/>
+          <a:p>
+            <a:endParaRPr lang="en-US"/>
+          </a:p>
+        </p:txBody>
       </p:sp>
       <p:sp>
         <p:nvSpPr>
@@ -6468,6 +6525,13 @@
             <a:prstDash val="solid"/>
           </a:ln>
         </p:spPr>
+        <p:txBody>
+          <a:bodyPr/>
+          <a:lstStyle/>
+          <a:p>
+            <a:endParaRPr lang="en-US"/>
+          </a:p>
+        </p:txBody>
       </p:sp>
       <p:sp>
         <p:nvSpPr>
@@ -6490,7 +6554,7 @@
           <a:bodyPr wrap="square" rtlCol="0" anchor="ctr"/>
           <a:lstStyle/>
           <a:p>
-            <a:pPr indent="0" marL="0">
+            <a:pPr marL="0" indent="0">
               <a:buNone/>
             </a:pPr>
             <a:r>
@@ -6504,9 +6568,6 @@
               </a:rPr>
               <a:t>Gunslinger:  </a:t>
             </a:r>
-            <a:pPr indent="0" marL="0">
-              <a:buNone/>
-            </a:pPr>
             <a:r>
               <a:rPr lang="en-US" sz="2000" dirty="0">
                 <a:solidFill>
@@ -6546,6 +6607,13 @@
             <a:prstDash val="solid"/>
           </a:ln>
         </p:spPr>
+        <p:txBody>
+          <a:bodyPr/>
+          <a:lstStyle/>
+          <a:p>
+            <a:endParaRPr lang="en-US"/>
+          </a:p>
+        </p:txBody>
       </p:sp>
       <p:sp>
         <p:nvSpPr>
@@ -6571,6 +6639,13 @@
             <a:prstDash val="solid"/>
           </a:ln>
         </p:spPr>
+        <p:txBody>
+          <a:bodyPr/>
+          <a:lstStyle/>
+          <a:p>
+            <a:endParaRPr lang="en-US"/>
+          </a:p>
+        </p:txBody>
       </p:sp>
       <p:sp>
         <p:nvSpPr>
@@ -6593,7 +6668,7 @@
           <a:bodyPr wrap="square" rtlCol="0" anchor="ctr"/>
           <a:lstStyle/>
           <a:p>
-            <a:pPr indent="0" marL="0">
+            <a:pPr marL="0" indent="0">
               <a:buNone/>
             </a:pPr>
             <a:r>
@@ -6607,9 +6682,6 @@
               </a:rPr>
               <a:t>Dual Threat:  </a:t>
             </a:r>
-            <a:pPr indent="0" marL="0">
-              <a:buNone/>
-            </a:pPr>
             <a:r>
               <a:rPr lang="en-US" sz="2000" dirty="0">
                 <a:solidFill>
@@ -6649,6 +6721,13 @@
             <a:prstDash val="solid"/>
           </a:ln>
         </p:spPr>
+        <p:txBody>
+          <a:bodyPr/>
+          <a:lstStyle/>
+          <a:p>
+            <a:endParaRPr lang="en-US"/>
+          </a:p>
+        </p:txBody>
       </p:sp>
       <p:sp>
         <p:nvSpPr>
@@ -6674,6 +6753,13 @@
             <a:prstDash val="solid"/>
           </a:ln>
         </p:spPr>
+        <p:txBody>
+          <a:bodyPr/>
+          <a:lstStyle/>
+          <a:p>
+            <a:endParaRPr lang="en-US"/>
+          </a:p>
+        </p:txBody>
       </p:sp>
       <p:sp>
         <p:nvSpPr>
@@ -6696,7 +6782,7 @@
           <a:bodyPr wrap="square" lIns="0" tIns="0" rIns="0" bIns="0" rtlCol="0" anchor="ctr"/>
           <a:lstStyle/>
           <a:p>
-            <a:pPr algn="l" indent="0" marL="0">
+            <a:pPr marL="0" indent="0" algn="l">
               <a:buNone/>
             </a:pPr>
             <a:r>
@@ -6738,6 +6824,13 @@
             <a:prstDash val="solid"/>
           </a:ln>
         </p:spPr>
+        <p:txBody>
+          <a:bodyPr/>
+          <a:lstStyle/>
+          <a:p>
+            <a:endParaRPr lang="en-US"/>
+          </a:p>
+        </p:txBody>
       </p:sp>
       <p:sp>
         <p:nvSpPr>
@@ -6760,7 +6853,7 @@
           <a:bodyPr wrap="square" rtlCol="0" anchor="ctr"/>
           <a:lstStyle/>
           <a:p>
-            <a:pPr indent="0" marL="0">
+            <a:pPr marL="0" indent="0">
               <a:buNone/>
             </a:pPr>
             <a:r>
@@ -6774,9 +6867,6 @@
               </a:rPr>
               <a:t>10 / 10  </a:t>
             </a:r>
-            <a:pPr indent="0" marL="0">
-              <a:buNone/>
-            </a:pPr>
             <a:r>
               <a:rPr lang="en-US" sz="2200" dirty="0">
                 <a:solidFill>
@@ -6791,7 +6881,7 @@
             <a:endParaRPr lang="en-US" sz="4400" dirty="0"/>
           </a:p>
           <a:p>
-            <a:pPr indent="0" marL="0">
+            <a:pPr marL="0" indent="0">
               <a:buNone/>
             </a:pPr>
             <a:r>
@@ -6830,7 +6920,7 @@
           <a:bodyPr wrap="square" rtlCol="0" anchor="ctr"/>
           <a:lstStyle/>
           <a:p>
-            <a:pPr indent="0" marL="0">
+            <a:pPr marL="0" indent="0">
               <a:buNone/>
             </a:pPr>
             <a:r>
@@ -6872,6 +6962,13 @@
             <a:prstDash val="solid"/>
           </a:ln>
         </p:spPr>
+        <p:txBody>
+          <a:bodyPr/>
+          <a:lstStyle/>
+          <a:p>
+            <a:endParaRPr lang="en-US"/>
+          </a:p>
+        </p:txBody>
       </p:sp>
       <p:sp>
         <p:nvSpPr>
@@ -6897,6 +6994,13 @@
             <a:prstDash val="solid"/>
           </a:ln>
         </p:spPr>
+        <p:txBody>
+          <a:bodyPr/>
+          <a:lstStyle/>
+          <a:p>
+            <a:endParaRPr lang="en-US"/>
+          </a:p>
+        </p:txBody>
       </p:sp>
       <p:sp>
         <p:nvSpPr>
@@ -6919,7 +7023,7 @@
           <a:bodyPr wrap="square" lIns="0" tIns="0" rIns="0" bIns="0" rtlCol="0" anchor="ctr"/>
           <a:lstStyle/>
           <a:p>
-            <a:pPr algn="l" indent="0" marL="0">
+            <a:pPr marL="0" indent="0" algn="l">
               <a:buNone/>
             </a:pPr>
             <a:r>
@@ -6939,7 +7043,7 @@
       </p:sp>
       <p:graphicFrame>
         <p:nvGraphicFramePr>
-          <p:cNvPr id="3" name="Table 1"/>
+          <p:cNvPr id="91" name="Table 1"/>
           <p:cNvGraphicFramePr>
             <a:graphicFrameLocks noGrp="1"/>
           </p:cNvGraphicFramePr>
@@ -6953,16 +7057,34 @@
         </p:nvGraphicFramePr>
         <p:xfrm>
           <a:off x="20482560" y="6428232"/>
-          <a:ext cx="11978640" cy="914400"/>
+          <a:ext cx="8686800" cy="3730752"/>
         </p:xfrm>
         <a:graphic>
           <a:graphicData uri="http://schemas.openxmlformats.org/drawingml/2006/table">
             <a:tbl>
               <a:tblPr/>
               <a:tblGrid>
-                <a:gridCol w="5486400"/>
-                <a:gridCol w="1920240"/>
-                <a:gridCol w="1280160"/>
+                <a:gridCol w="5486400">
+                  <a:extLst>
+                    <a:ext uri="{9D8B030D-6E8A-4147-A177-3AD203B41FA5}">
+                      <a16:colId xmlns:a16="http://schemas.microsoft.com/office/drawing/2014/main" val="20000"/>
+                    </a:ext>
+                  </a:extLst>
+                </a:gridCol>
+                <a:gridCol w="1920240">
+                  <a:extLst>
+                    <a:ext uri="{9D8B030D-6E8A-4147-A177-3AD203B41FA5}">
+                      <a16:colId xmlns:a16="http://schemas.microsoft.com/office/drawing/2014/main" val="20001"/>
+                    </a:ext>
+                  </a:extLst>
+                </a:gridCol>
+                <a:gridCol w="1280160">
+                  <a:extLst>
+                    <a:ext uri="{9D8B030D-6E8A-4147-A177-3AD203B41FA5}">
+                      <a16:colId xmlns:a16="http://schemas.microsoft.com/office/drawing/2014/main" val="20002"/>
+                    </a:ext>
+                  </a:extLst>
+                </a:gridCol>
               </a:tblGrid>
               <a:tr h="621792">
                 <a:tc>
@@ -6970,7 +7092,7 @@
                     <a:bodyPr/>
                     <a:lstStyle/>
                     <a:p>
-                      <a:pPr indent="0" marL="0">
+                      <a:pPr marL="0" indent="0">
                         <a:buNone/>
                       </a:pPr>
                       <a:r>
@@ -6991,7 +7113,7 @@
                       </a:endParaRPr>
                     </a:p>
                   </a:txBody>
-                  <a:tcPr marL="91440" marR="91440" marT="45720" marB="45720">
+                  <a:tcPr>
                     <a:lnL w="12700" cap="flat" cmpd="sng" algn="ctr">
                       <a:solidFill>
                         <a:srgbClr val="C8D6E5"/>
@@ -7038,7 +7160,7 @@
                     <a:bodyPr/>
                     <a:lstStyle/>
                     <a:p>
-                      <a:pPr algn="ctr" indent="0" marL="0">
+                      <a:pPr marL="0" indent="0" algn="ctr">
                         <a:buNone/>
                       </a:pPr>
                       <a:r>
@@ -7059,7 +7181,7 @@
                       </a:endParaRPr>
                     </a:p>
                   </a:txBody>
-                  <a:tcPr marL="91440" marR="91440" marT="45720" marB="45720">
+                  <a:tcPr>
                     <a:lnL w="12700" cap="flat" cmpd="sng" algn="ctr">
                       <a:solidFill>
                         <a:srgbClr val="C8D6E5"/>
@@ -7106,7 +7228,7 @@
                     <a:bodyPr/>
                     <a:lstStyle/>
                     <a:p>
-                      <a:pPr algn="ctr" indent="0" marL="0">
+                      <a:pPr marL="0" indent="0" algn="ctr">
                         <a:buNone/>
                       </a:pPr>
                       <a:r>
@@ -7127,7 +7249,7 @@
                       </a:endParaRPr>
                     </a:p>
                   </a:txBody>
-                  <a:tcPr marL="91440" marR="91440" marT="45720" marB="45720">
+                  <a:tcPr>
                     <a:lnL w="12700" cap="flat" cmpd="sng" algn="ctr">
                       <a:solidFill>
                         <a:srgbClr val="C8D6E5"/>
@@ -7169,6 +7291,11 @@
                     </a:solidFill>
                   </a:tcPr>
                 </a:tc>
+                <a:extLst>
+                  <a:ext uri="{0D108BD9-81ED-4DB2-BD59-A6C34878D82A}">
+                    <a16:rowId xmlns:a16="http://schemas.microsoft.com/office/drawing/2014/main" val="10000"/>
+                  </a:ext>
+                </a:extLst>
               </a:tr>
               <a:tr h="621792">
                 <a:tc>
@@ -7176,7 +7303,7 @@
                     <a:bodyPr/>
                     <a:lstStyle/>
                     <a:p>
-                      <a:pPr indent="0" marL="0">
+                      <a:pPr marL="0" indent="0">
                         <a:buNone/>
                       </a:pPr>
                       <a:r>
@@ -7197,7 +7324,7 @@
                       </a:endParaRPr>
                     </a:p>
                   </a:txBody>
-                  <a:tcPr marL="91440" marR="91440" marT="45720" marB="45720">
+                  <a:tcPr>
                     <a:lnL w="12700" cap="flat" cmpd="sng" algn="ctr">
                       <a:solidFill>
                         <a:srgbClr val="C8D6E5"/>
@@ -7244,7 +7371,7 @@
                     <a:bodyPr/>
                     <a:lstStyle/>
                     <a:p>
-                      <a:pPr algn="ctr" indent="0" marL="0">
+                      <a:pPr marL="0" indent="0" algn="ctr">
                         <a:buNone/>
                       </a:pPr>
                       <a:r>
@@ -7265,7 +7392,7 @@
                       </a:endParaRPr>
                     </a:p>
                   </a:txBody>
-                  <a:tcPr marL="91440" marR="91440" marT="45720" marB="45720">
+                  <a:tcPr>
                     <a:lnL w="12700" cap="flat" cmpd="sng" algn="ctr">
                       <a:solidFill>
                         <a:srgbClr val="C8D6E5"/>
@@ -7312,7 +7439,7 @@
                     <a:bodyPr/>
                     <a:lstStyle/>
                     <a:p>
-                      <a:pPr algn="ctr" indent="0" marL="0">
+                      <a:pPr marL="0" indent="0" algn="ctr">
                         <a:buNone/>
                       </a:pPr>
                       <a:r>
@@ -7333,7 +7460,7 @@
                       </a:endParaRPr>
                     </a:p>
                   </a:txBody>
-                  <a:tcPr marL="91440" marR="91440" marT="45720" marB="45720">
+                  <a:tcPr>
                     <a:lnL w="12700" cap="flat" cmpd="sng" algn="ctr">
                       <a:solidFill>
                         <a:srgbClr val="C8D6E5"/>
@@ -7375,6 +7502,11 @@
                     </a:solidFill>
                   </a:tcPr>
                 </a:tc>
+                <a:extLst>
+                  <a:ext uri="{0D108BD9-81ED-4DB2-BD59-A6C34878D82A}">
+                    <a16:rowId xmlns:a16="http://schemas.microsoft.com/office/drawing/2014/main" val="10001"/>
+                  </a:ext>
+                </a:extLst>
               </a:tr>
               <a:tr h="621792">
                 <a:tc>
@@ -7382,7 +7514,7 @@
                     <a:bodyPr/>
                     <a:lstStyle/>
                     <a:p>
-                      <a:pPr indent="0" marL="0">
+                      <a:pPr marL="0" indent="0">
                         <a:buNone/>
                       </a:pPr>
                       <a:r>
@@ -7403,7 +7535,7 @@
                       </a:endParaRPr>
                     </a:p>
                   </a:txBody>
-                  <a:tcPr marL="91440" marR="91440" marT="45720" marB="45720">
+                  <a:tcPr>
                     <a:lnL w="12700" cap="flat" cmpd="sng" algn="ctr">
                       <a:solidFill>
                         <a:srgbClr val="C8D6E5"/>
@@ -7450,7 +7582,7 @@
                     <a:bodyPr/>
                     <a:lstStyle/>
                     <a:p>
-                      <a:pPr algn="ctr" indent="0" marL="0">
+                      <a:pPr marL="0" indent="0" algn="ctr">
                         <a:buNone/>
                       </a:pPr>
                       <a:r>
@@ -7471,7 +7603,7 @@
                       </a:endParaRPr>
                     </a:p>
                   </a:txBody>
-                  <a:tcPr marL="91440" marR="91440" marT="45720" marB="45720">
+                  <a:tcPr>
                     <a:lnL w="12700" cap="flat" cmpd="sng" algn="ctr">
                       <a:solidFill>
                         <a:srgbClr val="C8D6E5"/>
@@ -7518,7 +7650,7 @@
                     <a:bodyPr/>
                     <a:lstStyle/>
                     <a:p>
-                      <a:pPr algn="ctr" indent="0" marL="0">
+                      <a:pPr marL="0" indent="0" algn="ctr">
                         <a:buNone/>
                       </a:pPr>
                       <a:r>
@@ -7539,7 +7671,7 @@
                       </a:endParaRPr>
                     </a:p>
                   </a:txBody>
-                  <a:tcPr marL="91440" marR="91440" marT="45720" marB="45720">
+                  <a:tcPr>
                     <a:lnL w="12700" cap="flat" cmpd="sng" algn="ctr">
                       <a:solidFill>
                         <a:srgbClr val="C8D6E5"/>
@@ -7581,6 +7713,11 @@
                     </a:solidFill>
                   </a:tcPr>
                 </a:tc>
+                <a:extLst>
+                  <a:ext uri="{0D108BD9-81ED-4DB2-BD59-A6C34878D82A}">
+                    <a16:rowId xmlns:a16="http://schemas.microsoft.com/office/drawing/2014/main" val="10002"/>
+                  </a:ext>
+                </a:extLst>
               </a:tr>
               <a:tr h="621792">
                 <a:tc>
@@ -7588,7 +7725,7 @@
                     <a:bodyPr/>
                     <a:lstStyle/>
                     <a:p>
-                      <a:pPr indent="0" marL="0">
+                      <a:pPr marL="0" indent="0">
                         <a:buNone/>
                       </a:pPr>
                       <a:r>
@@ -7609,7 +7746,7 @@
                       </a:endParaRPr>
                     </a:p>
                   </a:txBody>
-                  <a:tcPr marL="91440" marR="91440" marT="45720" marB="45720">
+                  <a:tcPr>
                     <a:lnL w="12700" cap="flat" cmpd="sng" algn="ctr">
                       <a:solidFill>
                         <a:srgbClr val="C8D6E5"/>
@@ -7656,7 +7793,7 @@
                     <a:bodyPr/>
                     <a:lstStyle/>
                     <a:p>
-                      <a:pPr algn="ctr" indent="0" marL="0">
+                      <a:pPr marL="0" indent="0" algn="ctr">
                         <a:buNone/>
                       </a:pPr>
                       <a:r>
@@ -7677,7 +7814,7 @@
                       </a:endParaRPr>
                     </a:p>
                   </a:txBody>
-                  <a:tcPr marL="91440" marR="91440" marT="45720" marB="45720">
+                  <a:tcPr>
                     <a:lnL w="12700" cap="flat" cmpd="sng" algn="ctr">
                       <a:solidFill>
                         <a:srgbClr val="C8D6E5"/>
@@ -7724,7 +7861,7 @@
                     <a:bodyPr/>
                     <a:lstStyle/>
                     <a:p>
-                      <a:pPr algn="ctr" indent="0" marL="0">
+                      <a:pPr marL="0" indent="0" algn="ctr">
                         <a:buNone/>
                       </a:pPr>
                       <a:r>
@@ -7745,7 +7882,7 @@
                       </a:endParaRPr>
                     </a:p>
                   </a:txBody>
-                  <a:tcPr marL="91440" marR="91440" marT="45720" marB="45720">
+                  <a:tcPr>
                     <a:lnL w="12700" cap="flat" cmpd="sng" algn="ctr">
                       <a:solidFill>
                         <a:srgbClr val="C8D6E5"/>
@@ -7787,6 +7924,11 @@
                     </a:solidFill>
                   </a:tcPr>
                 </a:tc>
+                <a:extLst>
+                  <a:ext uri="{0D108BD9-81ED-4DB2-BD59-A6C34878D82A}">
+                    <a16:rowId xmlns:a16="http://schemas.microsoft.com/office/drawing/2014/main" val="10003"/>
+                  </a:ext>
+                </a:extLst>
               </a:tr>
               <a:tr h="621792">
                 <a:tc>
@@ -7794,7 +7936,7 @@
                     <a:bodyPr/>
                     <a:lstStyle/>
                     <a:p>
-                      <a:pPr indent="0" marL="0">
+                      <a:pPr marL="0" indent="0">
                         <a:buNone/>
                       </a:pPr>
                       <a:r>
@@ -7815,7 +7957,7 @@
                       </a:endParaRPr>
                     </a:p>
                   </a:txBody>
-                  <a:tcPr marL="91440" marR="91440" marT="45720" marB="45720">
+                  <a:tcPr>
                     <a:lnL w="12700" cap="flat" cmpd="sng" algn="ctr">
                       <a:solidFill>
                         <a:srgbClr val="C8D6E5"/>
@@ -7862,7 +8004,7 @@
                     <a:bodyPr/>
                     <a:lstStyle/>
                     <a:p>
-                      <a:pPr algn="ctr" indent="0" marL="0">
+                      <a:pPr marL="0" indent="0" algn="ctr">
                         <a:buNone/>
                       </a:pPr>
                       <a:r>
@@ -7883,7 +8025,7 @@
                       </a:endParaRPr>
                     </a:p>
                   </a:txBody>
-                  <a:tcPr marL="91440" marR="91440" marT="45720" marB="45720">
+                  <a:tcPr>
                     <a:lnL w="12700" cap="flat" cmpd="sng" algn="ctr">
                       <a:solidFill>
                         <a:srgbClr val="C8D6E5"/>
@@ -7930,7 +8072,7 @@
                     <a:bodyPr/>
                     <a:lstStyle/>
                     <a:p>
-                      <a:pPr algn="ctr" indent="0" marL="0">
+                      <a:pPr marL="0" indent="0" algn="ctr">
                         <a:buNone/>
                       </a:pPr>
                       <a:r>
@@ -7951,7 +8093,7 @@
                       </a:endParaRPr>
                     </a:p>
                   </a:txBody>
-                  <a:tcPr marL="91440" marR="91440" marT="45720" marB="45720">
+                  <a:tcPr>
                     <a:lnL w="12700" cap="flat" cmpd="sng" algn="ctr">
                       <a:solidFill>
                         <a:srgbClr val="C8D6E5"/>
@@ -7993,6 +8135,11 @@
                     </a:solidFill>
                   </a:tcPr>
                 </a:tc>
+                <a:extLst>
+                  <a:ext uri="{0D108BD9-81ED-4DB2-BD59-A6C34878D82A}">
+                    <a16:rowId xmlns:a16="http://schemas.microsoft.com/office/drawing/2014/main" val="10004"/>
+                  </a:ext>
+                </a:extLst>
               </a:tr>
               <a:tr h="621792">
                 <a:tc>
@@ -8000,7 +8147,7 @@
                     <a:bodyPr/>
                     <a:lstStyle/>
                     <a:p>
-                      <a:pPr indent="0" marL="0">
+                      <a:pPr marL="0" indent="0">
                         <a:buNone/>
                       </a:pPr>
                       <a:r>
@@ -8021,7 +8168,7 @@
                       </a:endParaRPr>
                     </a:p>
                   </a:txBody>
-                  <a:tcPr marL="91440" marR="91440" marT="45720" marB="45720">
+                  <a:tcPr>
                     <a:lnL w="12700" cap="flat" cmpd="sng" algn="ctr">
                       <a:solidFill>
                         <a:srgbClr val="C8D6E5"/>
@@ -8068,7 +8215,7 @@
                     <a:bodyPr/>
                     <a:lstStyle/>
                     <a:p>
-                      <a:pPr algn="ctr" indent="0" marL="0">
+                      <a:pPr marL="0" indent="0" algn="ctr">
                         <a:buNone/>
                       </a:pPr>
                       <a:r>
@@ -8089,7 +8236,7 @@
                       </a:endParaRPr>
                     </a:p>
                   </a:txBody>
-                  <a:tcPr marL="91440" marR="91440" marT="45720" marB="45720">
+                  <a:tcPr>
                     <a:lnL w="12700" cap="flat" cmpd="sng" algn="ctr">
                       <a:solidFill>
                         <a:srgbClr val="C8D6E5"/>
@@ -8136,7 +8283,7 @@
                     <a:bodyPr/>
                     <a:lstStyle/>
                     <a:p>
-                      <a:pPr algn="ctr" indent="0" marL="0">
+                      <a:pPr marL="0" indent="0" algn="ctr">
                         <a:buNone/>
                       </a:pPr>
                       <a:r>
@@ -8157,7 +8304,7 @@
                       </a:endParaRPr>
                     </a:p>
                   </a:txBody>
-                  <a:tcPr marL="91440" marR="91440" marT="45720" marB="45720">
+                  <a:tcPr>
                     <a:lnL w="12700" cap="flat" cmpd="sng" algn="ctr">
                       <a:solidFill>
                         <a:srgbClr val="C8D6E5"/>
@@ -8199,6 +8346,11 @@
                     </a:solidFill>
                   </a:tcPr>
                 </a:tc>
+                <a:extLst>
+                  <a:ext uri="{0D108BD9-81ED-4DB2-BD59-A6C34878D82A}">
+                    <a16:rowId xmlns:a16="http://schemas.microsoft.com/office/drawing/2014/main" val="10005"/>
+                  </a:ext>
+                </a:extLst>
               </a:tr>
             </a:tbl>
           </a:graphicData>
@@ -8228,6 +8380,13 @@
             <a:prstDash val="solid"/>
           </a:ln>
         </p:spPr>
+        <p:txBody>
+          <a:bodyPr/>
+          <a:lstStyle/>
+          <a:p>
+            <a:endParaRPr lang="en-US"/>
+          </a:p>
+        </p:txBody>
       </p:sp>
       <p:sp>
         <p:nvSpPr>
@@ -8250,7 +8409,7 @@
           <a:bodyPr wrap="square" rtlCol="0" anchor="ctr"/>
           <a:lstStyle/>
           <a:p>
-            <a:pPr indent="0" marL="0">
+            <a:pPr marL="0" indent="0">
               <a:buNone/>
             </a:pPr>
             <a:r>
@@ -8289,7 +8448,7 @@
           <a:bodyPr wrap="square" rtlCol="0" anchor="ctr"/>
           <a:lstStyle/>
           <a:p>
-            <a:pPr indent="0" marL="0">
+            <a:pPr marL="0" indent="0">
               <a:buNone/>
             </a:pPr>
             <a:r>
@@ -8331,6 +8490,13 @@
             <a:prstDash val="solid"/>
           </a:ln>
         </p:spPr>
+        <p:txBody>
+          <a:bodyPr/>
+          <a:lstStyle/>
+          <a:p>
+            <a:endParaRPr lang="en-US"/>
+          </a:p>
+        </p:txBody>
       </p:sp>
       <p:sp>
         <p:nvSpPr>
@@ -8356,6 +8522,13 @@
             <a:prstDash val="solid"/>
           </a:ln>
         </p:spPr>
+        <p:txBody>
+          <a:bodyPr/>
+          <a:lstStyle/>
+          <a:p>
+            <a:endParaRPr lang="en-US"/>
+          </a:p>
+        </p:txBody>
       </p:sp>
       <p:sp>
         <p:nvSpPr>
@@ -8378,7 +8551,7 @@
           <a:bodyPr wrap="square" lIns="0" tIns="0" rIns="0" bIns="0" rtlCol="0" anchor="ctr"/>
           <a:lstStyle/>
           <a:p>
-            <a:pPr algn="l" indent="0" marL="0">
+            <a:pPr marL="0" indent="0" algn="l">
               <a:buNone/>
             </a:pPr>
             <a:r>
@@ -8398,7 +8571,7 @@
       </p:sp>
       <p:graphicFrame>
         <p:nvGraphicFramePr>
-          <p:cNvPr id="98" name="Chart 0" descr=""/>
+          <p:cNvPr id="98" name="Chart 0"/>
           <p:cNvGraphicFramePr/>
           <p:nvPr/>
         </p:nvGraphicFramePr>
@@ -8406,9 +8579,9 @@
           <a:off x="20482560" y="13697712"/>
           <a:ext cx="11978640" cy="3200400"/>
         </p:xfrm>
-        <a:graphic xmlns:a="http://schemas.openxmlformats.org/drawingml/2006/main">
+        <a:graphic>
           <a:graphicData uri="http://schemas.openxmlformats.org/drawingml/2006/chart">
-            <c:chart xmlns:c="http://schemas.openxmlformats.org/drawingml/2006/chart" r:id="rId3"/>
+            <c:chart xmlns:c="http://schemas.openxmlformats.org/drawingml/2006/chart" xmlns:r="http://schemas.openxmlformats.org/officeDocument/2006/relationships" r:id="rId4"/>
           </a:graphicData>
         </a:graphic>
       </p:graphicFrame>
@@ -8433,7 +8606,7 @@
           <a:bodyPr wrap="square" rtlCol="0" anchor="ctr"/>
           <a:lstStyle/>
           <a:p>
-            <a:pPr indent="0" marL="0">
+            <a:pPr marL="0" indent="0">
               <a:buNone/>
             </a:pPr>
             <a:r>
@@ -8451,6 +8624,36 @@
           </a:p>
         </p:txBody>
       </p:sp>
+      <p:pic>
+        <p:nvPicPr>
+          <p:cNvPr id="101" name="Picture 100" descr="A qr code on a white background&#10;&#10;AI-generated content may be incorrect.">
+            <a:extLst>
+              <a:ext uri="{FF2B5EF4-FFF2-40B4-BE49-F238E27FC236}">
+                <a16:creationId xmlns:a16="http://schemas.microsoft.com/office/drawing/2014/main" id="{A256B1CB-1CAB-4D67-F704-C48497C3FEED}"/>
+              </a:ext>
+            </a:extLst>
+          </p:cNvPr>
+          <p:cNvPicPr>
+            <a:picLocks noChangeAspect="1"/>
+          </p:cNvPicPr>
+          <p:nvPr/>
+        </p:nvPicPr>
+        <p:blipFill>
+          <a:blip r:embed="rId5"/>
+          <a:stretch>
+            <a:fillRect/>
+          </a:stretch>
+        </p:blipFill>
+        <p:spPr>
+          <a:xfrm>
+            <a:off x="338328" y="18685764"/>
+            <a:ext cx="2724912" cy="2724912"/>
+          </a:xfrm>
+          <a:prstGeom prst="rect">
+            <a:avLst/>
+          </a:prstGeom>
+        </p:spPr>
+      </p:pic>
     </p:spTree>
   </p:cSld>
   <p:clrMapOvr>
@@ -8752,4 +8955,319 @@
     </a:ext>
   </a:extLst>
 </a:theme>
+</file>
+
+<file path=ppt/theme/theme2.xml><?xml version="1.0" encoding="utf-8"?>
+<a:theme xmlns:a="http://schemas.openxmlformats.org/drawingml/2006/main" name="Office Theme">
+  <a:themeElements>
+    <a:clrScheme name="Office">
+      <a:dk1>
+        <a:sysClr val="windowText" lastClr="000000"/>
+      </a:dk1>
+      <a:lt1>
+        <a:sysClr val="window" lastClr="FFFFFF"/>
+      </a:lt1>
+      <a:dk2>
+        <a:srgbClr val="0E2841"/>
+      </a:dk2>
+      <a:lt2>
+        <a:srgbClr val="E8E8E8"/>
+      </a:lt2>
+      <a:accent1>
+        <a:srgbClr val="156082"/>
+      </a:accent1>
+      <a:accent2>
+        <a:srgbClr val="E97132"/>
+      </a:accent2>
+      <a:accent3>
+        <a:srgbClr val="196B24"/>
+      </a:accent3>
+      <a:accent4>
+        <a:srgbClr val="0F9ED5"/>
+      </a:accent4>
+      <a:accent5>
+        <a:srgbClr val="A02B93"/>
+      </a:accent5>
+      <a:accent6>
+        <a:srgbClr val="4EA72E"/>
+      </a:accent6>
+      <a:hlink>
+        <a:srgbClr val="467886"/>
+      </a:hlink>
+      <a:folHlink>
+        <a:srgbClr val="96607D"/>
+      </a:folHlink>
+    </a:clrScheme>
+    <a:fontScheme name="Office">
+      <a:majorFont>
+        <a:latin typeface="Aptos Display" panose="02110004020202020204"/>
+        <a:ea typeface=""/>
+        <a:cs typeface=""/>
+        <a:font script="Jpan" typeface="游ゴシック Light"/>
+        <a:font script="Hang" typeface="맑은 고딕"/>
+        <a:font script="Hans" typeface="等线 Light"/>
+        <a:font script="Hant" typeface="新細明體"/>
+        <a:font script="Arab" typeface="Times New Roman"/>
+        <a:font script="Hebr" typeface="Times New Roman"/>
+        <a:font script="Thai" typeface="Angsana New"/>
+        <a:font script="Ethi" typeface="Nyala"/>
+        <a:font script="Beng" typeface="Vrinda"/>
+        <a:font script="Gujr" typeface="Shruti"/>
+        <a:font script="Khmr" typeface="MoolBoran"/>
+        <a:font script="Knda" typeface="Tunga"/>
+        <a:font script="Guru" typeface="Raavi"/>
+        <a:font script="Cans" typeface="Euphemia"/>
+        <a:font script="Cher" typeface="Plantagenet Cherokee"/>
+        <a:font script="Yiii" typeface="Microsoft Yi Baiti"/>
+        <a:font script="Tibt" typeface="Microsoft Himalaya"/>
+        <a:font script="Thaa" typeface="MV Boli"/>
+        <a:font script="Deva" typeface="Mangal"/>
+        <a:font script="Telu" typeface="Gautami"/>
+        <a:font script="Taml" typeface="Latha"/>
+        <a:font script="Syrc" typeface="Estrangelo Edessa"/>
+        <a:font script="Orya" typeface="Kalinga"/>
+        <a:font script="Mlym" typeface="Kartika"/>
+        <a:font script="Laoo" typeface="DokChampa"/>
+        <a:font script="Sinh" typeface="Iskoola Pota"/>
+        <a:font script="Mong" typeface="Mongolian Baiti"/>
+        <a:font script="Viet" typeface="Times New Roman"/>
+        <a:font script="Uigh" typeface="Microsoft Uighur"/>
+        <a:font script="Geor" typeface="Sylfaen"/>
+        <a:font script="Armn" typeface="Arial"/>
+        <a:font script="Bugi" typeface="Leelawadee UI"/>
+        <a:font script="Bopo" typeface="Microsoft JhengHei"/>
+        <a:font script="Java" typeface="Javanese Text"/>
+        <a:font script="Lisu" typeface="Segoe UI"/>
+        <a:font script="Mymr" typeface="Myanmar Text"/>
+        <a:font script="Nkoo" typeface="Ebrima"/>
+        <a:font script="Olck" typeface="Nirmala UI"/>
+        <a:font script="Osma" typeface="Ebrima"/>
+        <a:font script="Phag" typeface="Phagspa"/>
+        <a:font script="Syrn" typeface="Estrangelo Edessa"/>
+        <a:font script="Syrj" typeface="Estrangelo Edessa"/>
+        <a:font script="Syre" typeface="Estrangelo Edessa"/>
+        <a:font script="Sora" typeface="Nirmala UI"/>
+        <a:font script="Tale" typeface="Microsoft Tai Le"/>
+        <a:font script="Talu" typeface="Microsoft New Tai Lue"/>
+        <a:font script="Tfng" typeface="Ebrima"/>
+      </a:majorFont>
+      <a:minorFont>
+        <a:latin typeface="Aptos" panose="02110004020202020204"/>
+        <a:ea typeface=""/>
+        <a:cs typeface=""/>
+        <a:font script="Jpan" typeface="游ゴシック"/>
+        <a:font script="Hang" typeface="맑은 고딕"/>
+        <a:font script="Hans" typeface="等线"/>
+        <a:font script="Hant" typeface="新細明體"/>
+        <a:font script="Arab" typeface="Arial"/>
+        <a:font script="Hebr" typeface="Arial"/>
+        <a:font script="Thai" typeface="Cordia New"/>
+        <a:font script="Ethi" typeface="Nyala"/>
+        <a:font script="Beng" typeface="Vrinda"/>
+        <a:font script="Gujr" typeface="Shruti"/>
+        <a:font script="Khmr" typeface="DaunPenh"/>
+        <a:font script="Knda" typeface="Tunga"/>
+        <a:font script="Guru" typeface="Raavi"/>
+        <a:font script="Cans" typeface="Euphemia"/>
+        <a:font script="Cher" typeface="Plantagenet Cherokee"/>
+        <a:font script="Yiii" typeface="Microsoft Yi Baiti"/>
+        <a:font script="Tibt" typeface="Microsoft Himalaya"/>
+        <a:font script="Thaa" typeface="MV Boli"/>
+        <a:font script="Deva" typeface="Mangal"/>
+        <a:font script="Telu" typeface="Gautami"/>
+        <a:font script="Taml" typeface="Latha"/>
+        <a:font script="Syrc" typeface="Estrangelo Edessa"/>
+        <a:font script="Orya" typeface="Kalinga"/>
+        <a:font script="Mlym" typeface="Kartika"/>
+        <a:font script="Laoo" typeface="DokChampa"/>
+        <a:font script="Sinh" typeface="Iskoola Pota"/>
+        <a:font script="Mong" typeface="Mongolian Baiti"/>
+        <a:font script="Viet" typeface="Arial"/>
+        <a:font script="Uigh" typeface="Microsoft Uighur"/>
+        <a:font script="Geor" typeface="Sylfaen"/>
+        <a:font script="Armn" typeface="Arial"/>
+        <a:font script="Bugi" typeface="Leelawadee UI"/>
+        <a:font script="Bopo" typeface="Microsoft JhengHei"/>
+        <a:font script="Java" typeface="Javanese Text"/>
+        <a:font script="Lisu" typeface="Segoe UI"/>
+        <a:font script="Mymr" typeface="Myanmar Text"/>
+        <a:font script="Nkoo" typeface="Ebrima"/>
+        <a:font script="Olck" typeface="Nirmala UI"/>
+        <a:font script="Osma" typeface="Ebrima"/>
+        <a:font script="Phag" typeface="Phagspa"/>
+        <a:font script="Syrn" typeface="Estrangelo Edessa"/>
+        <a:font script="Syrj" typeface="Estrangelo Edessa"/>
+        <a:font script="Syre" typeface="Estrangelo Edessa"/>
+        <a:font script="Sora" typeface="Nirmala UI"/>
+        <a:font script="Tale" typeface="Microsoft Tai Le"/>
+        <a:font script="Talu" typeface="Microsoft New Tai Lue"/>
+        <a:font script="Tfng" typeface="Ebrima"/>
+      </a:minorFont>
+    </a:fontScheme>
+    <a:fmtScheme name="Office">
+      <a:fillStyleLst>
+        <a:solidFill>
+          <a:schemeClr val="phClr"/>
+        </a:solidFill>
+        <a:gradFill rotWithShape="1">
+          <a:gsLst>
+            <a:gs pos="0">
+              <a:schemeClr val="phClr">
+                <a:lumMod val="110000"/>
+                <a:satMod val="105000"/>
+                <a:tint val="67000"/>
+              </a:schemeClr>
+            </a:gs>
+            <a:gs pos="50000">
+              <a:schemeClr val="phClr">
+                <a:lumMod val="105000"/>
+                <a:satMod val="103000"/>
+                <a:tint val="73000"/>
+              </a:schemeClr>
+            </a:gs>
+            <a:gs pos="100000">
+              <a:schemeClr val="phClr">
+                <a:lumMod val="105000"/>
+                <a:satMod val="109000"/>
+                <a:tint val="81000"/>
+              </a:schemeClr>
+            </a:gs>
+          </a:gsLst>
+          <a:lin ang="5400000" scaled="0"/>
+        </a:gradFill>
+        <a:gradFill rotWithShape="1">
+          <a:gsLst>
+            <a:gs pos="0">
+              <a:schemeClr val="phClr">
+                <a:satMod val="103000"/>
+                <a:lumMod val="102000"/>
+                <a:tint val="94000"/>
+              </a:schemeClr>
+            </a:gs>
+            <a:gs pos="50000">
+              <a:schemeClr val="phClr">
+                <a:satMod val="110000"/>
+                <a:lumMod val="100000"/>
+                <a:shade val="100000"/>
+              </a:schemeClr>
+            </a:gs>
+            <a:gs pos="100000">
+              <a:schemeClr val="phClr">
+                <a:lumMod val="99000"/>
+                <a:satMod val="120000"/>
+                <a:shade val="78000"/>
+              </a:schemeClr>
+            </a:gs>
+          </a:gsLst>
+          <a:lin ang="5400000" scaled="0"/>
+        </a:gradFill>
+      </a:fillStyleLst>
+      <a:lnStyleLst>
+        <a:ln w="12700" cap="flat" cmpd="sng" algn="ctr">
+          <a:solidFill>
+            <a:schemeClr val="phClr"/>
+          </a:solidFill>
+          <a:prstDash val="solid"/>
+          <a:miter lim="800000"/>
+        </a:ln>
+        <a:ln w="19050" cap="flat" cmpd="sng" algn="ctr">
+          <a:solidFill>
+            <a:schemeClr val="phClr"/>
+          </a:solidFill>
+          <a:prstDash val="solid"/>
+          <a:miter lim="800000"/>
+        </a:ln>
+        <a:ln w="25400" cap="flat" cmpd="sng" algn="ctr">
+          <a:solidFill>
+            <a:schemeClr val="phClr"/>
+          </a:solidFill>
+          <a:prstDash val="solid"/>
+          <a:miter lim="800000"/>
+        </a:ln>
+      </a:lnStyleLst>
+      <a:effectStyleLst>
+        <a:effectStyle>
+          <a:effectLst/>
+        </a:effectStyle>
+        <a:effectStyle>
+          <a:effectLst/>
+        </a:effectStyle>
+        <a:effectStyle>
+          <a:effectLst>
+            <a:outerShdw blurRad="57150" dist="19050" dir="5400000" algn="ctr" rotWithShape="0">
+              <a:srgbClr val="000000">
+                <a:alpha val="63000"/>
+              </a:srgbClr>
+            </a:outerShdw>
+          </a:effectLst>
+        </a:effectStyle>
+      </a:effectStyleLst>
+      <a:bgFillStyleLst>
+        <a:solidFill>
+          <a:schemeClr val="phClr"/>
+        </a:solidFill>
+        <a:solidFill>
+          <a:schemeClr val="phClr">
+            <a:tint val="95000"/>
+            <a:satMod val="170000"/>
+          </a:schemeClr>
+        </a:solidFill>
+        <a:gradFill rotWithShape="1">
+          <a:gsLst>
+            <a:gs pos="0">
+              <a:schemeClr val="phClr">
+                <a:tint val="93000"/>
+                <a:satMod val="150000"/>
+                <a:shade val="98000"/>
+                <a:lumMod val="102000"/>
+              </a:schemeClr>
+            </a:gs>
+            <a:gs pos="50000">
+              <a:schemeClr val="phClr">
+                <a:tint val="98000"/>
+                <a:satMod val="130000"/>
+                <a:shade val="90000"/>
+                <a:lumMod val="103000"/>
+              </a:schemeClr>
+            </a:gs>
+            <a:gs pos="100000">
+              <a:schemeClr val="phClr">
+                <a:shade val="63000"/>
+                <a:satMod val="120000"/>
+              </a:schemeClr>
+            </a:gs>
+          </a:gsLst>
+          <a:lin ang="5400000" scaled="0"/>
+        </a:gradFill>
+      </a:bgFillStyleLst>
+    </a:fmtScheme>
+  </a:themeElements>
+  <a:objectDefaults>
+    <a:lnDef>
+      <a:spPr/>
+      <a:bodyPr/>
+      <a:lstStyle/>
+      <a:style>
+        <a:lnRef idx="2">
+          <a:schemeClr val="accent1"/>
+        </a:lnRef>
+        <a:fillRef idx="0">
+          <a:schemeClr val="accent1"/>
+        </a:fillRef>
+        <a:effectRef idx="1">
+          <a:schemeClr val="accent1"/>
+        </a:effectRef>
+        <a:fontRef idx="minor">
+          <a:schemeClr val="tx1"/>
+        </a:fontRef>
+      </a:style>
+    </a:lnDef>
+  </a:objectDefaults>
+  <a:extraClrSchemeLst/>
+  <a:extLst>
+    <a:ext uri="{05A4C25C-085E-4340-85A3-A5531E510DB2}">
+      <thm15:themeFamily xmlns:thm15="http://schemas.microsoft.com/office/thememl/2012/main" name="Office Theme" id="{2E142A2C-CD16-42D6-873A-C26D2A0506FA}" vid="{1BDDFF52-6CD6-40A5-AB3C-68EB2F1E4D0A}"/>
+    </a:ext>
+  </a:extLst>
+</a:theme>
 </file>
--- a/poster/QB_Archetypes_Poster_36x24.pptx
+++ b/poster/QB_Archetypes_Poster_36x24.pptx
@@ -1462,7 +1462,7 @@
                 <a:ea typeface="Calibri" pitchFamily="34" charset="-122"/>
                 <a:cs typeface="Calibri" pitchFamily="34" charset="-120"/>
               </a:rPr>
-              <a:t>Conventional QB metrics like passer rating collapse multidimensional playing styles into a single value. This study asks: Can K-means clustering identify distinct, interpretable archetypes from NFL performance data — without imposing labels a priori?</a:t>
+              <a:t>Conventional QB metrics like passer rating collapse multidimensional playing styles into a single value. This study asks: Can K-means clustering identify distinct, interpretable archetypes from NFL performance?</a:t>
             </a:r>
             <a:endParaRPr lang="en-US" sz="2000" dirty="0"/>
           </a:p>
@@ -2830,7 +2830,7 @@
                 <a:ea typeface="Calibri" pitchFamily="34" charset="-122"/>
                 <a:cs typeface="Calibri" pitchFamily="34" charset="-120"/>
               </a:rPr>
-              <a:t>Pocket Passers and Dual Threats have similar QBR — efficiency achieved via different styles.</a:t>
+              <a:t>Pocket Passers and Dual Threats have similar QBR, efficiency achieved via different styles.</a:t>
             </a:r>
             <a:endParaRPr lang="en-US" sz="1900" dirty="0"/>
           </a:p>
@@ -2930,7 +2930,7 @@
                 <a:ea typeface="Calibri" pitchFamily="34" charset="-122"/>
                 <a:cs typeface="Calibri" pitchFamily="34" charset="-120"/>
               </a:rPr>
-              <a:t>Future work: within-career style evolution; GMMs for soft cluster membership.</a:t>
+              <a:t>Future work: within-career style evolution; Next gen stats</a:t>
             </a:r>
             <a:endParaRPr lang="en-US" sz="1900" dirty="0"/>
           </a:p>

--- a/poster/QB_Archetypes_Poster_36x24.pptx
+++ b/poster/QB_Archetypes_Poster_36x24.pptx
@@ -1123,94 +1123,6 @@
       </p:sp>
       <p:sp>
         <p:nvSpPr>
-          <p:cNvPr id="6" name="Shape 4"/>
-          <p:cNvSpPr/>
-          <p:nvPr/>
-        </p:nvSpPr>
-        <p:spPr>
-          <a:xfrm>
-            <a:off x="27889200" y="182880"/>
-            <a:ext cx="4572000" cy="2011680"/>
-          </a:xfrm>
-          <a:prstGeom prst="rect">
-            <a:avLst/>
-          </a:prstGeom>
-          <a:solidFill>
-            <a:srgbClr val="002868"/>
-          </a:solidFill>
-          <a:ln w="50800">
-            <a:solidFill>
-              <a:srgbClr val="F4A620"/>
-            </a:solidFill>
-            <a:prstDash val="solid"/>
-          </a:ln>
-        </p:spPr>
-        <p:txBody>
-          <a:bodyPr/>
-          <a:lstStyle/>
-          <a:p>
-            <a:endParaRPr lang="en-US"/>
-          </a:p>
-        </p:txBody>
-      </p:sp>
-      <p:sp>
-        <p:nvSpPr>
-          <p:cNvPr id="7" name="Text 5"/>
-          <p:cNvSpPr/>
-          <p:nvPr/>
-        </p:nvSpPr>
-        <p:spPr>
-          <a:xfrm>
-            <a:off x="27889200" y="182880"/>
-            <a:ext cx="4572000" cy="2011680"/>
-          </a:xfrm>
-          <a:prstGeom prst="rect">
-            <a:avLst/>
-          </a:prstGeom>
-          <a:noFill/>
-          <a:ln/>
-        </p:spPr>
-        <p:txBody>
-          <a:bodyPr wrap="square" rtlCol="0" anchor="ctr"/>
-          <a:lstStyle/>
-          <a:p>
-            <a:pPr marL="0" indent="0" algn="ctr">
-              <a:buNone/>
-            </a:pPr>
-            <a:r>
-              <a:rPr lang="en-US" sz="2600" b="1" dirty="0">
-                <a:solidFill>
-                  <a:srgbClr val="F4A620"/>
-                </a:solidFill>
-                <a:latin typeface="Trebuchet MS" pitchFamily="34" charset="0"/>
-                <a:ea typeface="Trebuchet MS" pitchFamily="34" charset="-122"/>
-                <a:cs typeface="Trebuchet MS" pitchFamily="34" charset="-120"/>
-              </a:rPr>
-              <a:t>UCONN</a:t>
-            </a:r>
-            <a:endParaRPr lang="en-US" sz="2600" dirty="0"/>
-          </a:p>
-          <a:p>
-            <a:pPr marL="0" indent="0" algn="ctr">
-              <a:buNone/>
-            </a:pPr>
-            <a:r>
-              <a:rPr lang="en-US" sz="2600" b="1" dirty="0">
-                <a:solidFill>
-                  <a:srgbClr val="F4A620"/>
-                </a:solidFill>
-                <a:latin typeface="Trebuchet MS" pitchFamily="34" charset="0"/>
-                <a:ea typeface="Trebuchet MS" pitchFamily="34" charset="-122"/>
-                <a:cs typeface="Trebuchet MS" pitchFamily="34" charset="-120"/>
-              </a:rPr>
-              <a:t>DATA SCIENCE</a:t>
-            </a:r>
-            <a:endParaRPr lang="en-US" sz="2600" dirty="0"/>
-          </a:p>
-        </p:txBody>
-      </p:sp>
-      <p:sp>
-        <p:nvSpPr>
           <p:cNvPr id="8" name="Shape 6"/>
           <p:cNvSpPr/>
           <p:nvPr/>
@@ -1256,7 +1168,7 @@
         </p:nvSpPr>
         <p:spPr>
           <a:xfrm>
-            <a:off x="9052560" y="2743200"/>
+            <a:off x="8833104" y="2816352"/>
             <a:ext cx="10972800" cy="18928080"/>
           </a:xfrm>
           <a:prstGeom prst="rect">
@@ -1420,10 +1332,8 @@
                   <a:srgbClr val="FFFFFF"/>
                 </a:solidFill>
                 <a:latin typeface="Trebuchet MS" pitchFamily="34" charset="0"/>
-                <a:ea typeface="Trebuchet MS" pitchFamily="34" charset="-122"/>
-                <a:cs typeface="Trebuchet MS" pitchFamily="34" charset="-120"/>
               </a:rPr>
-              <a:t>INTRODUCTION</a:t>
+              <a:t>ABSTRACT</a:t>
             </a:r>
             <a:endParaRPr lang="en-US" sz="2200" dirty="0"/>
           </a:p>
@@ -1454,7 +1364,7 @@
               <a:buNone/>
             </a:pPr>
             <a:r>
-              <a:rPr lang="en-US" sz="2000" dirty="0">
+              <a:rPr lang="en-US" sz="2300" dirty="0">
                 <a:solidFill>
                   <a:srgbClr val="1C1C1C"/>
                 </a:solidFill>
@@ -1464,7 +1374,7 @@
               </a:rPr>
               <a:t>Conventional QB metrics like passer rating collapse multidimensional playing styles into a single value. This study asks: Can K-means clustering identify distinct, interpretable archetypes from NFL performance?</a:t>
             </a:r>
-            <a:endParaRPr lang="en-US" sz="2000" dirty="0"/>
+            <a:endParaRPr lang="en-US" sz="2300" dirty="0"/>
           </a:p>
         </p:txBody>
       </p:sp>
@@ -1667,7 +1577,7 @@
               <a:buNone/>
             </a:pPr>
             <a:r>
-              <a:rPr lang="en-US" sz="1700" dirty="0">
+              <a:rPr lang="en-US" sz="2000" b="1" dirty="0">
                 <a:solidFill>
                   <a:srgbClr val="5A6A7A"/>
                 </a:solidFill>
@@ -1677,7 +1587,7 @@
               </a:rPr>
               <a:t>QB-Seasons</a:t>
             </a:r>
-            <a:endParaRPr lang="en-US" sz="1700" dirty="0"/>
+            <a:endParaRPr lang="en-US" sz="2000" b="1" dirty="0"/>
           </a:p>
         </p:txBody>
       </p:sp>
@@ -1777,7 +1687,7 @@
               <a:buNone/>
             </a:pPr>
             <a:r>
-              <a:rPr lang="en-US" sz="1700" dirty="0">
+              <a:rPr lang="en-US" sz="2000" b="1" dirty="0">
                 <a:solidFill>
                   <a:srgbClr val="5A6A7A"/>
                 </a:solidFill>
@@ -1787,7 +1697,7 @@
               </a:rPr>
               <a:t>NFL Seasons</a:t>
             </a:r>
-            <a:endParaRPr lang="en-US" sz="1700" dirty="0"/>
+            <a:endParaRPr lang="en-US" sz="2000" b="1" dirty="0"/>
           </a:p>
         </p:txBody>
       </p:sp>
@@ -1887,7 +1797,7 @@
               <a:buNone/>
             </a:pPr>
             <a:r>
-              <a:rPr lang="en-US" sz="1700" dirty="0">
+              <a:rPr lang="en-US" sz="2000" b="1" dirty="0">
                 <a:solidFill>
                   <a:srgbClr val="5A6A7A"/>
                 </a:solidFill>
@@ -1897,7 +1807,7 @@
               </a:rPr>
               <a:t>Pass/Rush Att.</a:t>
             </a:r>
-            <a:endParaRPr lang="en-US" sz="1700" dirty="0"/>
+            <a:endParaRPr lang="en-US" sz="2000" b="1" dirty="0"/>
           </a:p>
         </p:txBody>
       </p:sp>
@@ -1926,7 +1836,7 @@
               <a:buNone/>
             </a:pPr>
             <a:r>
-              <a:rPr lang="en-US" sz="1800" dirty="0">
+              <a:rPr lang="en-US" sz="2000" dirty="0">
                 <a:solidFill>
                   <a:srgbClr val="5A6A7A"/>
                 </a:solidFill>
@@ -1936,7 +1846,7 @@
               </a:rPr>
               <a:t>Source: Pro Football Reference. Merged passing &amp; rushing season stats; mid-season trades handled via totals rows. Missing QBR imputed with mean; longest rush with median.</a:t>
             </a:r>
-            <a:endParaRPr lang="en-US" sz="1800" dirty="0"/>
+            <a:endParaRPr lang="en-US" sz="2000" dirty="0"/>
           </a:p>
         </p:txBody>
       </p:sp>
@@ -2938,77 +2848,13 @@
       </p:sp>
       <p:sp>
         <p:nvSpPr>
-          <p:cNvPr id="53" name="Shape 51"/>
-          <p:cNvSpPr/>
-          <p:nvPr/>
-        </p:nvSpPr>
-        <p:spPr>
-          <a:xfrm>
-            <a:off x="457200" y="17830800"/>
-            <a:ext cx="8138160" cy="658368"/>
-          </a:xfrm>
-          <a:prstGeom prst="rect">
-            <a:avLst/>
-          </a:prstGeom>
-          <a:solidFill>
-            <a:srgbClr val="1A3A5C"/>
-          </a:solidFill>
-          <a:ln w="12700">
-            <a:solidFill>
-              <a:srgbClr val="1A3A5C"/>
-            </a:solidFill>
-            <a:prstDash val="solid"/>
-          </a:ln>
-        </p:spPr>
-        <p:txBody>
-          <a:bodyPr/>
-          <a:lstStyle/>
-          <a:p>
-            <a:endParaRPr lang="en-US"/>
-          </a:p>
-        </p:txBody>
-      </p:sp>
-      <p:sp>
-        <p:nvSpPr>
-          <p:cNvPr id="54" name="Shape 52"/>
-          <p:cNvSpPr/>
-          <p:nvPr/>
-        </p:nvSpPr>
-        <p:spPr>
-          <a:xfrm>
-            <a:off x="457200" y="17830800"/>
-            <a:ext cx="128016" cy="658368"/>
-          </a:xfrm>
-          <a:prstGeom prst="rect">
-            <a:avLst/>
-          </a:prstGeom>
-          <a:solidFill>
-            <a:srgbClr val="F4A620"/>
-          </a:solidFill>
-          <a:ln w="12700">
-            <a:solidFill>
-              <a:srgbClr val="F4A620"/>
-            </a:solidFill>
-            <a:prstDash val="solid"/>
-          </a:ln>
-        </p:spPr>
-        <p:txBody>
-          <a:bodyPr/>
-          <a:lstStyle/>
-          <a:p>
-            <a:endParaRPr lang="en-US"/>
-          </a:p>
-        </p:txBody>
-      </p:sp>
-      <p:sp>
-        <p:nvSpPr>
           <p:cNvPr id="55" name="Text 53"/>
           <p:cNvSpPr/>
           <p:nvPr/>
         </p:nvSpPr>
         <p:spPr>
           <a:xfrm>
-            <a:off x="685800" y="17830800"/>
+            <a:off x="21282660" y="18114264"/>
             <a:ext cx="7909560" cy="658368"/>
           </a:xfrm>
           <a:prstGeom prst="rect">
@@ -3047,7 +2893,7 @@
         </p:nvSpPr>
         <p:spPr>
           <a:xfrm>
-            <a:off x="3063240" y="18608040"/>
+            <a:off x="23463504" y="18370296"/>
             <a:ext cx="5394960" cy="2286000"/>
           </a:xfrm>
           <a:prstGeom prst="rect">
@@ -3063,6 +2909,17 @@
             <a:pPr marL="0" indent="0">
               <a:buNone/>
             </a:pPr>
+            <a:r>
+              <a:rPr lang="en-US" sz="2300" b="1" dirty="0">
+                <a:solidFill>
+                  <a:srgbClr val="1A3A5C"/>
+                </a:solidFill>
+                <a:latin typeface="Calibri" pitchFamily="34" charset="0"/>
+                <a:ea typeface="Calibri" pitchFamily="34" charset="-122"/>
+                <a:cs typeface="Calibri" pitchFamily="34" charset="-120"/>
+              </a:rPr>
+              <a:t>GitHub Repository</a:t>
+            </a:r>
             <a:r>
               <a:rPr lang="en-US" sz="2000" b="1" dirty="0">
                 <a:solidFill>
@@ -3072,7 +2929,7 @@
                 <a:ea typeface="Calibri" pitchFamily="34" charset="-122"/>
                 <a:cs typeface="Calibri" pitchFamily="34" charset="-120"/>
               </a:rPr>
-              <a:t>GitHub Repository
+              <a:t>
 </a:t>
             </a:r>
             <a:endParaRPr lang="en-US" sz="2000" dirty="0"/>
@@ -3081,6 +2938,18 @@
             <a:pPr marL="0" indent="0">
               <a:buNone/>
             </a:pPr>
+            <a:r>
+              <a:rPr lang="en-US" sz="2000" dirty="0">
+                <a:solidFill>
+                  <a:srgbClr val="1C1C1C"/>
+                </a:solidFill>
+                <a:latin typeface="Calibri" pitchFamily="34" charset="0"/>
+                <a:ea typeface="Calibri" pitchFamily="34" charset="-122"/>
+                <a:cs typeface="Calibri" pitchFamily="34" charset="-120"/>
+              </a:rPr>
+              <a:t>github.com/ShubhanTamhane1/
+nfl-qb-archetypes</a:t>
+            </a:r>
             <a:r>
               <a:rPr lang="en-US" sz="1700" dirty="0">
                 <a:solidFill>
@@ -3090,8 +2959,7 @@
                 <a:ea typeface="Calibri" pitchFamily="34" charset="-122"/>
                 <a:cs typeface="Calibri" pitchFamily="34" charset="-120"/>
               </a:rPr>
-              <a:t>github.com/ShubhanTamhane1/
-nfl-qb-archetypes
+              <a:t>
 </a:t>
             </a:r>
             <a:endParaRPr lang="en-US" sz="2000" dirty="0"/>
@@ -3100,6 +2968,17 @@
             <a:pPr marL="0" indent="0">
               <a:buNone/>
             </a:pPr>
+            <a:r>
+              <a:rPr lang="en-US" sz="2000" i="1" dirty="0">
+                <a:solidFill>
+                  <a:srgbClr val="5A6A7A"/>
+                </a:solidFill>
+                <a:latin typeface="Calibri" pitchFamily="34" charset="0"/>
+                <a:ea typeface="Calibri" pitchFamily="34" charset="-122"/>
+                <a:cs typeface="Calibri" pitchFamily="34" charset="-120"/>
+              </a:rPr>
+              <a:t>Scan for source code, notebook, and data pipeline</a:t>
+            </a:r>
             <a:r>
               <a:rPr lang="en-US" sz="1600" i="1" dirty="0">
                 <a:solidFill>
@@ -3109,7 +2988,7 @@
                 <a:ea typeface="Calibri" pitchFamily="34" charset="-122"/>
                 <a:cs typeface="Calibri" pitchFamily="34" charset="-120"/>
               </a:rPr>
-              <a:t>Scan for source code, notebook, and data pipeline.</a:t>
+              <a:t>.</a:t>
             </a:r>
             <a:endParaRPr lang="en-US" sz="2000" dirty="0"/>
           </a:p>
@@ -3218,29 +3097,6 @@
           </a:p>
         </p:txBody>
       </p:sp>
-      <p:pic>
-        <p:nvPicPr>
-          <p:cNvPr id="61" name="Image 1" descr="preencoded.png"/>
-          <p:cNvPicPr>
-            <a:picLocks noChangeAspect="1"/>
-          </p:cNvPicPr>
-          <p:nvPr/>
-        </p:nvPicPr>
-        <p:blipFill>
-          <a:blip r:embed="rId3"/>
-          <a:srcRect/>
-          <a:stretch/>
-        </p:blipFill>
-        <p:spPr>
-          <a:xfrm>
-            <a:off x="9281160" y="3776472"/>
-            <a:ext cx="10515600" cy="6583680"/>
-          </a:xfrm>
-          <a:prstGeom prst="rect">
-            <a:avLst/>
-          </a:prstGeom>
-        </p:spPr>
-      </p:pic>
       <p:sp>
         <p:nvSpPr>
           <p:cNvPr id="62" name="Text 58"/>
@@ -3288,7 +3144,7 @@
         </p:nvSpPr>
         <p:spPr>
           <a:xfrm>
-            <a:off x="9281160" y="11640312"/>
+            <a:off x="9061704" y="11713464"/>
             <a:ext cx="10515600" cy="658368"/>
           </a:xfrm>
           <a:prstGeom prst="rect">
@@ -3320,7 +3176,7 @@
         </p:nvSpPr>
         <p:spPr>
           <a:xfrm>
-            <a:off x="9281160" y="11640312"/>
+            <a:off x="9061704" y="11713464"/>
             <a:ext cx="128016" cy="658368"/>
           </a:xfrm>
           <a:prstGeom prst="rect">
@@ -3352,7 +3208,7 @@
         </p:nvSpPr>
         <p:spPr>
           <a:xfrm>
-            <a:off x="9509760" y="11640312"/>
+            <a:off x="9290304" y="11713464"/>
             <a:ext cx="10287000" cy="658368"/>
           </a:xfrm>
           <a:prstGeom prst="rect">
@@ -3392,14 +3248,14 @@
           <p:nvPr>
             <p:extLst>
               <p:ext uri="{D42A27DB-BD31-4B8C-83A1-F6EECF244321}">
-                <p14:modId xmlns:p14="http://schemas.microsoft.com/office/powerpoint/2010/main" val="1579011935"/>
+                <p14:modId xmlns:p14="http://schemas.microsoft.com/office/powerpoint/2010/main" val="492658536"/>
               </p:ext>
             </p:extLst>
           </p:nvPr>
         </p:nvGraphicFramePr>
         <p:xfrm>
-          <a:off x="9281160" y="12417552"/>
-          <a:ext cx="11887200" cy="3429000"/>
+          <a:off x="9006840" y="12487221"/>
+          <a:ext cx="11064240" cy="3429000"/>
         </p:xfrm>
         <a:graphic>
           <a:graphicData uri="http://schemas.openxmlformats.org/drawingml/2006/table">
@@ -3455,13 +3311,6 @@
                     </a:ext>
                   </a:extLst>
                 </a:gridCol>
-                <a:gridCol w="822960">
-                  <a:extLst>
-                    <a:ext uri="{9D8B030D-6E8A-4147-A177-3AD203B41FA5}">
-                      <a16:colId xmlns:a16="http://schemas.microsoft.com/office/drawing/2014/main" val="20007"/>
-                    </a:ext>
-                  </a:extLst>
-                </a:gridCol>
               </a:tblGrid>
               <a:tr h="685800">
                 <a:tc>
@@ -3890,74 +3739,6 @@
                           <a:cs typeface="Calibri" pitchFamily="34" charset="-120"/>
                         </a:rPr>
                         <a:t>Rush TD</a:t>
-                      </a:r>
-                      <a:endParaRPr lang="en-US" sz="2000" dirty="0">
-                        <a:latin typeface="Calibri" charset="0"/>
-                        <a:ea typeface="Calibri" charset="0"/>
-                        <a:cs typeface="Calibri" charset="0"/>
-                      </a:endParaRPr>
-                    </a:p>
-                  </a:txBody>
-                  <a:tcPr>
-                    <a:lnL w="12700" cap="flat" cmpd="sng" algn="ctr">
-                      <a:solidFill>
-                        <a:srgbClr val="C8D6E5"/>
-                      </a:solidFill>
-                      <a:prstDash val="solid"/>
-                      <a:round/>
-                      <a:headEnd type="none" w="med" len="med"/>
-                      <a:tailEnd type="none" w="med" len="med"/>
-                    </a:lnL>
-                    <a:lnR w="12700" cap="flat" cmpd="sng" algn="ctr">
-                      <a:solidFill>
-                        <a:srgbClr val="C8D6E5"/>
-                      </a:solidFill>
-                      <a:prstDash val="solid"/>
-                      <a:round/>
-                      <a:headEnd type="none" w="med" len="med"/>
-                      <a:tailEnd type="none" w="med" len="med"/>
-                    </a:lnR>
-                    <a:lnT w="12700" cap="flat" cmpd="sng" algn="ctr">
-                      <a:solidFill>
-                        <a:srgbClr val="C8D6E5"/>
-                      </a:solidFill>
-                      <a:prstDash val="solid"/>
-                      <a:round/>
-                      <a:headEnd type="none" w="med" len="med"/>
-                      <a:tailEnd type="none" w="med" len="med"/>
-                    </a:lnT>
-                    <a:lnB w="12700" cap="flat" cmpd="sng" algn="ctr">
-                      <a:solidFill>
-                        <a:srgbClr val="C8D6E5"/>
-                      </a:solidFill>
-                      <a:prstDash val="solid"/>
-                      <a:round/>
-                      <a:headEnd type="none" w="med" len="med"/>
-                      <a:tailEnd type="none" w="med" len="med"/>
-                    </a:lnB>
-                    <a:solidFill>
-                      <a:srgbClr val="1A3A5C"/>
-                    </a:solidFill>
-                  </a:tcPr>
-                </a:tc>
-                <a:tc>
-                  <a:txBody>
-                    <a:bodyPr/>
-                    <a:lstStyle/>
-                    <a:p>
-                      <a:pPr marL="0" indent="0" algn="ctr">
-                        <a:buNone/>
-                      </a:pPr>
-                      <a:r>
-                        <a:rPr lang="en-US" sz="2000" b="1" dirty="0">
-                          <a:solidFill>
-                            <a:srgbClr val="FFFFFF"/>
-                          </a:solidFill>
-                          <a:latin typeface="Calibri" pitchFamily="34" charset="0"/>
-                          <a:ea typeface="Calibri" pitchFamily="34" charset="-122"/>
-                          <a:cs typeface="Calibri" pitchFamily="34" charset="-120"/>
-                        </a:rPr>
-                        <a:t>n</a:t>
                       </a:r>
                       <a:endParaRPr lang="en-US" sz="2000" dirty="0">
                         <a:latin typeface="Calibri" charset="0"/>
@@ -4473,71 +4254,6 @@
                     </a:lnB>
                   </a:tcPr>
                 </a:tc>
-                <a:tc>
-                  <a:txBody>
-                    <a:bodyPr/>
-                    <a:lstStyle/>
-                    <a:p>
-                      <a:pPr marL="0" indent="0" algn="ctr">
-                        <a:buNone/>
-                      </a:pPr>
-                      <a:r>
-                        <a:rPr lang="en-US" sz="2000" dirty="0">
-                          <a:solidFill>
-                            <a:srgbClr val="5A6A7A"/>
-                          </a:solidFill>
-                          <a:latin typeface="Calibri" pitchFamily="34" charset="0"/>
-                          <a:ea typeface="Calibri" pitchFamily="34" charset="-122"/>
-                          <a:cs typeface="Calibri" pitchFamily="34" charset="-120"/>
-                        </a:rPr>
-                        <a:t>85</a:t>
-                      </a:r>
-                      <a:endParaRPr lang="en-US" sz="2000" dirty="0">
-                        <a:latin typeface="Calibri" charset="0"/>
-                        <a:ea typeface="Calibri" charset="0"/>
-                        <a:cs typeface="Calibri" charset="0"/>
-                      </a:endParaRPr>
-                    </a:p>
-                  </a:txBody>
-                  <a:tcPr>
-                    <a:lnL w="12700" cap="flat" cmpd="sng" algn="ctr">
-                      <a:solidFill>
-                        <a:srgbClr val="C8D6E5"/>
-                      </a:solidFill>
-                      <a:prstDash val="solid"/>
-                      <a:round/>
-                      <a:headEnd type="none" w="med" len="med"/>
-                      <a:tailEnd type="none" w="med" len="med"/>
-                    </a:lnL>
-                    <a:lnR w="12700" cap="flat" cmpd="sng" algn="ctr">
-                      <a:solidFill>
-                        <a:srgbClr val="C8D6E5"/>
-                      </a:solidFill>
-                      <a:prstDash val="solid"/>
-                      <a:round/>
-                      <a:headEnd type="none" w="med" len="med"/>
-                      <a:tailEnd type="none" w="med" len="med"/>
-                    </a:lnR>
-                    <a:lnT w="12700" cap="flat" cmpd="sng" algn="ctr">
-                      <a:solidFill>
-                        <a:srgbClr val="C8D6E5"/>
-                      </a:solidFill>
-                      <a:prstDash val="solid"/>
-                      <a:round/>
-                      <a:headEnd type="none" w="med" len="med"/>
-                      <a:tailEnd type="none" w="med" len="med"/>
-                    </a:lnT>
-                    <a:lnB w="12700" cap="flat" cmpd="sng" algn="ctr">
-                      <a:solidFill>
-                        <a:srgbClr val="C8D6E5"/>
-                      </a:solidFill>
-                      <a:prstDash val="solid"/>
-                      <a:round/>
-                      <a:headEnd type="none" w="med" len="med"/>
-                      <a:tailEnd type="none" w="med" len="med"/>
-                    </a:lnB>
-                  </a:tcPr>
-                </a:tc>
                 <a:extLst>
                   <a:ext uri="{0D108BD9-81ED-4DB2-BD59-A6C34878D82A}">
                     <a16:rowId xmlns:a16="http://schemas.microsoft.com/office/drawing/2014/main" val="10001"/>
@@ -4956,71 +4672,6 @@
                           <a:cs typeface="Calibri" pitchFamily="34" charset="-120"/>
                         </a:rPr>
                         <a:t>0.9</a:t>
-                      </a:r>
-                      <a:endParaRPr lang="en-US" sz="2000" dirty="0">
-                        <a:latin typeface="Calibri" charset="0"/>
-                        <a:ea typeface="Calibri" charset="0"/>
-                        <a:cs typeface="Calibri" charset="0"/>
-                      </a:endParaRPr>
-                    </a:p>
-                  </a:txBody>
-                  <a:tcPr>
-                    <a:lnL w="12700" cap="flat" cmpd="sng" algn="ctr">
-                      <a:solidFill>
-                        <a:srgbClr val="C8D6E5"/>
-                      </a:solidFill>
-                      <a:prstDash val="solid"/>
-                      <a:round/>
-                      <a:headEnd type="none" w="med" len="med"/>
-                      <a:tailEnd type="none" w="med" len="med"/>
-                    </a:lnL>
-                    <a:lnR w="12700" cap="flat" cmpd="sng" algn="ctr">
-                      <a:solidFill>
-                        <a:srgbClr val="C8D6E5"/>
-                      </a:solidFill>
-                      <a:prstDash val="solid"/>
-                      <a:round/>
-                      <a:headEnd type="none" w="med" len="med"/>
-                      <a:tailEnd type="none" w="med" len="med"/>
-                    </a:lnR>
-                    <a:lnT w="12700" cap="flat" cmpd="sng" algn="ctr">
-                      <a:solidFill>
-                        <a:srgbClr val="C8D6E5"/>
-                      </a:solidFill>
-                      <a:prstDash val="solid"/>
-                      <a:round/>
-                      <a:headEnd type="none" w="med" len="med"/>
-                      <a:tailEnd type="none" w="med" len="med"/>
-                    </a:lnT>
-                    <a:lnB w="12700" cap="flat" cmpd="sng" algn="ctr">
-                      <a:solidFill>
-                        <a:srgbClr val="C8D6E5"/>
-                      </a:solidFill>
-                      <a:prstDash val="solid"/>
-                      <a:round/>
-                      <a:headEnd type="none" w="med" len="med"/>
-                      <a:tailEnd type="none" w="med" len="med"/>
-                    </a:lnB>
-                  </a:tcPr>
-                </a:tc>
-                <a:tc>
-                  <a:txBody>
-                    <a:bodyPr/>
-                    <a:lstStyle/>
-                    <a:p>
-                      <a:pPr marL="0" indent="0" algn="ctr">
-                        <a:buNone/>
-                      </a:pPr>
-                      <a:r>
-                        <a:rPr lang="en-US" sz="2000" dirty="0">
-                          <a:solidFill>
-                            <a:srgbClr val="5A6A7A"/>
-                          </a:solidFill>
-                          <a:latin typeface="Calibri" pitchFamily="34" charset="0"/>
-                          <a:ea typeface="Calibri" pitchFamily="34" charset="-122"/>
-                          <a:cs typeface="Calibri" pitchFamily="34" charset="-120"/>
-                        </a:rPr>
-                        <a:t>48</a:t>
                       </a:r>
                       <a:endParaRPr lang="en-US" sz="2000" dirty="0">
                         <a:latin typeface="Calibri" charset="0"/>
@@ -5282,9 +4933,9 @@
                         <a:buNone/>
                       </a:pPr>
                       <a:r>
-                        <a:rPr lang="en-US" sz="2000" b="1" dirty="0">
+                        <a:rPr lang="en-US" sz="2000" b="0" dirty="0">
                           <a:solidFill>
-                            <a:srgbClr val="B71C1C"/>
+                            <a:schemeClr val="tx1"/>
                           </a:solidFill>
                           <a:latin typeface="Calibri" pitchFamily="34" charset="0"/>
                           <a:ea typeface="Calibri" pitchFamily="34" charset="-122"/>
@@ -5292,7 +4943,10 @@
                         </a:rPr>
                         <a:t>10.8</a:t>
                       </a:r>
-                      <a:endParaRPr lang="en-US" sz="2000" dirty="0">
+                      <a:endParaRPr lang="en-US" sz="2000" b="0" dirty="0">
+                        <a:solidFill>
+                          <a:schemeClr val="tx1"/>
+                        </a:solidFill>
                         <a:latin typeface="Calibri" charset="0"/>
                         <a:ea typeface="Calibri" charset="0"/>
                         <a:cs typeface="Calibri" charset="0"/>
@@ -5486,71 +5140,6 @@
                           <a:cs typeface="Calibri" pitchFamily="34" charset="-120"/>
                         </a:rPr>
                         <a:t>1.2</a:t>
-                      </a:r>
-                      <a:endParaRPr lang="en-US" sz="2000" dirty="0">
-                        <a:latin typeface="Calibri" charset="0"/>
-                        <a:ea typeface="Calibri" charset="0"/>
-                        <a:cs typeface="Calibri" charset="0"/>
-                      </a:endParaRPr>
-                    </a:p>
-                  </a:txBody>
-                  <a:tcPr>
-                    <a:lnL w="12700" cap="flat" cmpd="sng" algn="ctr">
-                      <a:solidFill>
-                        <a:srgbClr val="C8D6E5"/>
-                      </a:solidFill>
-                      <a:prstDash val="solid"/>
-                      <a:round/>
-                      <a:headEnd type="none" w="med" len="med"/>
-                      <a:tailEnd type="none" w="med" len="med"/>
-                    </a:lnL>
-                    <a:lnR w="12700" cap="flat" cmpd="sng" algn="ctr">
-                      <a:solidFill>
-                        <a:srgbClr val="C8D6E5"/>
-                      </a:solidFill>
-                      <a:prstDash val="solid"/>
-                      <a:round/>
-                      <a:headEnd type="none" w="med" len="med"/>
-                      <a:tailEnd type="none" w="med" len="med"/>
-                    </a:lnR>
-                    <a:lnT w="12700" cap="flat" cmpd="sng" algn="ctr">
-                      <a:solidFill>
-                        <a:srgbClr val="C8D6E5"/>
-                      </a:solidFill>
-                      <a:prstDash val="solid"/>
-                      <a:round/>
-                      <a:headEnd type="none" w="med" len="med"/>
-                      <a:tailEnd type="none" w="med" len="med"/>
-                    </a:lnT>
-                    <a:lnB w="12700" cap="flat" cmpd="sng" algn="ctr">
-                      <a:solidFill>
-                        <a:srgbClr val="C8D6E5"/>
-                      </a:solidFill>
-                      <a:prstDash val="solid"/>
-                      <a:round/>
-                      <a:headEnd type="none" w="med" len="med"/>
-                      <a:tailEnd type="none" w="med" len="med"/>
-                    </a:lnB>
-                  </a:tcPr>
-                </a:tc>
-                <a:tc>
-                  <a:txBody>
-                    <a:bodyPr/>
-                    <a:lstStyle/>
-                    <a:p>
-                      <a:pPr marL="0" indent="0" algn="ctr">
-                        <a:buNone/>
-                      </a:pPr>
-                      <a:r>
-                        <a:rPr lang="en-US" sz="2000" dirty="0">
-                          <a:solidFill>
-                            <a:srgbClr val="5A6A7A"/>
-                          </a:solidFill>
-                          <a:latin typeface="Calibri" pitchFamily="34" charset="0"/>
-                          <a:ea typeface="Calibri" pitchFamily="34" charset="-122"/>
-                          <a:cs typeface="Calibri" pitchFamily="34" charset="-120"/>
-                        </a:rPr>
-                        <a:t>47</a:t>
                       </a:r>
                       <a:endParaRPr lang="en-US" sz="2000" dirty="0">
                         <a:latin typeface="Calibri" charset="0"/>
@@ -6063,71 +5652,6 @@
                     </a:lnB>
                   </a:tcPr>
                 </a:tc>
-                <a:tc>
-                  <a:txBody>
-                    <a:bodyPr/>
-                    <a:lstStyle/>
-                    <a:p>
-                      <a:pPr marL="0" indent="0" algn="ctr">
-                        <a:buNone/>
-                      </a:pPr>
-                      <a:r>
-                        <a:rPr lang="en-US" sz="2000" dirty="0">
-                          <a:solidFill>
-                            <a:srgbClr val="5A6A7A"/>
-                          </a:solidFill>
-                          <a:latin typeface="Calibri" pitchFamily="34" charset="0"/>
-                          <a:ea typeface="Calibri" pitchFamily="34" charset="-122"/>
-                          <a:cs typeface="Calibri" pitchFamily="34" charset="-120"/>
-                        </a:rPr>
-                        <a:t>25</a:t>
-                      </a:r>
-                      <a:endParaRPr lang="en-US" sz="2000" dirty="0">
-                        <a:latin typeface="Calibri" charset="0"/>
-                        <a:ea typeface="Calibri" charset="0"/>
-                        <a:cs typeface="Calibri" charset="0"/>
-                      </a:endParaRPr>
-                    </a:p>
-                  </a:txBody>
-                  <a:tcPr>
-                    <a:lnL w="12700" cap="flat" cmpd="sng" algn="ctr">
-                      <a:solidFill>
-                        <a:srgbClr val="C8D6E5"/>
-                      </a:solidFill>
-                      <a:prstDash val="solid"/>
-                      <a:round/>
-                      <a:headEnd type="none" w="med" len="med"/>
-                      <a:tailEnd type="none" w="med" len="med"/>
-                    </a:lnL>
-                    <a:lnR w="12700" cap="flat" cmpd="sng" algn="ctr">
-                      <a:solidFill>
-                        <a:srgbClr val="C8D6E5"/>
-                      </a:solidFill>
-                      <a:prstDash val="solid"/>
-                      <a:round/>
-                      <a:headEnd type="none" w="med" len="med"/>
-                      <a:tailEnd type="none" w="med" len="med"/>
-                    </a:lnR>
-                    <a:lnT w="12700" cap="flat" cmpd="sng" algn="ctr">
-                      <a:solidFill>
-                        <a:srgbClr val="C8D6E5"/>
-                      </a:solidFill>
-                      <a:prstDash val="solid"/>
-                      <a:round/>
-                      <a:headEnd type="none" w="med" len="med"/>
-                      <a:tailEnd type="none" w="med" len="med"/>
-                    </a:lnT>
-                    <a:lnB w="12700" cap="flat" cmpd="sng" algn="ctr">
-                      <a:solidFill>
-                        <a:srgbClr val="C8D6E5"/>
-                      </a:solidFill>
-                      <a:prstDash val="solid"/>
-                      <a:round/>
-                      <a:headEnd type="none" w="med" len="med"/>
-                      <a:tailEnd type="none" w="med" len="med"/>
-                    </a:lnB>
-                  </a:tcPr>
-                </a:tc>
                 <a:extLst>
                   <a:ext uri="{0D108BD9-81ED-4DB2-BD59-A6C34878D82A}">
                     <a16:rowId xmlns:a16="http://schemas.microsoft.com/office/drawing/2014/main" val="10004"/>
@@ -6349,7 +5873,7 @@
                 <a:ea typeface="Calibri" pitchFamily="34" charset="-122"/>
                 <a:cs typeface="Calibri" pitchFamily="34" charset="-120"/>
               </a:rPr>
-              <a:t>Patrick Mahomes, Dak Prescott, Joe Burrow, Tom Brady, Aaron Rodgers</a:t>
+              <a:t>Patrick Mahomes (KC), Dak Prescott (DAL), Joe Burrow (CIN), Tom Brady (NE)</a:t>
             </a:r>
             <a:endParaRPr lang="en-US" sz="2000" dirty="0"/>
           </a:p>
@@ -6463,7 +5987,7 @@
                 <a:ea typeface="Calibri" pitchFamily="34" charset="-122"/>
                 <a:cs typeface="Calibri" pitchFamily="34" charset="-120"/>
               </a:rPr>
-              <a:t>Mac Jones, Devlin Hodges, Early Jalen Hurts (2020)</a:t>
+              <a:t>Mac Jones (NE), Devlin Hodges (PIT) , Early Jalen Hurts (2020, PHI)</a:t>
             </a:r>
             <a:endParaRPr lang="en-US" sz="2000" dirty="0"/>
           </a:p>
@@ -6577,7 +6101,7 @@
                 <a:ea typeface="Calibri" pitchFamily="34" charset="-122"/>
                 <a:cs typeface="Calibri" pitchFamily="34" charset="-120"/>
               </a:rPr>
-              <a:t>Justin Herbert, Taylor Heinicke, Sam Howell, Josh Johnson</a:t>
+              <a:t>Justin Herbert (LAC), Taylor Heinicke (WAS) , Sam Howell (WAS) , Josh Johnson (DEN)</a:t>
             </a:r>
             <a:endParaRPr lang="en-US" sz="2000" dirty="0"/>
           </a:p>
@@ -6691,7 +6215,7 @@
                 <a:ea typeface="Calibri" pitchFamily="34" charset="-122"/>
                 <a:cs typeface="Calibri" pitchFamily="34" charset="-120"/>
               </a:rPr>
-              <a:t>Lamar Jackson, Kyler Murray, Josh Allen, Jalen Hurts</a:t>
+              <a:t>Lamar Jackson (BAL) , Kyler Murray (ARI) , Josh Allen (BUF) , Jalen Hurts (PHI)</a:t>
             </a:r>
             <a:endParaRPr lang="en-US" sz="2000" dirty="0"/>
           </a:p>
@@ -6705,7 +6229,7 @@
         </p:nvSpPr>
         <p:spPr>
           <a:xfrm>
-            <a:off x="20482560" y="2999232"/>
+            <a:off x="20436840" y="3023616"/>
             <a:ext cx="11978640" cy="658368"/>
           </a:xfrm>
           <a:prstGeom prst="rect">
@@ -6737,7 +6261,7 @@
         </p:nvSpPr>
         <p:spPr>
           <a:xfrm>
-            <a:off x="20482560" y="2999232"/>
+            <a:off x="20436840" y="3023616"/>
             <a:ext cx="128016" cy="658368"/>
           </a:xfrm>
           <a:prstGeom prst="rect">
@@ -6924,7 +6448,7 @@
               <a:buNone/>
             </a:pPr>
             <a:r>
-              <a:rPr lang="en-US" sz="1700" i="1" dirty="0">
+              <a:rPr lang="en-US" sz="2000" i="1" dirty="0">
                 <a:solidFill>
                   <a:srgbClr val="5A6A7A"/>
                 </a:solidFill>
@@ -6934,71 +6458,7 @@
               </a:rPr>
               <a:t>Silhouette score at k=4: 0.208  |  Elbow + silhouette both confirmed k=4  |  Tukey HSD run on all 10 metrics</a:t>
             </a:r>
-            <a:endParaRPr lang="en-US" sz="1700" dirty="0"/>
-          </a:p>
-        </p:txBody>
-      </p:sp>
-      <p:sp>
-        <p:nvSpPr>
-          <p:cNvPr id="88" name="Shape 83"/>
-          <p:cNvSpPr/>
-          <p:nvPr/>
-        </p:nvSpPr>
-        <p:spPr>
-          <a:xfrm>
-            <a:off x="20482560" y="5650992"/>
-            <a:ext cx="11978640" cy="658368"/>
-          </a:xfrm>
-          <a:prstGeom prst="rect">
-            <a:avLst/>
-          </a:prstGeom>
-          <a:solidFill>
-            <a:srgbClr val="1A3A5C"/>
-          </a:solidFill>
-          <a:ln w="12700">
-            <a:solidFill>
-              <a:srgbClr val="1A3A5C"/>
-            </a:solidFill>
-            <a:prstDash val="solid"/>
-          </a:ln>
-        </p:spPr>
-        <p:txBody>
-          <a:bodyPr/>
-          <a:lstStyle/>
-          <a:p>
-            <a:endParaRPr lang="en-US"/>
-          </a:p>
-        </p:txBody>
-      </p:sp>
-      <p:sp>
-        <p:nvSpPr>
-          <p:cNvPr id="89" name="Shape 84"/>
-          <p:cNvSpPr/>
-          <p:nvPr/>
-        </p:nvSpPr>
-        <p:spPr>
-          <a:xfrm>
-            <a:off x="20482560" y="5650992"/>
-            <a:ext cx="128016" cy="658368"/>
-          </a:xfrm>
-          <a:prstGeom prst="rect">
-            <a:avLst/>
-          </a:prstGeom>
-          <a:solidFill>
-            <a:srgbClr val="F4A620"/>
-          </a:solidFill>
-          <a:ln w="12700">
-            <a:solidFill>
-              <a:srgbClr val="F4A620"/>
-            </a:solidFill>
-            <a:prstDash val="solid"/>
-          </a:ln>
-        </p:spPr>
-        <p:txBody>
-          <a:bodyPr/>
-          <a:lstStyle/>
-          <a:p>
-            <a:endParaRPr lang="en-US"/>
+            <a:endParaRPr lang="en-US" sz="2000" dirty="0"/>
           </a:p>
         </p:txBody>
       </p:sp>
@@ -7041,1321 +6501,6 @@
           </a:p>
         </p:txBody>
       </p:sp>
-      <p:graphicFrame>
-        <p:nvGraphicFramePr>
-          <p:cNvPr id="91" name="Table 1"/>
-          <p:cNvGraphicFramePr>
-            <a:graphicFrameLocks noGrp="1"/>
-          </p:cNvGraphicFramePr>
-          <p:nvPr>
-            <p:extLst>
-              <p:ext uri="{D42A27DB-BD31-4B8C-83A1-F6EECF244321}">
-                <p14:modId xmlns:p14="http://schemas.microsoft.com/office/powerpoint/2010/main" val="1579011935"/>
-              </p:ext>
-            </p:extLst>
-          </p:nvPr>
-        </p:nvGraphicFramePr>
-        <p:xfrm>
-          <a:off x="20482560" y="6428232"/>
-          <a:ext cx="8686800" cy="3730752"/>
-        </p:xfrm>
-        <a:graphic>
-          <a:graphicData uri="http://schemas.openxmlformats.org/drawingml/2006/table">
-            <a:tbl>
-              <a:tblPr/>
-              <a:tblGrid>
-                <a:gridCol w="5486400">
-                  <a:extLst>
-                    <a:ext uri="{9D8B030D-6E8A-4147-A177-3AD203B41FA5}">
-                      <a16:colId xmlns:a16="http://schemas.microsoft.com/office/drawing/2014/main" val="20000"/>
-                    </a:ext>
-                  </a:extLst>
-                </a:gridCol>
-                <a:gridCol w="1920240">
-                  <a:extLst>
-                    <a:ext uri="{9D8B030D-6E8A-4147-A177-3AD203B41FA5}">
-                      <a16:colId xmlns:a16="http://schemas.microsoft.com/office/drawing/2014/main" val="20001"/>
-                    </a:ext>
-                  </a:extLst>
-                </a:gridCol>
-                <a:gridCol w="1280160">
-                  <a:extLst>
-                    <a:ext uri="{9D8B030D-6E8A-4147-A177-3AD203B41FA5}">
-                      <a16:colId xmlns:a16="http://schemas.microsoft.com/office/drawing/2014/main" val="20002"/>
-                    </a:ext>
-                  </a:extLst>
-                </a:gridCol>
-              </a:tblGrid>
-              <a:tr h="621792">
-                <a:tc>
-                  <a:txBody>
-                    <a:bodyPr/>
-                    <a:lstStyle/>
-                    <a:p>
-                      <a:pPr marL="0" indent="0">
-                        <a:buNone/>
-                      </a:pPr>
-                      <a:r>
-                        <a:rPr lang="en-US" sz="2000" b="1" dirty="0">
-                          <a:solidFill>
-                            <a:srgbClr val="FFFFFF"/>
-                          </a:solidFill>
-                          <a:latin typeface="Calibri" pitchFamily="34" charset="0"/>
-                          <a:ea typeface="Calibri" pitchFamily="34" charset="-122"/>
-                          <a:cs typeface="Calibri" pitchFamily="34" charset="-120"/>
-                        </a:rPr>
-                        <a:t>Comparison</a:t>
-                      </a:r>
-                      <a:endParaRPr lang="en-US" sz="2000" dirty="0">
-                        <a:latin typeface="Calibri" charset="0"/>
-                        <a:ea typeface="Calibri" charset="0"/>
-                        <a:cs typeface="Calibri" charset="0"/>
-                      </a:endParaRPr>
-                    </a:p>
-                  </a:txBody>
-                  <a:tcPr>
-                    <a:lnL w="12700" cap="flat" cmpd="sng" algn="ctr">
-                      <a:solidFill>
-                        <a:srgbClr val="C8D6E5"/>
-                      </a:solidFill>
-                      <a:prstDash val="solid"/>
-                      <a:round/>
-                      <a:headEnd type="none" w="med" len="med"/>
-                      <a:tailEnd type="none" w="med" len="med"/>
-                    </a:lnL>
-                    <a:lnR w="12700" cap="flat" cmpd="sng" algn="ctr">
-                      <a:solidFill>
-                        <a:srgbClr val="C8D6E5"/>
-                      </a:solidFill>
-                      <a:prstDash val="solid"/>
-                      <a:round/>
-                      <a:headEnd type="none" w="med" len="med"/>
-                      <a:tailEnd type="none" w="med" len="med"/>
-                    </a:lnR>
-                    <a:lnT w="12700" cap="flat" cmpd="sng" algn="ctr">
-                      <a:solidFill>
-                        <a:srgbClr val="C8D6E5"/>
-                      </a:solidFill>
-                      <a:prstDash val="solid"/>
-                      <a:round/>
-                      <a:headEnd type="none" w="med" len="med"/>
-                      <a:tailEnd type="none" w="med" len="med"/>
-                    </a:lnT>
-                    <a:lnB w="12700" cap="flat" cmpd="sng" algn="ctr">
-                      <a:solidFill>
-                        <a:srgbClr val="C8D6E5"/>
-                      </a:solidFill>
-                      <a:prstDash val="solid"/>
-                      <a:round/>
-                      <a:headEnd type="none" w="med" len="med"/>
-                      <a:tailEnd type="none" w="med" len="med"/>
-                    </a:lnB>
-                    <a:solidFill>
-                      <a:srgbClr val="1A3A5C"/>
-                    </a:solidFill>
-                  </a:tcPr>
-                </a:tc>
-                <a:tc>
-                  <a:txBody>
-                    <a:bodyPr/>
-                    <a:lstStyle/>
-                    <a:p>
-                      <a:pPr marL="0" indent="0" algn="ctr">
-                        <a:buNone/>
-                      </a:pPr>
-                      <a:r>
-                        <a:rPr lang="en-US" sz="2000" b="1" dirty="0">
-                          <a:solidFill>
-                            <a:srgbClr val="FFFFFF"/>
-                          </a:solidFill>
-                          <a:latin typeface="Calibri" pitchFamily="34" charset="0"/>
-                          <a:ea typeface="Calibri" pitchFamily="34" charset="-122"/>
-                          <a:cs typeface="Calibri" pitchFamily="34" charset="-120"/>
-                        </a:rPr>
-                        <a:t>p-value</a:t>
-                      </a:r>
-                      <a:endParaRPr lang="en-US" sz="2000" dirty="0">
-                        <a:latin typeface="Calibri" charset="0"/>
-                        <a:ea typeface="Calibri" charset="0"/>
-                        <a:cs typeface="Calibri" charset="0"/>
-                      </a:endParaRPr>
-                    </a:p>
-                  </a:txBody>
-                  <a:tcPr>
-                    <a:lnL w="12700" cap="flat" cmpd="sng" algn="ctr">
-                      <a:solidFill>
-                        <a:srgbClr val="C8D6E5"/>
-                      </a:solidFill>
-                      <a:prstDash val="solid"/>
-                      <a:round/>
-                      <a:headEnd type="none" w="med" len="med"/>
-                      <a:tailEnd type="none" w="med" len="med"/>
-                    </a:lnL>
-                    <a:lnR w="12700" cap="flat" cmpd="sng" algn="ctr">
-                      <a:solidFill>
-                        <a:srgbClr val="C8D6E5"/>
-                      </a:solidFill>
-                      <a:prstDash val="solid"/>
-                      <a:round/>
-                      <a:headEnd type="none" w="med" len="med"/>
-                      <a:tailEnd type="none" w="med" len="med"/>
-                    </a:lnR>
-                    <a:lnT w="12700" cap="flat" cmpd="sng" algn="ctr">
-                      <a:solidFill>
-                        <a:srgbClr val="C8D6E5"/>
-                      </a:solidFill>
-                      <a:prstDash val="solid"/>
-                      <a:round/>
-                      <a:headEnd type="none" w="med" len="med"/>
-                      <a:tailEnd type="none" w="med" len="med"/>
-                    </a:lnT>
-                    <a:lnB w="12700" cap="flat" cmpd="sng" algn="ctr">
-                      <a:solidFill>
-                        <a:srgbClr val="C8D6E5"/>
-                      </a:solidFill>
-                      <a:prstDash val="solid"/>
-                      <a:round/>
-                      <a:headEnd type="none" w="med" len="med"/>
-                      <a:tailEnd type="none" w="med" len="med"/>
-                    </a:lnB>
-                    <a:solidFill>
-                      <a:srgbClr val="1A3A5C"/>
-                    </a:solidFill>
-                  </a:tcPr>
-                </a:tc>
-                <a:tc>
-                  <a:txBody>
-                    <a:bodyPr/>
-                    <a:lstStyle/>
-                    <a:p>
-                      <a:pPr marL="0" indent="0" algn="ctr">
-                        <a:buNone/>
-                      </a:pPr>
-                      <a:r>
-                        <a:rPr lang="en-US" sz="2000" b="1" dirty="0">
-                          <a:solidFill>
-                            <a:srgbClr val="FFFFFF"/>
-                          </a:solidFill>
-                          <a:latin typeface="Calibri" pitchFamily="34" charset="0"/>
-                          <a:ea typeface="Calibri" pitchFamily="34" charset="-122"/>
-                          <a:cs typeface="Calibri" pitchFamily="34" charset="-120"/>
-                        </a:rPr>
-                        <a:t>Sig.</a:t>
-                      </a:r>
-                      <a:endParaRPr lang="en-US" sz="2000" dirty="0">
-                        <a:latin typeface="Calibri" charset="0"/>
-                        <a:ea typeface="Calibri" charset="0"/>
-                        <a:cs typeface="Calibri" charset="0"/>
-                      </a:endParaRPr>
-                    </a:p>
-                  </a:txBody>
-                  <a:tcPr>
-                    <a:lnL w="12700" cap="flat" cmpd="sng" algn="ctr">
-                      <a:solidFill>
-                        <a:srgbClr val="C8D6E5"/>
-                      </a:solidFill>
-                      <a:prstDash val="solid"/>
-                      <a:round/>
-                      <a:headEnd type="none" w="med" len="med"/>
-                      <a:tailEnd type="none" w="med" len="med"/>
-                    </a:lnL>
-                    <a:lnR w="12700" cap="flat" cmpd="sng" algn="ctr">
-                      <a:solidFill>
-                        <a:srgbClr val="C8D6E5"/>
-                      </a:solidFill>
-                      <a:prstDash val="solid"/>
-                      <a:round/>
-                      <a:headEnd type="none" w="med" len="med"/>
-                      <a:tailEnd type="none" w="med" len="med"/>
-                    </a:lnR>
-                    <a:lnT w="12700" cap="flat" cmpd="sng" algn="ctr">
-                      <a:solidFill>
-                        <a:srgbClr val="C8D6E5"/>
-                      </a:solidFill>
-                      <a:prstDash val="solid"/>
-                      <a:round/>
-                      <a:headEnd type="none" w="med" len="med"/>
-                      <a:tailEnd type="none" w="med" len="med"/>
-                    </a:lnT>
-                    <a:lnB w="12700" cap="flat" cmpd="sng" algn="ctr">
-                      <a:solidFill>
-                        <a:srgbClr val="C8D6E5"/>
-                      </a:solidFill>
-                      <a:prstDash val="solid"/>
-                      <a:round/>
-                      <a:headEnd type="none" w="med" len="med"/>
-                      <a:tailEnd type="none" w="med" len="med"/>
-                    </a:lnB>
-                    <a:solidFill>
-                      <a:srgbClr val="1A3A5C"/>
-                    </a:solidFill>
-                  </a:tcPr>
-                </a:tc>
-                <a:extLst>
-                  <a:ext uri="{0D108BD9-81ED-4DB2-BD59-A6C34878D82A}">
-                    <a16:rowId xmlns:a16="http://schemas.microsoft.com/office/drawing/2014/main" val="10000"/>
-                  </a:ext>
-                </a:extLst>
-              </a:tr>
-              <a:tr h="621792">
-                <a:tc>
-                  <a:txBody>
-                    <a:bodyPr/>
-                    <a:lstStyle/>
-                    <a:p>
-                      <a:pPr marL="0" indent="0">
-                        <a:buNone/>
-                      </a:pPr>
-                      <a:r>
-                        <a:rPr lang="en-US" sz="2000" dirty="0">
-                          <a:solidFill>
-                            <a:srgbClr val="1C1C1C"/>
-                          </a:solidFill>
-                          <a:latin typeface="Calibri" pitchFamily="34" charset="0"/>
-                          <a:ea typeface="Calibri" pitchFamily="34" charset="-122"/>
-                          <a:cs typeface="Calibri" pitchFamily="34" charset="-120"/>
-                        </a:rPr>
-                        <a:t>Pocket Passer vs. Game Manager</a:t>
-                      </a:r>
-                      <a:endParaRPr lang="en-US" sz="2000" dirty="0">
-                        <a:latin typeface="Calibri" charset="0"/>
-                        <a:ea typeface="Calibri" charset="0"/>
-                        <a:cs typeface="Calibri" charset="0"/>
-                      </a:endParaRPr>
-                    </a:p>
-                  </a:txBody>
-                  <a:tcPr>
-                    <a:lnL w="12700" cap="flat" cmpd="sng" algn="ctr">
-                      <a:solidFill>
-                        <a:srgbClr val="C8D6E5"/>
-                      </a:solidFill>
-                      <a:prstDash val="solid"/>
-                      <a:round/>
-                      <a:headEnd type="none" w="med" len="med"/>
-                      <a:tailEnd type="none" w="med" len="med"/>
-                    </a:lnL>
-                    <a:lnR w="12700" cap="flat" cmpd="sng" algn="ctr">
-                      <a:solidFill>
-                        <a:srgbClr val="C8D6E5"/>
-                      </a:solidFill>
-                      <a:prstDash val="solid"/>
-                      <a:round/>
-                      <a:headEnd type="none" w="med" len="med"/>
-                      <a:tailEnd type="none" w="med" len="med"/>
-                    </a:lnR>
-                    <a:lnT w="12700" cap="flat" cmpd="sng" algn="ctr">
-                      <a:solidFill>
-                        <a:srgbClr val="C8D6E5"/>
-                      </a:solidFill>
-                      <a:prstDash val="solid"/>
-                      <a:round/>
-                      <a:headEnd type="none" w="med" len="med"/>
-                      <a:tailEnd type="none" w="med" len="med"/>
-                    </a:lnT>
-                    <a:lnB w="12700" cap="flat" cmpd="sng" algn="ctr">
-                      <a:solidFill>
-                        <a:srgbClr val="C8D6E5"/>
-                      </a:solidFill>
-                      <a:prstDash val="solid"/>
-                      <a:round/>
-                      <a:headEnd type="none" w="med" len="med"/>
-                      <a:tailEnd type="none" w="med" len="med"/>
-                    </a:lnB>
-                    <a:solidFill>
-                      <a:srgbClr val="F5F9FF"/>
-                    </a:solidFill>
-                  </a:tcPr>
-                </a:tc>
-                <a:tc>
-                  <a:txBody>
-                    <a:bodyPr/>
-                    <a:lstStyle/>
-                    <a:p>
-                      <a:pPr marL="0" indent="0" algn="ctr">
-                        <a:buNone/>
-                      </a:pPr>
-                      <a:r>
-                        <a:rPr lang="en-US" sz="2000" dirty="0">
-                          <a:solidFill>
-                            <a:srgbClr val="B71C1C"/>
-                          </a:solidFill>
-                          <a:latin typeface="Calibri" pitchFamily="34" charset="0"/>
-                          <a:ea typeface="Calibri" pitchFamily="34" charset="-122"/>
-                          <a:cs typeface="Calibri" pitchFamily="34" charset="-120"/>
-                        </a:rPr>
-                        <a:t>&lt; 0.001</a:t>
-                      </a:r>
-                      <a:endParaRPr lang="en-US" sz="2000" dirty="0">
-                        <a:latin typeface="Calibri" charset="0"/>
-                        <a:ea typeface="Calibri" charset="0"/>
-                        <a:cs typeface="Calibri" charset="0"/>
-                      </a:endParaRPr>
-                    </a:p>
-                  </a:txBody>
-                  <a:tcPr>
-                    <a:lnL w="12700" cap="flat" cmpd="sng" algn="ctr">
-                      <a:solidFill>
-                        <a:srgbClr val="C8D6E5"/>
-                      </a:solidFill>
-                      <a:prstDash val="solid"/>
-                      <a:round/>
-                      <a:headEnd type="none" w="med" len="med"/>
-                      <a:tailEnd type="none" w="med" len="med"/>
-                    </a:lnL>
-                    <a:lnR w="12700" cap="flat" cmpd="sng" algn="ctr">
-                      <a:solidFill>
-                        <a:srgbClr val="C8D6E5"/>
-                      </a:solidFill>
-                      <a:prstDash val="solid"/>
-                      <a:round/>
-                      <a:headEnd type="none" w="med" len="med"/>
-                      <a:tailEnd type="none" w="med" len="med"/>
-                    </a:lnR>
-                    <a:lnT w="12700" cap="flat" cmpd="sng" algn="ctr">
-                      <a:solidFill>
-                        <a:srgbClr val="C8D6E5"/>
-                      </a:solidFill>
-                      <a:prstDash val="solid"/>
-                      <a:round/>
-                      <a:headEnd type="none" w="med" len="med"/>
-                      <a:tailEnd type="none" w="med" len="med"/>
-                    </a:lnT>
-                    <a:lnB w="12700" cap="flat" cmpd="sng" algn="ctr">
-                      <a:solidFill>
-                        <a:srgbClr val="C8D6E5"/>
-                      </a:solidFill>
-                      <a:prstDash val="solid"/>
-                      <a:round/>
-                      <a:headEnd type="none" w="med" len="med"/>
-                      <a:tailEnd type="none" w="med" len="med"/>
-                    </a:lnB>
-                    <a:solidFill>
-                      <a:srgbClr val="F5F9FF"/>
-                    </a:solidFill>
-                  </a:tcPr>
-                </a:tc>
-                <a:tc>
-                  <a:txBody>
-                    <a:bodyPr/>
-                    <a:lstStyle/>
-                    <a:p>
-                      <a:pPr marL="0" indent="0" algn="ctr">
-                        <a:buNone/>
-                      </a:pPr>
-                      <a:r>
-                        <a:rPr lang="en-US" sz="2000" b="1" dirty="0">
-                          <a:solidFill>
-                            <a:srgbClr val="B71C1C"/>
-                          </a:solidFill>
-                          <a:latin typeface="Calibri" pitchFamily="34" charset="0"/>
-                          <a:ea typeface="Calibri" pitchFamily="34" charset="-122"/>
-                          <a:cs typeface="Calibri" pitchFamily="34" charset="-120"/>
-                        </a:rPr>
-                        <a:t>***</a:t>
-                      </a:r>
-                      <a:endParaRPr lang="en-US" sz="2000" dirty="0">
-                        <a:latin typeface="Calibri" charset="0"/>
-                        <a:ea typeface="Calibri" charset="0"/>
-                        <a:cs typeface="Calibri" charset="0"/>
-                      </a:endParaRPr>
-                    </a:p>
-                  </a:txBody>
-                  <a:tcPr>
-                    <a:lnL w="12700" cap="flat" cmpd="sng" algn="ctr">
-                      <a:solidFill>
-                        <a:srgbClr val="C8D6E5"/>
-                      </a:solidFill>
-                      <a:prstDash val="solid"/>
-                      <a:round/>
-                      <a:headEnd type="none" w="med" len="med"/>
-                      <a:tailEnd type="none" w="med" len="med"/>
-                    </a:lnL>
-                    <a:lnR w="12700" cap="flat" cmpd="sng" algn="ctr">
-                      <a:solidFill>
-                        <a:srgbClr val="C8D6E5"/>
-                      </a:solidFill>
-                      <a:prstDash val="solid"/>
-                      <a:round/>
-                      <a:headEnd type="none" w="med" len="med"/>
-                      <a:tailEnd type="none" w="med" len="med"/>
-                    </a:lnR>
-                    <a:lnT w="12700" cap="flat" cmpd="sng" algn="ctr">
-                      <a:solidFill>
-                        <a:srgbClr val="C8D6E5"/>
-                      </a:solidFill>
-                      <a:prstDash val="solid"/>
-                      <a:round/>
-                      <a:headEnd type="none" w="med" len="med"/>
-                      <a:tailEnd type="none" w="med" len="med"/>
-                    </a:lnT>
-                    <a:lnB w="12700" cap="flat" cmpd="sng" algn="ctr">
-                      <a:solidFill>
-                        <a:srgbClr val="C8D6E5"/>
-                      </a:solidFill>
-                      <a:prstDash val="solid"/>
-                      <a:round/>
-                      <a:headEnd type="none" w="med" len="med"/>
-                      <a:tailEnd type="none" w="med" len="med"/>
-                    </a:lnB>
-                    <a:solidFill>
-                      <a:srgbClr val="F5F9FF"/>
-                    </a:solidFill>
-                  </a:tcPr>
-                </a:tc>
-                <a:extLst>
-                  <a:ext uri="{0D108BD9-81ED-4DB2-BD59-A6C34878D82A}">
-                    <a16:rowId xmlns:a16="http://schemas.microsoft.com/office/drawing/2014/main" val="10001"/>
-                  </a:ext>
-                </a:extLst>
-              </a:tr>
-              <a:tr h="621792">
-                <a:tc>
-                  <a:txBody>
-                    <a:bodyPr/>
-                    <a:lstStyle/>
-                    <a:p>
-                      <a:pPr marL="0" indent="0">
-                        <a:buNone/>
-                      </a:pPr>
-                      <a:r>
-                        <a:rPr lang="en-US" sz="2000" dirty="0">
-                          <a:solidFill>
-                            <a:srgbClr val="1C1C1C"/>
-                          </a:solidFill>
-                          <a:latin typeface="Calibri" pitchFamily="34" charset="0"/>
-                          <a:ea typeface="Calibri" pitchFamily="34" charset="-122"/>
-                          <a:cs typeface="Calibri" pitchFamily="34" charset="-120"/>
-                        </a:rPr>
-                        <a:t>Pocket Passer vs. Gunslinger</a:t>
-                      </a:r>
-                      <a:endParaRPr lang="en-US" sz="2000" dirty="0">
-                        <a:latin typeface="Calibri" charset="0"/>
-                        <a:ea typeface="Calibri" charset="0"/>
-                        <a:cs typeface="Calibri" charset="0"/>
-                      </a:endParaRPr>
-                    </a:p>
-                  </a:txBody>
-                  <a:tcPr>
-                    <a:lnL w="12700" cap="flat" cmpd="sng" algn="ctr">
-                      <a:solidFill>
-                        <a:srgbClr val="C8D6E5"/>
-                      </a:solidFill>
-                      <a:prstDash val="solid"/>
-                      <a:round/>
-                      <a:headEnd type="none" w="med" len="med"/>
-                      <a:tailEnd type="none" w="med" len="med"/>
-                    </a:lnL>
-                    <a:lnR w="12700" cap="flat" cmpd="sng" algn="ctr">
-                      <a:solidFill>
-                        <a:srgbClr val="C8D6E5"/>
-                      </a:solidFill>
-                      <a:prstDash val="solid"/>
-                      <a:round/>
-                      <a:headEnd type="none" w="med" len="med"/>
-                      <a:tailEnd type="none" w="med" len="med"/>
-                    </a:lnR>
-                    <a:lnT w="12700" cap="flat" cmpd="sng" algn="ctr">
-                      <a:solidFill>
-                        <a:srgbClr val="C8D6E5"/>
-                      </a:solidFill>
-                      <a:prstDash val="solid"/>
-                      <a:round/>
-                      <a:headEnd type="none" w="med" len="med"/>
-                      <a:tailEnd type="none" w="med" len="med"/>
-                    </a:lnT>
-                    <a:lnB w="12700" cap="flat" cmpd="sng" algn="ctr">
-                      <a:solidFill>
-                        <a:srgbClr val="C8D6E5"/>
-                      </a:solidFill>
-                      <a:prstDash val="solid"/>
-                      <a:round/>
-                      <a:headEnd type="none" w="med" len="med"/>
-                      <a:tailEnd type="none" w="med" len="med"/>
-                    </a:lnB>
-                    <a:solidFill>
-                      <a:srgbClr val="FFFFFF"/>
-                    </a:solidFill>
-                  </a:tcPr>
-                </a:tc>
-                <a:tc>
-                  <a:txBody>
-                    <a:bodyPr/>
-                    <a:lstStyle/>
-                    <a:p>
-                      <a:pPr marL="0" indent="0" algn="ctr">
-                        <a:buNone/>
-                      </a:pPr>
-                      <a:r>
-                        <a:rPr lang="en-US" sz="2000" dirty="0">
-                          <a:solidFill>
-                            <a:srgbClr val="B71C1C"/>
-                          </a:solidFill>
-                          <a:latin typeface="Calibri" pitchFamily="34" charset="0"/>
-                          <a:ea typeface="Calibri" pitchFamily="34" charset="-122"/>
-                          <a:cs typeface="Calibri" pitchFamily="34" charset="-120"/>
-                        </a:rPr>
-                        <a:t>&lt; 0.001</a:t>
-                      </a:r>
-                      <a:endParaRPr lang="en-US" sz="2000" dirty="0">
-                        <a:latin typeface="Calibri" charset="0"/>
-                        <a:ea typeface="Calibri" charset="0"/>
-                        <a:cs typeface="Calibri" charset="0"/>
-                      </a:endParaRPr>
-                    </a:p>
-                  </a:txBody>
-                  <a:tcPr>
-                    <a:lnL w="12700" cap="flat" cmpd="sng" algn="ctr">
-                      <a:solidFill>
-                        <a:srgbClr val="C8D6E5"/>
-                      </a:solidFill>
-                      <a:prstDash val="solid"/>
-                      <a:round/>
-                      <a:headEnd type="none" w="med" len="med"/>
-                      <a:tailEnd type="none" w="med" len="med"/>
-                    </a:lnL>
-                    <a:lnR w="12700" cap="flat" cmpd="sng" algn="ctr">
-                      <a:solidFill>
-                        <a:srgbClr val="C8D6E5"/>
-                      </a:solidFill>
-                      <a:prstDash val="solid"/>
-                      <a:round/>
-                      <a:headEnd type="none" w="med" len="med"/>
-                      <a:tailEnd type="none" w="med" len="med"/>
-                    </a:lnR>
-                    <a:lnT w="12700" cap="flat" cmpd="sng" algn="ctr">
-                      <a:solidFill>
-                        <a:srgbClr val="C8D6E5"/>
-                      </a:solidFill>
-                      <a:prstDash val="solid"/>
-                      <a:round/>
-                      <a:headEnd type="none" w="med" len="med"/>
-                      <a:tailEnd type="none" w="med" len="med"/>
-                    </a:lnT>
-                    <a:lnB w="12700" cap="flat" cmpd="sng" algn="ctr">
-                      <a:solidFill>
-                        <a:srgbClr val="C8D6E5"/>
-                      </a:solidFill>
-                      <a:prstDash val="solid"/>
-                      <a:round/>
-                      <a:headEnd type="none" w="med" len="med"/>
-                      <a:tailEnd type="none" w="med" len="med"/>
-                    </a:lnB>
-                    <a:solidFill>
-                      <a:srgbClr val="FFFFFF"/>
-                    </a:solidFill>
-                  </a:tcPr>
-                </a:tc>
-                <a:tc>
-                  <a:txBody>
-                    <a:bodyPr/>
-                    <a:lstStyle/>
-                    <a:p>
-                      <a:pPr marL="0" indent="0" algn="ctr">
-                        <a:buNone/>
-                      </a:pPr>
-                      <a:r>
-                        <a:rPr lang="en-US" sz="2000" b="1" dirty="0">
-                          <a:solidFill>
-                            <a:srgbClr val="B71C1C"/>
-                          </a:solidFill>
-                          <a:latin typeface="Calibri" pitchFamily="34" charset="0"/>
-                          <a:ea typeface="Calibri" pitchFamily="34" charset="-122"/>
-                          <a:cs typeface="Calibri" pitchFamily="34" charset="-120"/>
-                        </a:rPr>
-                        <a:t>***</a:t>
-                      </a:r>
-                      <a:endParaRPr lang="en-US" sz="2000" dirty="0">
-                        <a:latin typeface="Calibri" charset="0"/>
-                        <a:ea typeface="Calibri" charset="0"/>
-                        <a:cs typeface="Calibri" charset="0"/>
-                      </a:endParaRPr>
-                    </a:p>
-                  </a:txBody>
-                  <a:tcPr>
-                    <a:lnL w="12700" cap="flat" cmpd="sng" algn="ctr">
-                      <a:solidFill>
-                        <a:srgbClr val="C8D6E5"/>
-                      </a:solidFill>
-                      <a:prstDash val="solid"/>
-                      <a:round/>
-                      <a:headEnd type="none" w="med" len="med"/>
-                      <a:tailEnd type="none" w="med" len="med"/>
-                    </a:lnL>
-                    <a:lnR w="12700" cap="flat" cmpd="sng" algn="ctr">
-                      <a:solidFill>
-                        <a:srgbClr val="C8D6E5"/>
-                      </a:solidFill>
-                      <a:prstDash val="solid"/>
-                      <a:round/>
-                      <a:headEnd type="none" w="med" len="med"/>
-                      <a:tailEnd type="none" w="med" len="med"/>
-                    </a:lnR>
-                    <a:lnT w="12700" cap="flat" cmpd="sng" algn="ctr">
-                      <a:solidFill>
-                        <a:srgbClr val="C8D6E5"/>
-                      </a:solidFill>
-                      <a:prstDash val="solid"/>
-                      <a:round/>
-                      <a:headEnd type="none" w="med" len="med"/>
-                      <a:tailEnd type="none" w="med" len="med"/>
-                    </a:lnT>
-                    <a:lnB w="12700" cap="flat" cmpd="sng" algn="ctr">
-                      <a:solidFill>
-                        <a:srgbClr val="C8D6E5"/>
-                      </a:solidFill>
-                      <a:prstDash val="solid"/>
-                      <a:round/>
-                      <a:headEnd type="none" w="med" len="med"/>
-                      <a:tailEnd type="none" w="med" len="med"/>
-                    </a:lnB>
-                    <a:solidFill>
-                      <a:srgbClr val="FFFFFF"/>
-                    </a:solidFill>
-                  </a:tcPr>
-                </a:tc>
-                <a:extLst>
-                  <a:ext uri="{0D108BD9-81ED-4DB2-BD59-A6C34878D82A}">
-                    <a16:rowId xmlns:a16="http://schemas.microsoft.com/office/drawing/2014/main" val="10002"/>
-                  </a:ext>
-                </a:extLst>
-              </a:tr>
-              <a:tr h="621792">
-                <a:tc>
-                  <a:txBody>
-                    <a:bodyPr/>
-                    <a:lstStyle/>
-                    <a:p>
-                      <a:pPr marL="0" indent="0">
-                        <a:buNone/>
-                      </a:pPr>
-                      <a:r>
-                        <a:rPr lang="en-US" sz="2000" dirty="0">
-                          <a:solidFill>
-                            <a:srgbClr val="1C1C1C"/>
-                          </a:solidFill>
-                          <a:latin typeface="Calibri" pitchFamily="34" charset="0"/>
-                          <a:ea typeface="Calibri" pitchFamily="34" charset="-122"/>
-                          <a:cs typeface="Calibri" pitchFamily="34" charset="-120"/>
-                        </a:rPr>
-                        <a:t>Pocket Passer vs. Dual Threat</a:t>
-                      </a:r>
-                      <a:endParaRPr lang="en-US" sz="2000" dirty="0">
-                        <a:latin typeface="Calibri" charset="0"/>
-                        <a:ea typeface="Calibri" charset="0"/>
-                        <a:cs typeface="Calibri" charset="0"/>
-                      </a:endParaRPr>
-                    </a:p>
-                  </a:txBody>
-                  <a:tcPr>
-                    <a:lnL w="12700" cap="flat" cmpd="sng" algn="ctr">
-                      <a:solidFill>
-                        <a:srgbClr val="C8D6E5"/>
-                      </a:solidFill>
-                      <a:prstDash val="solid"/>
-                      <a:round/>
-                      <a:headEnd type="none" w="med" len="med"/>
-                      <a:tailEnd type="none" w="med" len="med"/>
-                    </a:lnL>
-                    <a:lnR w="12700" cap="flat" cmpd="sng" algn="ctr">
-                      <a:solidFill>
-                        <a:srgbClr val="C8D6E5"/>
-                      </a:solidFill>
-                      <a:prstDash val="solid"/>
-                      <a:round/>
-                      <a:headEnd type="none" w="med" len="med"/>
-                      <a:tailEnd type="none" w="med" len="med"/>
-                    </a:lnR>
-                    <a:lnT w="12700" cap="flat" cmpd="sng" algn="ctr">
-                      <a:solidFill>
-                        <a:srgbClr val="C8D6E5"/>
-                      </a:solidFill>
-                      <a:prstDash val="solid"/>
-                      <a:round/>
-                      <a:headEnd type="none" w="med" len="med"/>
-                      <a:tailEnd type="none" w="med" len="med"/>
-                    </a:lnT>
-                    <a:lnB w="12700" cap="flat" cmpd="sng" algn="ctr">
-                      <a:solidFill>
-                        <a:srgbClr val="C8D6E5"/>
-                      </a:solidFill>
-                      <a:prstDash val="solid"/>
-                      <a:round/>
-                      <a:headEnd type="none" w="med" len="med"/>
-                      <a:tailEnd type="none" w="med" len="med"/>
-                    </a:lnB>
-                    <a:solidFill>
-                      <a:srgbClr val="F5F9FF"/>
-                    </a:solidFill>
-                  </a:tcPr>
-                </a:tc>
-                <a:tc>
-                  <a:txBody>
-                    <a:bodyPr/>
-                    <a:lstStyle/>
-                    <a:p>
-                      <a:pPr marL="0" indent="0" algn="ctr">
-                        <a:buNone/>
-                      </a:pPr>
-                      <a:r>
-                        <a:rPr lang="en-US" sz="2000" dirty="0">
-                          <a:solidFill>
-                            <a:srgbClr val="5A6A7A"/>
-                          </a:solidFill>
-                          <a:latin typeface="Calibri" pitchFamily="34" charset="0"/>
-                          <a:ea typeface="Calibri" pitchFamily="34" charset="-122"/>
-                          <a:cs typeface="Calibri" pitchFamily="34" charset="-120"/>
-                        </a:rPr>
-                        <a:t>0.9439</a:t>
-                      </a:r>
-                      <a:endParaRPr lang="en-US" sz="2000" dirty="0">
-                        <a:latin typeface="Calibri" charset="0"/>
-                        <a:ea typeface="Calibri" charset="0"/>
-                        <a:cs typeface="Calibri" charset="0"/>
-                      </a:endParaRPr>
-                    </a:p>
-                  </a:txBody>
-                  <a:tcPr>
-                    <a:lnL w="12700" cap="flat" cmpd="sng" algn="ctr">
-                      <a:solidFill>
-                        <a:srgbClr val="C8D6E5"/>
-                      </a:solidFill>
-                      <a:prstDash val="solid"/>
-                      <a:round/>
-                      <a:headEnd type="none" w="med" len="med"/>
-                      <a:tailEnd type="none" w="med" len="med"/>
-                    </a:lnL>
-                    <a:lnR w="12700" cap="flat" cmpd="sng" algn="ctr">
-                      <a:solidFill>
-                        <a:srgbClr val="C8D6E5"/>
-                      </a:solidFill>
-                      <a:prstDash val="solid"/>
-                      <a:round/>
-                      <a:headEnd type="none" w="med" len="med"/>
-                      <a:tailEnd type="none" w="med" len="med"/>
-                    </a:lnR>
-                    <a:lnT w="12700" cap="flat" cmpd="sng" algn="ctr">
-                      <a:solidFill>
-                        <a:srgbClr val="C8D6E5"/>
-                      </a:solidFill>
-                      <a:prstDash val="solid"/>
-                      <a:round/>
-                      <a:headEnd type="none" w="med" len="med"/>
-                      <a:tailEnd type="none" w="med" len="med"/>
-                    </a:lnT>
-                    <a:lnB w="12700" cap="flat" cmpd="sng" algn="ctr">
-                      <a:solidFill>
-                        <a:srgbClr val="C8D6E5"/>
-                      </a:solidFill>
-                      <a:prstDash val="solid"/>
-                      <a:round/>
-                      <a:headEnd type="none" w="med" len="med"/>
-                      <a:tailEnd type="none" w="med" len="med"/>
-                    </a:lnB>
-                    <a:solidFill>
-                      <a:srgbClr val="F5F9FF"/>
-                    </a:solidFill>
-                  </a:tcPr>
-                </a:tc>
-                <a:tc>
-                  <a:txBody>
-                    <a:bodyPr/>
-                    <a:lstStyle/>
-                    <a:p>
-                      <a:pPr marL="0" indent="0" algn="ctr">
-                        <a:buNone/>
-                      </a:pPr>
-                      <a:r>
-                        <a:rPr lang="en-US" sz="2000" dirty="0">
-                          <a:solidFill>
-                            <a:srgbClr val="5A6A7A"/>
-                          </a:solidFill>
-                          <a:latin typeface="Calibri" pitchFamily="34" charset="0"/>
-                          <a:ea typeface="Calibri" pitchFamily="34" charset="-122"/>
-                          <a:cs typeface="Calibri" pitchFamily="34" charset="-120"/>
-                        </a:rPr>
-                        <a:t>ns</a:t>
-                      </a:r>
-                      <a:endParaRPr lang="en-US" sz="2000" dirty="0">
-                        <a:latin typeface="Calibri" charset="0"/>
-                        <a:ea typeface="Calibri" charset="0"/>
-                        <a:cs typeface="Calibri" charset="0"/>
-                      </a:endParaRPr>
-                    </a:p>
-                  </a:txBody>
-                  <a:tcPr>
-                    <a:lnL w="12700" cap="flat" cmpd="sng" algn="ctr">
-                      <a:solidFill>
-                        <a:srgbClr val="C8D6E5"/>
-                      </a:solidFill>
-                      <a:prstDash val="solid"/>
-                      <a:round/>
-                      <a:headEnd type="none" w="med" len="med"/>
-                      <a:tailEnd type="none" w="med" len="med"/>
-                    </a:lnL>
-                    <a:lnR w="12700" cap="flat" cmpd="sng" algn="ctr">
-                      <a:solidFill>
-                        <a:srgbClr val="C8D6E5"/>
-                      </a:solidFill>
-                      <a:prstDash val="solid"/>
-                      <a:round/>
-                      <a:headEnd type="none" w="med" len="med"/>
-                      <a:tailEnd type="none" w="med" len="med"/>
-                    </a:lnR>
-                    <a:lnT w="12700" cap="flat" cmpd="sng" algn="ctr">
-                      <a:solidFill>
-                        <a:srgbClr val="C8D6E5"/>
-                      </a:solidFill>
-                      <a:prstDash val="solid"/>
-                      <a:round/>
-                      <a:headEnd type="none" w="med" len="med"/>
-                      <a:tailEnd type="none" w="med" len="med"/>
-                    </a:lnT>
-                    <a:lnB w="12700" cap="flat" cmpd="sng" algn="ctr">
-                      <a:solidFill>
-                        <a:srgbClr val="C8D6E5"/>
-                      </a:solidFill>
-                      <a:prstDash val="solid"/>
-                      <a:round/>
-                      <a:headEnd type="none" w="med" len="med"/>
-                      <a:tailEnd type="none" w="med" len="med"/>
-                    </a:lnB>
-                    <a:solidFill>
-                      <a:srgbClr val="F5F9FF"/>
-                    </a:solidFill>
-                  </a:tcPr>
-                </a:tc>
-                <a:extLst>
-                  <a:ext uri="{0D108BD9-81ED-4DB2-BD59-A6C34878D82A}">
-                    <a16:rowId xmlns:a16="http://schemas.microsoft.com/office/drawing/2014/main" val="10003"/>
-                  </a:ext>
-                </a:extLst>
-              </a:tr>
-              <a:tr h="621792">
-                <a:tc>
-                  <a:txBody>
-                    <a:bodyPr/>
-                    <a:lstStyle/>
-                    <a:p>
-                      <a:pPr marL="0" indent="0">
-                        <a:buNone/>
-                      </a:pPr>
-                      <a:r>
-                        <a:rPr lang="en-US" sz="2000" dirty="0">
-                          <a:solidFill>
-                            <a:srgbClr val="1C1C1C"/>
-                          </a:solidFill>
-                          <a:latin typeface="Calibri" pitchFamily="34" charset="0"/>
-                          <a:ea typeface="Calibri" pitchFamily="34" charset="-122"/>
-                          <a:cs typeface="Calibri" pitchFamily="34" charset="-120"/>
-                        </a:rPr>
-                        <a:t>Game Manager vs. Dual Threat</a:t>
-                      </a:r>
-                      <a:endParaRPr lang="en-US" sz="2000" dirty="0">
-                        <a:latin typeface="Calibri" charset="0"/>
-                        <a:ea typeface="Calibri" charset="0"/>
-                        <a:cs typeface="Calibri" charset="0"/>
-                      </a:endParaRPr>
-                    </a:p>
-                  </a:txBody>
-                  <a:tcPr>
-                    <a:lnL w="12700" cap="flat" cmpd="sng" algn="ctr">
-                      <a:solidFill>
-                        <a:srgbClr val="C8D6E5"/>
-                      </a:solidFill>
-                      <a:prstDash val="solid"/>
-                      <a:round/>
-                      <a:headEnd type="none" w="med" len="med"/>
-                      <a:tailEnd type="none" w="med" len="med"/>
-                    </a:lnL>
-                    <a:lnR w="12700" cap="flat" cmpd="sng" algn="ctr">
-                      <a:solidFill>
-                        <a:srgbClr val="C8D6E5"/>
-                      </a:solidFill>
-                      <a:prstDash val="solid"/>
-                      <a:round/>
-                      <a:headEnd type="none" w="med" len="med"/>
-                      <a:tailEnd type="none" w="med" len="med"/>
-                    </a:lnR>
-                    <a:lnT w="12700" cap="flat" cmpd="sng" algn="ctr">
-                      <a:solidFill>
-                        <a:srgbClr val="C8D6E5"/>
-                      </a:solidFill>
-                      <a:prstDash val="solid"/>
-                      <a:round/>
-                      <a:headEnd type="none" w="med" len="med"/>
-                      <a:tailEnd type="none" w="med" len="med"/>
-                    </a:lnT>
-                    <a:lnB w="12700" cap="flat" cmpd="sng" algn="ctr">
-                      <a:solidFill>
-                        <a:srgbClr val="C8D6E5"/>
-                      </a:solidFill>
-                      <a:prstDash val="solid"/>
-                      <a:round/>
-                      <a:headEnd type="none" w="med" len="med"/>
-                      <a:tailEnd type="none" w="med" len="med"/>
-                    </a:lnB>
-                    <a:solidFill>
-                      <a:srgbClr val="FFFFFF"/>
-                    </a:solidFill>
-                  </a:tcPr>
-                </a:tc>
-                <a:tc>
-                  <a:txBody>
-                    <a:bodyPr/>
-                    <a:lstStyle/>
-                    <a:p>
-                      <a:pPr marL="0" indent="0" algn="ctr">
-                        <a:buNone/>
-                      </a:pPr>
-                      <a:r>
-                        <a:rPr lang="en-US" sz="2000" dirty="0">
-                          <a:solidFill>
-                            <a:srgbClr val="B71C1C"/>
-                          </a:solidFill>
-                          <a:latin typeface="Calibri" pitchFamily="34" charset="0"/>
-                          <a:ea typeface="Calibri" pitchFamily="34" charset="-122"/>
-                          <a:cs typeface="Calibri" pitchFamily="34" charset="-120"/>
-                        </a:rPr>
-                        <a:t>&lt; 0.001</a:t>
-                      </a:r>
-                      <a:endParaRPr lang="en-US" sz="2000" dirty="0">
-                        <a:latin typeface="Calibri" charset="0"/>
-                        <a:ea typeface="Calibri" charset="0"/>
-                        <a:cs typeface="Calibri" charset="0"/>
-                      </a:endParaRPr>
-                    </a:p>
-                  </a:txBody>
-                  <a:tcPr>
-                    <a:lnL w="12700" cap="flat" cmpd="sng" algn="ctr">
-                      <a:solidFill>
-                        <a:srgbClr val="C8D6E5"/>
-                      </a:solidFill>
-                      <a:prstDash val="solid"/>
-                      <a:round/>
-                      <a:headEnd type="none" w="med" len="med"/>
-                      <a:tailEnd type="none" w="med" len="med"/>
-                    </a:lnL>
-                    <a:lnR w="12700" cap="flat" cmpd="sng" algn="ctr">
-                      <a:solidFill>
-                        <a:srgbClr val="C8D6E5"/>
-                      </a:solidFill>
-                      <a:prstDash val="solid"/>
-                      <a:round/>
-                      <a:headEnd type="none" w="med" len="med"/>
-                      <a:tailEnd type="none" w="med" len="med"/>
-                    </a:lnR>
-                    <a:lnT w="12700" cap="flat" cmpd="sng" algn="ctr">
-                      <a:solidFill>
-                        <a:srgbClr val="C8D6E5"/>
-                      </a:solidFill>
-                      <a:prstDash val="solid"/>
-                      <a:round/>
-                      <a:headEnd type="none" w="med" len="med"/>
-                      <a:tailEnd type="none" w="med" len="med"/>
-                    </a:lnT>
-                    <a:lnB w="12700" cap="flat" cmpd="sng" algn="ctr">
-                      <a:solidFill>
-                        <a:srgbClr val="C8D6E5"/>
-                      </a:solidFill>
-                      <a:prstDash val="solid"/>
-                      <a:round/>
-                      <a:headEnd type="none" w="med" len="med"/>
-                      <a:tailEnd type="none" w="med" len="med"/>
-                    </a:lnB>
-                    <a:solidFill>
-                      <a:srgbClr val="FFFFFF"/>
-                    </a:solidFill>
-                  </a:tcPr>
-                </a:tc>
-                <a:tc>
-                  <a:txBody>
-                    <a:bodyPr/>
-                    <a:lstStyle/>
-                    <a:p>
-                      <a:pPr marL="0" indent="0" algn="ctr">
-                        <a:buNone/>
-                      </a:pPr>
-                      <a:r>
-                        <a:rPr lang="en-US" sz="2000" b="1" dirty="0">
-                          <a:solidFill>
-                            <a:srgbClr val="B71C1C"/>
-                          </a:solidFill>
-                          <a:latin typeface="Calibri" pitchFamily="34" charset="0"/>
-                          <a:ea typeface="Calibri" pitchFamily="34" charset="-122"/>
-                          <a:cs typeface="Calibri" pitchFamily="34" charset="-120"/>
-                        </a:rPr>
-                        <a:t>***</a:t>
-                      </a:r>
-                      <a:endParaRPr lang="en-US" sz="2000" dirty="0">
-                        <a:latin typeface="Calibri" charset="0"/>
-                        <a:ea typeface="Calibri" charset="0"/>
-                        <a:cs typeface="Calibri" charset="0"/>
-                      </a:endParaRPr>
-                    </a:p>
-                  </a:txBody>
-                  <a:tcPr>
-                    <a:lnL w="12700" cap="flat" cmpd="sng" algn="ctr">
-                      <a:solidFill>
-                        <a:srgbClr val="C8D6E5"/>
-                      </a:solidFill>
-                      <a:prstDash val="solid"/>
-                      <a:round/>
-                      <a:headEnd type="none" w="med" len="med"/>
-                      <a:tailEnd type="none" w="med" len="med"/>
-                    </a:lnL>
-                    <a:lnR w="12700" cap="flat" cmpd="sng" algn="ctr">
-                      <a:solidFill>
-                        <a:srgbClr val="C8D6E5"/>
-                      </a:solidFill>
-                      <a:prstDash val="solid"/>
-                      <a:round/>
-                      <a:headEnd type="none" w="med" len="med"/>
-                      <a:tailEnd type="none" w="med" len="med"/>
-                    </a:lnR>
-                    <a:lnT w="12700" cap="flat" cmpd="sng" algn="ctr">
-                      <a:solidFill>
-                        <a:srgbClr val="C8D6E5"/>
-                      </a:solidFill>
-                      <a:prstDash val="solid"/>
-                      <a:round/>
-                      <a:headEnd type="none" w="med" len="med"/>
-                      <a:tailEnd type="none" w="med" len="med"/>
-                    </a:lnT>
-                    <a:lnB w="12700" cap="flat" cmpd="sng" algn="ctr">
-                      <a:solidFill>
-                        <a:srgbClr val="C8D6E5"/>
-                      </a:solidFill>
-                      <a:prstDash val="solid"/>
-                      <a:round/>
-                      <a:headEnd type="none" w="med" len="med"/>
-                      <a:tailEnd type="none" w="med" len="med"/>
-                    </a:lnB>
-                    <a:solidFill>
-                      <a:srgbClr val="FFFFFF"/>
-                    </a:solidFill>
-                  </a:tcPr>
-                </a:tc>
-                <a:extLst>
-                  <a:ext uri="{0D108BD9-81ED-4DB2-BD59-A6C34878D82A}">
-                    <a16:rowId xmlns:a16="http://schemas.microsoft.com/office/drawing/2014/main" val="10004"/>
-                  </a:ext>
-                </a:extLst>
-              </a:tr>
-              <a:tr h="621792">
-                <a:tc>
-                  <a:txBody>
-                    <a:bodyPr/>
-                    <a:lstStyle/>
-                    <a:p>
-                      <a:pPr marL="0" indent="0">
-                        <a:buNone/>
-                      </a:pPr>
-                      <a:r>
-                        <a:rPr lang="en-US" sz="2000" dirty="0">
-                          <a:solidFill>
-                            <a:srgbClr val="1C1C1C"/>
-                          </a:solidFill>
-                          <a:latin typeface="Calibri" pitchFamily="34" charset="0"/>
-                          <a:ea typeface="Calibri" pitchFamily="34" charset="-122"/>
-                          <a:cs typeface="Calibri" pitchFamily="34" charset="-120"/>
-                        </a:rPr>
-                        <a:t>Gunslinger vs. Dual Threat</a:t>
-                      </a:r>
-                      <a:endParaRPr lang="en-US" sz="2000" dirty="0">
-                        <a:latin typeface="Calibri" charset="0"/>
-                        <a:ea typeface="Calibri" charset="0"/>
-                        <a:cs typeface="Calibri" charset="0"/>
-                      </a:endParaRPr>
-                    </a:p>
-                  </a:txBody>
-                  <a:tcPr>
-                    <a:lnL w="12700" cap="flat" cmpd="sng" algn="ctr">
-                      <a:solidFill>
-                        <a:srgbClr val="C8D6E5"/>
-                      </a:solidFill>
-                      <a:prstDash val="solid"/>
-                      <a:round/>
-                      <a:headEnd type="none" w="med" len="med"/>
-                      <a:tailEnd type="none" w="med" len="med"/>
-                    </a:lnL>
-                    <a:lnR w="12700" cap="flat" cmpd="sng" algn="ctr">
-                      <a:solidFill>
-                        <a:srgbClr val="C8D6E5"/>
-                      </a:solidFill>
-                      <a:prstDash val="solid"/>
-                      <a:round/>
-                      <a:headEnd type="none" w="med" len="med"/>
-                      <a:tailEnd type="none" w="med" len="med"/>
-                    </a:lnR>
-                    <a:lnT w="12700" cap="flat" cmpd="sng" algn="ctr">
-                      <a:solidFill>
-                        <a:srgbClr val="C8D6E5"/>
-                      </a:solidFill>
-                      <a:prstDash val="solid"/>
-                      <a:round/>
-                      <a:headEnd type="none" w="med" len="med"/>
-                      <a:tailEnd type="none" w="med" len="med"/>
-                    </a:lnT>
-                    <a:lnB w="12700" cap="flat" cmpd="sng" algn="ctr">
-                      <a:solidFill>
-                        <a:srgbClr val="C8D6E5"/>
-                      </a:solidFill>
-                      <a:prstDash val="solid"/>
-                      <a:round/>
-                      <a:headEnd type="none" w="med" len="med"/>
-                      <a:tailEnd type="none" w="med" len="med"/>
-                    </a:lnB>
-                    <a:solidFill>
-                      <a:srgbClr val="F5F9FF"/>
-                    </a:solidFill>
-                  </a:tcPr>
-                </a:tc>
-                <a:tc>
-                  <a:txBody>
-                    <a:bodyPr/>
-                    <a:lstStyle/>
-                    <a:p>
-                      <a:pPr marL="0" indent="0" algn="ctr">
-                        <a:buNone/>
-                      </a:pPr>
-                      <a:r>
-                        <a:rPr lang="en-US" sz="2000" dirty="0">
-                          <a:solidFill>
-                            <a:srgbClr val="B71C1C"/>
-                          </a:solidFill>
-                          <a:latin typeface="Calibri" pitchFamily="34" charset="0"/>
-                          <a:ea typeface="Calibri" pitchFamily="34" charset="-122"/>
-                          <a:cs typeface="Calibri" pitchFamily="34" charset="-120"/>
-                        </a:rPr>
-                        <a:t>&lt; 0.001</a:t>
-                      </a:r>
-                      <a:endParaRPr lang="en-US" sz="2000" dirty="0">
-                        <a:latin typeface="Calibri" charset="0"/>
-                        <a:ea typeface="Calibri" charset="0"/>
-                        <a:cs typeface="Calibri" charset="0"/>
-                      </a:endParaRPr>
-                    </a:p>
-                  </a:txBody>
-                  <a:tcPr>
-                    <a:lnL w="12700" cap="flat" cmpd="sng" algn="ctr">
-                      <a:solidFill>
-                        <a:srgbClr val="C8D6E5"/>
-                      </a:solidFill>
-                      <a:prstDash val="solid"/>
-                      <a:round/>
-                      <a:headEnd type="none" w="med" len="med"/>
-                      <a:tailEnd type="none" w="med" len="med"/>
-                    </a:lnL>
-                    <a:lnR w="12700" cap="flat" cmpd="sng" algn="ctr">
-                      <a:solidFill>
-                        <a:srgbClr val="C8D6E5"/>
-                      </a:solidFill>
-                      <a:prstDash val="solid"/>
-                      <a:round/>
-                      <a:headEnd type="none" w="med" len="med"/>
-                      <a:tailEnd type="none" w="med" len="med"/>
-                    </a:lnR>
-                    <a:lnT w="12700" cap="flat" cmpd="sng" algn="ctr">
-                      <a:solidFill>
-                        <a:srgbClr val="C8D6E5"/>
-                      </a:solidFill>
-                      <a:prstDash val="solid"/>
-                      <a:round/>
-                      <a:headEnd type="none" w="med" len="med"/>
-                      <a:tailEnd type="none" w="med" len="med"/>
-                    </a:lnT>
-                    <a:lnB w="12700" cap="flat" cmpd="sng" algn="ctr">
-                      <a:solidFill>
-                        <a:srgbClr val="C8D6E5"/>
-                      </a:solidFill>
-                      <a:prstDash val="solid"/>
-                      <a:round/>
-                      <a:headEnd type="none" w="med" len="med"/>
-                      <a:tailEnd type="none" w="med" len="med"/>
-                    </a:lnB>
-                    <a:solidFill>
-                      <a:srgbClr val="F5F9FF"/>
-                    </a:solidFill>
-                  </a:tcPr>
-                </a:tc>
-                <a:tc>
-                  <a:txBody>
-                    <a:bodyPr/>
-                    <a:lstStyle/>
-                    <a:p>
-                      <a:pPr marL="0" indent="0" algn="ctr">
-                        <a:buNone/>
-                      </a:pPr>
-                      <a:r>
-                        <a:rPr lang="en-US" sz="2000" b="1" dirty="0">
-                          <a:solidFill>
-                            <a:srgbClr val="B71C1C"/>
-                          </a:solidFill>
-                          <a:latin typeface="Calibri" pitchFamily="34" charset="0"/>
-                          <a:ea typeface="Calibri" pitchFamily="34" charset="-122"/>
-                          <a:cs typeface="Calibri" pitchFamily="34" charset="-120"/>
-                        </a:rPr>
-                        <a:t>***</a:t>
-                      </a:r>
-                      <a:endParaRPr lang="en-US" sz="2000" dirty="0">
-                        <a:latin typeface="Calibri" charset="0"/>
-                        <a:ea typeface="Calibri" charset="0"/>
-                        <a:cs typeface="Calibri" charset="0"/>
-                      </a:endParaRPr>
-                    </a:p>
-                  </a:txBody>
-                  <a:tcPr>
-                    <a:lnL w="12700" cap="flat" cmpd="sng" algn="ctr">
-                      <a:solidFill>
-                        <a:srgbClr val="C8D6E5"/>
-                      </a:solidFill>
-                      <a:prstDash val="solid"/>
-                      <a:round/>
-                      <a:headEnd type="none" w="med" len="med"/>
-                      <a:tailEnd type="none" w="med" len="med"/>
-                    </a:lnL>
-                    <a:lnR w="12700" cap="flat" cmpd="sng" algn="ctr">
-                      <a:solidFill>
-                        <a:srgbClr val="C8D6E5"/>
-                      </a:solidFill>
-                      <a:prstDash val="solid"/>
-                      <a:round/>
-                      <a:headEnd type="none" w="med" len="med"/>
-                      <a:tailEnd type="none" w="med" len="med"/>
-                    </a:lnR>
-                    <a:lnT w="12700" cap="flat" cmpd="sng" algn="ctr">
-                      <a:solidFill>
-                        <a:srgbClr val="C8D6E5"/>
-                      </a:solidFill>
-                      <a:prstDash val="solid"/>
-                      <a:round/>
-                      <a:headEnd type="none" w="med" len="med"/>
-                      <a:tailEnd type="none" w="med" len="med"/>
-                    </a:lnT>
-                    <a:lnB w="12700" cap="flat" cmpd="sng" algn="ctr">
-                      <a:solidFill>
-                        <a:srgbClr val="C8D6E5"/>
-                      </a:solidFill>
-                      <a:prstDash val="solid"/>
-                      <a:round/>
-                      <a:headEnd type="none" w="med" len="med"/>
-                      <a:tailEnd type="none" w="med" len="med"/>
-                    </a:lnB>
-                    <a:solidFill>
-                      <a:srgbClr val="F5F9FF"/>
-                    </a:solidFill>
-                  </a:tcPr>
-                </a:tc>
-                <a:extLst>
-                  <a:ext uri="{0D108BD9-81ED-4DB2-BD59-A6C34878D82A}">
-                    <a16:rowId xmlns:a16="http://schemas.microsoft.com/office/drawing/2014/main" val="10005"/>
-                  </a:ext>
-                </a:extLst>
-              </a:tr>
-            </a:tbl>
-          </a:graphicData>
-        </a:graphic>
-      </p:graphicFrame>
       <p:sp>
         <p:nvSpPr>
           <p:cNvPr id="92" name="Shape 86"/>
@@ -8452,7 +6597,7 @@
               <a:buNone/>
             </a:pPr>
             <a:r>
-              <a:rPr lang="en-US" sz="2000" dirty="0">
+              <a:rPr lang="en-US" sz="2300" dirty="0">
                 <a:solidFill>
                   <a:srgbClr val="1C1C1C"/>
                 </a:solidFill>
@@ -8460,9 +6605,9 @@
                 <a:ea typeface="Calibri" pitchFamily="34" charset="-122"/>
                 <a:cs typeface="Calibri" pitchFamily="34" charset="-120"/>
               </a:rPr>
-              <a:t>Pocket Passers and Dual Threats show no significant difference in QBR (p = 0.9439), despite radically different playing styles — elite efficiency is achievable through passing volume or rushing dominance equally.</a:t>
+              <a:t>Pocket Passers and Dual Threats show no significant difference in QBR (p = 0.9439), despite radically different playing styles, elite efficiency is achievable through passing volume or rushing dominance equally.</a:t>
             </a:r>
-            <a:endParaRPr lang="en-US" sz="2000" dirty="0"/>
+            <a:endParaRPr lang="en-US" sz="2300" dirty="0"/>
           </a:p>
         </p:txBody>
       </p:sp>
@@ -8474,7 +6619,7 @@
         </p:nvSpPr>
         <p:spPr>
           <a:xfrm>
-            <a:off x="20482560" y="12920472"/>
+            <a:off x="20601432" y="12865608"/>
             <a:ext cx="11978640" cy="658368"/>
           </a:xfrm>
           <a:prstGeom prst="rect">
@@ -8506,7 +6651,7 @@
         </p:nvSpPr>
         <p:spPr>
           <a:xfrm>
-            <a:off x="20482560" y="12920472"/>
+            <a:off x="20601432" y="12865608"/>
             <a:ext cx="128016" cy="658368"/>
           </a:xfrm>
           <a:prstGeom prst="rect">
@@ -8538,7 +6683,7 @@
         </p:nvSpPr>
         <p:spPr>
           <a:xfrm>
-            <a:off x="20711160" y="12920472"/>
+            <a:off x="20830032" y="12865608"/>
             <a:ext cx="11750040" cy="658368"/>
           </a:xfrm>
           <a:prstGeom prst="rect">
@@ -8573,15 +6718,21 @@
         <p:nvGraphicFramePr>
           <p:cNvPr id="98" name="Chart 0"/>
           <p:cNvGraphicFramePr/>
-          <p:nvPr/>
+          <p:nvPr>
+            <p:extLst>
+              <p:ext uri="{D42A27DB-BD31-4B8C-83A1-F6EECF244321}">
+                <p14:modId xmlns:p14="http://schemas.microsoft.com/office/powerpoint/2010/main" val="307877449"/>
+              </p:ext>
+            </p:extLst>
+          </p:nvPr>
         </p:nvGraphicFramePr>
         <p:xfrm>
-          <a:off x="20482560" y="13697712"/>
+          <a:off x="20601432" y="13642848"/>
           <a:ext cx="11978640" cy="3200400"/>
         </p:xfrm>
         <a:graphic>
           <a:graphicData uri="http://schemas.openxmlformats.org/drawingml/2006/chart">
-            <c:chart xmlns:c="http://schemas.openxmlformats.org/drawingml/2006/chart" xmlns:r="http://schemas.openxmlformats.org/officeDocument/2006/relationships" r:id="rId4"/>
+            <c:chart xmlns:c="http://schemas.openxmlformats.org/drawingml/2006/chart" xmlns:r="http://schemas.openxmlformats.org/officeDocument/2006/relationships" r:id="rId3"/>
           </a:graphicData>
         </a:graphic>
       </p:graphicFrame>
@@ -8593,7 +6744,7 @@
         </p:nvSpPr>
         <p:spPr>
           <a:xfrm>
-            <a:off x="20482560" y="17035272"/>
+            <a:off x="20570952" y="20855866"/>
             <a:ext cx="11978640" cy="548640"/>
           </a:xfrm>
           <a:prstGeom prst="rect">
@@ -8639,6 +6790,36 @@
           <p:nvPr/>
         </p:nvPicPr>
         <p:blipFill>
+          <a:blip r:embed="rId4"/>
+          <a:stretch>
+            <a:fillRect/>
+          </a:stretch>
+        </p:blipFill>
+        <p:spPr>
+          <a:xfrm>
+            <a:off x="20466280" y="18114264"/>
+            <a:ext cx="2724912" cy="2724912"/>
+          </a:xfrm>
+          <a:prstGeom prst="rect">
+            <a:avLst/>
+          </a:prstGeom>
+        </p:spPr>
+      </p:pic>
+      <p:pic>
+        <p:nvPicPr>
+          <p:cNvPr id="102" name="Picture 101" descr="A screenshot of a computer screen&#10;&#10;AI-generated content may be incorrect.">
+            <a:extLst>
+              <a:ext uri="{FF2B5EF4-FFF2-40B4-BE49-F238E27FC236}">
+                <a16:creationId xmlns:a16="http://schemas.microsoft.com/office/drawing/2014/main" id="{7521B27D-88BB-230F-9928-D2B2C226930F}"/>
+              </a:ext>
+            </a:extLst>
+          </p:cNvPr>
+          <p:cNvPicPr>
+            <a:picLocks noChangeAspect="1"/>
+          </p:cNvPicPr>
+          <p:nvPr/>
+        </p:nvPicPr>
+        <p:blipFill>
           <a:blip r:embed="rId5"/>
           <a:stretch>
             <a:fillRect/>
@@ -8646,14 +6827,128 @@
         </p:blipFill>
         <p:spPr>
           <a:xfrm>
-            <a:off x="338328" y="18685764"/>
-            <a:ext cx="2724912" cy="2724912"/>
+            <a:off x="20646536" y="5571684"/>
+            <a:ext cx="11650688" cy="5218236"/>
           </a:xfrm>
           <a:prstGeom prst="rect">
             <a:avLst/>
           </a:prstGeom>
         </p:spPr>
       </p:pic>
+      <p:pic>
+        <p:nvPicPr>
+          <p:cNvPr id="104" name="Picture 103" descr="A diagram of a number of clusters&#10;&#10;AI-generated content may be incorrect.">
+            <a:extLst>
+              <a:ext uri="{FF2B5EF4-FFF2-40B4-BE49-F238E27FC236}">
+                <a16:creationId xmlns:a16="http://schemas.microsoft.com/office/drawing/2014/main" id="{30358F56-129A-2CA0-CD70-E943061F04B4}"/>
+              </a:ext>
+            </a:extLst>
+          </p:cNvPr>
+          <p:cNvPicPr>
+            <a:picLocks noChangeAspect="1"/>
+          </p:cNvPicPr>
+          <p:nvPr/>
+        </p:nvPicPr>
+        <p:blipFill>
+          <a:blip r:embed="rId6"/>
+          <a:stretch>
+            <a:fillRect/>
+          </a:stretch>
+        </p:blipFill>
+        <p:spPr>
+          <a:xfrm>
+            <a:off x="9707662" y="3794760"/>
+            <a:ext cx="9662595" cy="6857612"/>
+          </a:xfrm>
+          <a:prstGeom prst="rect">
+            <a:avLst/>
+          </a:prstGeom>
+        </p:spPr>
+      </p:pic>
+      <p:sp>
+        <p:nvSpPr>
+          <p:cNvPr id="107" name="Shape 77">
+            <a:extLst>
+              <a:ext uri="{FF2B5EF4-FFF2-40B4-BE49-F238E27FC236}">
+                <a16:creationId xmlns:a16="http://schemas.microsoft.com/office/drawing/2014/main" id="{4E7C0029-F861-1FB6-B4EB-ADD196C74034}"/>
+              </a:ext>
+            </a:extLst>
+          </p:cNvPr>
+          <p:cNvSpPr/>
+          <p:nvPr/>
+        </p:nvSpPr>
+        <p:spPr>
+          <a:xfrm>
+            <a:off x="20711160" y="17300448"/>
+            <a:ext cx="11978640" cy="658368"/>
+          </a:xfrm>
+          <a:prstGeom prst="rect">
+            <a:avLst/>
+          </a:prstGeom>
+          <a:solidFill>
+            <a:srgbClr val="1A3A5C"/>
+          </a:solidFill>
+          <a:ln w="12700">
+            <a:solidFill>
+              <a:srgbClr val="1A3A5C"/>
+            </a:solidFill>
+            <a:prstDash val="solid"/>
+          </a:ln>
+        </p:spPr>
+        <p:txBody>
+          <a:bodyPr/>
+          <a:lstStyle/>
+          <a:p>
+            <a:r>
+              <a:rPr lang="en-US" sz="2200" b="1" dirty="0">
+                <a:solidFill>
+                  <a:schemeClr val="bg1"/>
+                </a:solidFill>
+                <a:latin typeface="Trebuchet MS" panose="020B0703020202090204" pitchFamily="34" charset="0"/>
+              </a:rPr>
+              <a:t>CODE AND REPRODUCIBILITY</a:t>
+            </a:r>
+          </a:p>
+        </p:txBody>
+      </p:sp>
+      <p:sp>
+        <p:nvSpPr>
+          <p:cNvPr id="108" name="Shape 78">
+            <a:extLst>
+              <a:ext uri="{FF2B5EF4-FFF2-40B4-BE49-F238E27FC236}">
+                <a16:creationId xmlns:a16="http://schemas.microsoft.com/office/drawing/2014/main" id="{8546B00F-F9A4-3194-CF84-E3290EFA5902}"/>
+              </a:ext>
+            </a:extLst>
+          </p:cNvPr>
+          <p:cNvSpPr/>
+          <p:nvPr/>
+        </p:nvSpPr>
+        <p:spPr>
+          <a:xfrm>
+            <a:off x="20564856" y="17314164"/>
+            <a:ext cx="128016" cy="658368"/>
+          </a:xfrm>
+          <a:prstGeom prst="rect">
+            <a:avLst/>
+          </a:prstGeom>
+          <a:solidFill>
+            <a:srgbClr val="F4A620"/>
+          </a:solidFill>
+          <a:ln w="12700">
+            <a:solidFill>
+              <a:srgbClr val="F4A620"/>
+            </a:solidFill>
+            <a:prstDash val="solid"/>
+          </a:ln>
+        </p:spPr>
+        <p:txBody>
+          <a:bodyPr/>
+          <a:lstStyle/>
+          <a:p>
+            <a:endParaRPr lang="en-US"/>
+          </a:p>
+        </p:txBody>
+      </p:sp>
     </p:spTree>
   </p:cSld>
   <p:clrMapOvr>
